--- a/data-eng/decks/w4d2s4.pptx
+++ b/data-eng/decks/w4d2s4.pptx
@@ -15,6 +15,7 @@
     <p:sldId id="263" r:id="rId14"/>
     <p:sldId id="264" r:id="rId15"/>
     <p:sldId id="265" r:id="rId16"/>
+    <p:sldId id="266" r:id="rId17"/>
   </p:sldIdLst>
   <p:sldSz cx="18288000" cy="10287000" type="screen4x3"/>
   <p:notesSz cx="6858000" cy="9144000"/>
@@ -3099,7 +3100,7 @@
       <p:grpSpPr/>
       <p:sp>
         <p:nvSpPr>
-          <p:cNvPr id="2" name="Oval 1"/>
+          <p:cNvPr id="2" name="deckgen:decor"/>
           <p:cNvSpPr/>
           <p:nvPr/>
         </p:nvSpPr>
@@ -3129,7 +3130,7 @@
       </p:sp>
       <p:sp>
         <p:nvSpPr>
-          <p:cNvPr id="3" name="Oval 2"/>
+          <p:cNvPr id="3" name="deckgen:decor"/>
           <p:cNvSpPr/>
           <p:nvPr/>
         </p:nvSpPr>
@@ -3159,7 +3160,7 @@
       </p:sp>
       <p:sp>
         <p:nvSpPr>
-          <p:cNvPr id="4" name="Oval 3"/>
+          <p:cNvPr id="4" name="deckgen:decor"/>
           <p:cNvSpPr/>
           <p:nvPr/>
         </p:nvSpPr>
@@ -3189,7 +3190,7 @@
       </p:sp>
       <p:sp>
         <p:nvSpPr>
-          <p:cNvPr id="5" name="Rectangle 4"/>
+          <p:cNvPr id="5" name="deckgen:decor"/>
           <p:cNvSpPr/>
           <p:nvPr/>
         </p:nvSpPr>
@@ -3219,7 +3220,7 @@
       </p:sp>
       <p:sp>
         <p:nvSpPr>
-          <p:cNvPr id="6" name="Oval 5"/>
+          <p:cNvPr id="6" name="deckgen:decor"/>
           <p:cNvSpPr/>
           <p:nvPr/>
         </p:nvSpPr>
@@ -3249,7 +3250,7 @@
       </p:sp>
       <p:sp>
         <p:nvSpPr>
-          <p:cNvPr id="7" name="Oval 6"/>
+          <p:cNvPr id="7" name="deckgen:decor"/>
           <p:cNvSpPr/>
           <p:nvPr/>
         </p:nvSpPr>
@@ -3279,7 +3280,7 @@
       </p:sp>
       <p:sp>
         <p:nvSpPr>
-          <p:cNvPr id="8" name="Oval 7"/>
+          <p:cNvPr id="8" name="deckgen:decor"/>
           <p:cNvSpPr/>
           <p:nvPr/>
         </p:nvSpPr>
@@ -3309,7 +3310,7 @@
       </p:sp>
       <p:sp>
         <p:nvSpPr>
-          <p:cNvPr id="9" name="Oval 8"/>
+          <p:cNvPr id="9" name="deckgen:decor"/>
           <p:cNvSpPr/>
           <p:nvPr/>
         </p:nvSpPr>
@@ -3339,7 +3340,7 @@
       </p:sp>
       <p:sp>
         <p:nvSpPr>
-          <p:cNvPr id="10" name="Rectangle 9"/>
+          <p:cNvPr id="10" name="deckgen:decor"/>
           <p:cNvSpPr/>
           <p:nvPr/>
         </p:nvSpPr>
@@ -3599,7 +3600,1150 @@
       <p:grpSpPr/>
       <p:sp>
         <p:nvSpPr>
-          <p:cNvPr id="2" name="Oval 1"/>
+          <p:cNvPr id="2" name="deckgen:decor"/>
+          <p:cNvSpPr/>
+          <p:nvPr/>
+        </p:nvSpPr>
+        <p:spPr>
+          <a:xfrm>
+            <a:off x="15811500" y="8382000"/>
+            <a:ext cx="4953000" cy="4953000"/>
+          </a:xfrm>
+          <a:prstGeom prst="ellipse">
+            <a:avLst/>
+          </a:prstGeom>
+          <a:solidFill>
+            <a:srgbClr val="F3F6FC"/>
+          </a:solidFill>
+          <a:ln>
+            <a:noFill/>
+          </a:ln>
+          <a:effectLst/>
+        </p:spPr>
+        <p:txBody>
+          <a:bodyPr rtlCol="0" anchor="ctr" wrap="square"/>
+          <a:lstStyle/>
+          <a:p>
+            <a:pPr algn="ctr"/>
+          </a:p>
+        </p:txBody>
+      </p:sp>
+      <p:sp>
+        <p:nvSpPr>
+          <p:cNvPr id="3" name="deckgen:decor"/>
+          <p:cNvSpPr/>
+          <p:nvPr/>
+        </p:nvSpPr>
+        <p:spPr>
+          <a:xfrm>
+            <a:off x="16859250" y="9429750"/>
+            <a:ext cx="2857500" cy="2857500"/>
+          </a:xfrm>
+          <a:prstGeom prst="ellipse">
+            <a:avLst/>
+          </a:prstGeom>
+          <a:solidFill>
+            <a:srgbClr val="FFFFFF"/>
+          </a:solidFill>
+          <a:ln>
+            <a:noFill/>
+          </a:ln>
+          <a:effectLst/>
+        </p:spPr>
+        <p:txBody>
+          <a:bodyPr rtlCol="0" anchor="ctr" wrap="square"/>
+          <a:lstStyle/>
+          <a:p>
+            <a:pPr algn="ctr"/>
+          </a:p>
+        </p:txBody>
+      </p:sp>
+      <p:sp>
+        <p:nvSpPr>
+          <p:cNvPr id="4" name="deckgen:decor"/>
+          <p:cNvSpPr/>
+          <p:nvPr/>
+        </p:nvSpPr>
+        <p:spPr>
+          <a:xfrm>
+            <a:off x="-1428750" y="1428750"/>
+            <a:ext cx="2857500" cy="2857500"/>
+          </a:xfrm>
+          <a:prstGeom prst="ellipse">
+            <a:avLst/>
+          </a:prstGeom>
+          <a:solidFill>
+            <a:srgbClr val="F7F8FA"/>
+          </a:solidFill>
+          <a:ln>
+            <a:noFill/>
+          </a:ln>
+          <a:effectLst/>
+        </p:spPr>
+        <p:txBody>
+          <a:bodyPr rtlCol="0" anchor="ctr" wrap="square"/>
+          <a:lstStyle/>
+          <a:p>
+            <a:pPr algn="ctr"/>
+          </a:p>
+        </p:txBody>
+      </p:sp>
+      <p:sp>
+        <p:nvSpPr>
+          <p:cNvPr id="5" name="TextBox 4"/>
+          <p:cNvSpPr txBox="1"/>
+          <p:nvPr/>
+        </p:nvSpPr>
+        <p:spPr>
+          <a:xfrm>
+            <a:off x="1143000" y="838200"/>
+            <a:ext cx="16002000" cy="342900"/>
+          </a:xfrm>
+          <a:prstGeom prst="rect">
+            <a:avLst/>
+          </a:prstGeom>
+          <a:noFill/>
+        </p:spPr>
+        <p:txBody>
+          <a:bodyPr wrap="square" lIns="0" rIns="0" tIns="0" bIns="0" anchor="t">
+            <a:spAutoFit/>
+          </a:bodyPr>
+          <a:lstStyle/>
+          <a:p>
+            <a:pPr algn="l">
+              <a:lnSpc>
+                <a:spcPct val="100000"/>
+              </a:lnSpc>
+            </a:pPr>
+            <a:r>
+              <a:rPr sz="1950" b="1" spc="160">
+                <a:solidFill>
+                  <a:srgbClr val="1E5BC6"/>
+                </a:solidFill>
+                <a:latin typeface="Pretendard"/>
+                <a:ea typeface="Pretendard"/>
+                <a:cs typeface="Pretendard"/>
+              </a:rPr>
+              <a:t>다음 회차 예고</a:t>
+            </a:r>
+          </a:p>
+        </p:txBody>
+      </p:sp>
+      <p:sp>
+        <p:nvSpPr>
+          <p:cNvPr id="6" name="TextBox 5"/>
+          <p:cNvSpPr txBox="1"/>
+          <p:nvPr/>
+        </p:nvSpPr>
+        <p:spPr>
+          <a:xfrm>
+            <a:off x="1143000" y="1162050"/>
+            <a:ext cx="16002000" cy="762000"/>
+          </a:xfrm>
+          <a:prstGeom prst="rect">
+            <a:avLst/>
+          </a:prstGeom>
+          <a:noFill/>
+        </p:spPr>
+        <p:txBody>
+          <a:bodyPr wrap="square" lIns="0" rIns="0" tIns="0" bIns="0" anchor="t">
+            <a:spAutoFit/>
+          </a:bodyPr>
+          <a:lstStyle/>
+          <a:p>
+            <a:pPr algn="l">
+              <a:lnSpc>
+                <a:spcPct val="100000"/>
+              </a:lnSpc>
+            </a:pPr>
+            <a:r>
+              <a:rPr sz="5100" b="1">
+                <a:solidFill>
+                  <a:srgbClr val="0D2B5E"/>
+                </a:solidFill>
+                <a:latin typeface="Pretendard"/>
+                <a:ea typeface="Pretendard"/>
+                <a:cs typeface="Pretendard"/>
+              </a:rPr>
+              <a:t>4-3 · MinIO–Iceberg 데이터 파이프라인 구축</a:t>
+            </a:r>
+          </a:p>
+        </p:txBody>
+      </p:sp>
+      <p:sp>
+        <p:nvSpPr>
+          <p:cNvPr id="7" name="Rectangle 6"/>
+          <p:cNvSpPr/>
+          <p:nvPr/>
+        </p:nvSpPr>
+        <p:spPr>
+          <a:xfrm>
+            <a:off x="1143000" y="2038350"/>
+            <a:ext cx="16002000" cy="28575"/>
+          </a:xfrm>
+          <a:prstGeom prst="rect">
+            <a:avLst/>
+          </a:prstGeom>
+          <a:solidFill>
+            <a:srgbClr val="0D2B5E"/>
+          </a:solidFill>
+          <a:ln>
+            <a:noFill/>
+          </a:ln>
+          <a:effectLst/>
+        </p:spPr>
+        <p:txBody>
+          <a:bodyPr rtlCol="0" anchor="ctr" wrap="square"/>
+          <a:lstStyle/>
+          <a:p>
+            <a:pPr algn="ctr"/>
+          </a:p>
+        </p:txBody>
+      </p:sp>
+      <p:sp>
+        <p:nvSpPr>
+          <p:cNvPr id="8" name="Rounded Rectangle 7"/>
+          <p:cNvSpPr/>
+          <p:nvPr/>
+        </p:nvSpPr>
+        <p:spPr>
+          <a:xfrm>
+            <a:off x="1143000" y="3429000"/>
+            <a:ext cx="3714750" cy="2476500"/>
+          </a:xfrm>
+          <a:prstGeom prst="roundRect">
+            <a:avLst>
+              <a:gd name="adj" fmla="val 1923"/>
+            </a:avLst>
+          </a:prstGeom>
+          <a:solidFill>
+            <a:srgbClr val="FAFBFD"/>
+          </a:solidFill>
+          <a:ln w="9525">
+            <a:solidFill>
+              <a:srgbClr val="DCE1E8"/>
+            </a:solidFill>
+          </a:ln>
+          <a:effectLst/>
+        </p:spPr>
+        <p:txBody>
+          <a:bodyPr rtlCol="0" anchor="ctr" wrap="square"/>
+          <a:lstStyle/>
+          <a:p>
+            <a:pPr algn="ctr"/>
+          </a:p>
+        </p:txBody>
+      </p:sp>
+      <p:sp>
+        <p:nvSpPr>
+          <p:cNvPr id="9" name="Rectangle 8"/>
+          <p:cNvSpPr/>
+          <p:nvPr/>
+        </p:nvSpPr>
+        <p:spPr>
+          <a:xfrm>
+            <a:off x="1143000" y="3429000"/>
+            <a:ext cx="3714750" cy="47625"/>
+          </a:xfrm>
+          <a:prstGeom prst="rect">
+            <a:avLst/>
+          </a:prstGeom>
+          <a:solidFill>
+            <a:srgbClr val="1E5BC6"/>
+          </a:solidFill>
+          <a:ln>
+            <a:noFill/>
+          </a:ln>
+          <a:effectLst/>
+        </p:spPr>
+        <p:txBody>
+          <a:bodyPr rtlCol="0" anchor="ctr" wrap="square"/>
+          <a:lstStyle/>
+          <a:p>
+            <a:pPr algn="ctr"/>
+          </a:p>
+        </p:txBody>
+      </p:sp>
+      <p:sp>
+        <p:nvSpPr>
+          <p:cNvPr id="10" name="deckgen:ornament"/>
+          <p:cNvSpPr txBox="1"/>
+          <p:nvPr/>
+        </p:nvSpPr>
+        <p:spPr>
+          <a:xfrm>
+            <a:off x="4000500" y="3638550"/>
+            <a:ext cx="590550" cy="400050"/>
+          </a:xfrm>
+          <a:prstGeom prst="rect">
+            <a:avLst/>
+          </a:prstGeom>
+          <a:noFill/>
+        </p:spPr>
+        <p:txBody>
+          <a:bodyPr wrap="square" lIns="0" rIns="0" tIns="0" bIns="0" anchor="t">
+            <a:spAutoFit/>
+          </a:bodyPr>
+          <a:lstStyle/>
+          <a:p>
+            <a:pPr algn="r">
+              <a:lnSpc>
+                <a:spcPct val="100000"/>
+              </a:lnSpc>
+            </a:pPr>
+            <a:r>
+              <a:rPr sz="2550" b="1">
+                <a:solidFill>
+                  <a:srgbClr val="E4EBF4"/>
+                </a:solidFill>
+                <a:latin typeface="Pretendard"/>
+                <a:ea typeface="Pretendard"/>
+                <a:cs typeface="Pretendard"/>
+              </a:rPr>
+              <a:t>01</a:t>
+            </a:r>
+          </a:p>
+        </p:txBody>
+      </p:sp>
+      <p:sp>
+        <p:nvSpPr>
+          <p:cNvPr id="11" name="TextBox 10"/>
+          <p:cNvSpPr txBox="1"/>
+          <p:nvPr/>
+        </p:nvSpPr>
+        <p:spPr>
+          <a:xfrm>
+            <a:off x="1466850" y="3752850"/>
+            <a:ext cx="3067050" cy="1828800"/>
+          </a:xfrm>
+          <a:prstGeom prst="rect">
+            <a:avLst/>
+          </a:prstGeom>
+          <a:noFill/>
+        </p:spPr>
+        <p:txBody>
+          <a:bodyPr wrap="square" lIns="0" rIns="0" tIns="0" bIns="0" anchor="ctr">
+            <a:spAutoFit/>
+          </a:bodyPr>
+          <a:lstStyle/>
+          <a:p>
+            <a:pPr>
+              <a:lnSpc>
+                <a:spcPct val="115000"/>
+              </a:lnSpc>
+            </a:pPr>
+            <a:r>
+              <a:rPr sz="2700" b="1">
+                <a:solidFill>
+                  <a:srgbClr val="0D2B5E"/>
+                </a:solidFill>
+                <a:latin typeface="Pretendard"/>
+                <a:ea typeface="Pretendard"/>
+                <a:cs typeface="Pretendard"/>
+              </a:rPr>
+              <a:t>이론 1H</a:t>
+            </a:r>
+          </a:p>
+          <a:p>
+            <a:pPr>
+              <a:lnSpc>
+                <a:spcPct val="146000"/>
+              </a:lnSpc>
+              <a:spcBef>
+                <a:spcPts val="1050"/>
+              </a:spcBef>
+            </a:pPr>
+            <a:r>
+              <a:rPr sz="2025" b="0">
+                <a:solidFill>
+                  <a:srgbClr val="3D3D3D"/>
+                </a:solidFill>
+                <a:latin typeface="Pretendard"/>
+                <a:ea typeface="Pretendard"/>
+                <a:cs typeface="Pretendard"/>
+              </a:rPr>
+              <a:t>데이터 파이프라인</a:t>
+            </a:r>
+          </a:p>
+          <a:p>
+            <a:pPr>
+              <a:lnSpc>
+                <a:spcPct val="146000"/>
+              </a:lnSpc>
+            </a:pPr>
+            <a:r>
+              <a:rPr sz="2025" b="0">
+                <a:solidFill>
+                  <a:srgbClr val="3D3D3D"/>
+                </a:solidFill>
+                <a:latin typeface="Pretendard"/>
+                <a:ea typeface="Pretendard"/>
+                <a:cs typeface="Pretendard"/>
+              </a:rPr>
+              <a:t>설계 · 멱등성</a:t>
+            </a:r>
+          </a:p>
+        </p:txBody>
+      </p:sp>
+      <p:sp>
+        <p:nvSpPr>
+          <p:cNvPr id="12" name="Rounded Rectangle 11"/>
+          <p:cNvSpPr/>
+          <p:nvPr/>
+        </p:nvSpPr>
+        <p:spPr>
+          <a:xfrm>
+            <a:off x="5238750" y="3429000"/>
+            <a:ext cx="3714750" cy="2476500"/>
+          </a:xfrm>
+          <a:prstGeom prst="roundRect">
+            <a:avLst>
+              <a:gd name="adj" fmla="val 1923"/>
+            </a:avLst>
+          </a:prstGeom>
+          <a:solidFill>
+            <a:srgbClr val="FAFBFD"/>
+          </a:solidFill>
+          <a:ln w="9525">
+            <a:solidFill>
+              <a:srgbClr val="DCE1E8"/>
+            </a:solidFill>
+          </a:ln>
+          <a:effectLst/>
+        </p:spPr>
+        <p:txBody>
+          <a:bodyPr rtlCol="0" anchor="ctr" wrap="square"/>
+          <a:lstStyle/>
+          <a:p>
+            <a:pPr algn="ctr"/>
+          </a:p>
+        </p:txBody>
+      </p:sp>
+      <p:sp>
+        <p:nvSpPr>
+          <p:cNvPr id="13" name="Rectangle 12"/>
+          <p:cNvSpPr/>
+          <p:nvPr/>
+        </p:nvSpPr>
+        <p:spPr>
+          <a:xfrm>
+            <a:off x="5238750" y="3429000"/>
+            <a:ext cx="3714750" cy="47625"/>
+          </a:xfrm>
+          <a:prstGeom prst="rect">
+            <a:avLst/>
+          </a:prstGeom>
+          <a:solidFill>
+            <a:srgbClr val="1E5BC6"/>
+          </a:solidFill>
+          <a:ln>
+            <a:noFill/>
+          </a:ln>
+          <a:effectLst/>
+        </p:spPr>
+        <p:txBody>
+          <a:bodyPr rtlCol="0" anchor="ctr" wrap="square"/>
+          <a:lstStyle/>
+          <a:p>
+            <a:pPr algn="ctr"/>
+          </a:p>
+        </p:txBody>
+      </p:sp>
+      <p:sp>
+        <p:nvSpPr>
+          <p:cNvPr id="14" name="deckgen:ornament"/>
+          <p:cNvSpPr txBox="1"/>
+          <p:nvPr/>
+        </p:nvSpPr>
+        <p:spPr>
+          <a:xfrm>
+            <a:off x="8096250" y="3638550"/>
+            <a:ext cx="590550" cy="400050"/>
+          </a:xfrm>
+          <a:prstGeom prst="rect">
+            <a:avLst/>
+          </a:prstGeom>
+          <a:noFill/>
+        </p:spPr>
+        <p:txBody>
+          <a:bodyPr wrap="square" lIns="0" rIns="0" tIns="0" bIns="0" anchor="t">
+            <a:spAutoFit/>
+          </a:bodyPr>
+          <a:lstStyle/>
+          <a:p>
+            <a:pPr algn="r">
+              <a:lnSpc>
+                <a:spcPct val="100000"/>
+              </a:lnSpc>
+            </a:pPr>
+            <a:r>
+              <a:rPr sz="2550" b="1">
+                <a:solidFill>
+                  <a:srgbClr val="E4EBF4"/>
+                </a:solidFill>
+                <a:latin typeface="Pretendard"/>
+                <a:ea typeface="Pretendard"/>
+                <a:cs typeface="Pretendard"/>
+              </a:rPr>
+              <a:t>02</a:t>
+            </a:r>
+          </a:p>
+        </p:txBody>
+      </p:sp>
+      <p:sp>
+        <p:nvSpPr>
+          <p:cNvPr id="15" name="TextBox 14"/>
+          <p:cNvSpPr txBox="1"/>
+          <p:nvPr/>
+        </p:nvSpPr>
+        <p:spPr>
+          <a:xfrm>
+            <a:off x="5562600" y="3752850"/>
+            <a:ext cx="3067050" cy="1828800"/>
+          </a:xfrm>
+          <a:prstGeom prst="rect">
+            <a:avLst/>
+          </a:prstGeom>
+          <a:noFill/>
+        </p:spPr>
+        <p:txBody>
+          <a:bodyPr wrap="square" lIns="0" rIns="0" tIns="0" bIns="0" anchor="ctr">
+            <a:spAutoFit/>
+          </a:bodyPr>
+          <a:lstStyle/>
+          <a:p>
+            <a:pPr>
+              <a:lnSpc>
+                <a:spcPct val="115000"/>
+              </a:lnSpc>
+            </a:pPr>
+            <a:r>
+              <a:rPr sz="2700" b="1">
+                <a:solidFill>
+                  <a:srgbClr val="0D2B5E"/>
+                </a:solidFill>
+                <a:latin typeface="Pretendard"/>
+                <a:ea typeface="Pretendard"/>
+                <a:cs typeface="Pretendard"/>
+              </a:rPr>
+              <a:t>실습 1H</a:t>
+            </a:r>
+          </a:p>
+          <a:p>
+            <a:pPr>
+              <a:lnSpc>
+                <a:spcPct val="146000"/>
+              </a:lnSpc>
+              <a:spcBef>
+                <a:spcPts val="1050"/>
+              </a:spcBef>
+            </a:pPr>
+            <a:r>
+              <a:rPr sz="2025" b="0">
+                <a:solidFill>
+                  <a:srgbClr val="3D3D3D"/>
+                </a:solidFill>
+                <a:latin typeface="Pretendard"/>
+                <a:ea typeface="Pretendard"/>
+                <a:cs typeface="Pretendard"/>
+              </a:rPr>
+              <a:t>원천 데이터</a:t>
+            </a:r>
+          </a:p>
+          <a:p>
+            <a:pPr>
+              <a:lnSpc>
+                <a:spcPct val="146000"/>
+              </a:lnSpc>
+            </a:pPr>
+            <a:r>
+              <a:rPr sz="2025" b="0">
+                <a:solidFill>
+                  <a:srgbClr val="3D3D3D"/>
+                </a:solidFill>
+                <a:latin typeface="Pretendard"/>
+                <a:ea typeface="Pretendard"/>
+                <a:cs typeface="Pretendard"/>
+              </a:rPr>
+              <a:t>raw 버킷 적재</a:t>
+            </a:r>
+          </a:p>
+        </p:txBody>
+      </p:sp>
+      <p:sp>
+        <p:nvSpPr>
+          <p:cNvPr id="16" name="Rounded Rectangle 15"/>
+          <p:cNvSpPr/>
+          <p:nvPr/>
+        </p:nvSpPr>
+        <p:spPr>
+          <a:xfrm>
+            <a:off x="9334500" y="3429000"/>
+            <a:ext cx="3714750" cy="2476500"/>
+          </a:xfrm>
+          <a:prstGeom prst="roundRect">
+            <a:avLst>
+              <a:gd name="adj" fmla="val 1923"/>
+            </a:avLst>
+          </a:prstGeom>
+          <a:solidFill>
+            <a:srgbClr val="0D2B5E"/>
+          </a:solidFill>
+          <a:ln w="9525">
+            <a:solidFill>
+              <a:srgbClr val="0D2B5E"/>
+            </a:solidFill>
+          </a:ln>
+          <a:effectLst/>
+        </p:spPr>
+        <p:txBody>
+          <a:bodyPr rtlCol="0" anchor="ctr" wrap="square"/>
+          <a:lstStyle/>
+          <a:p>
+            <a:pPr algn="ctr"/>
+          </a:p>
+        </p:txBody>
+      </p:sp>
+      <p:sp>
+        <p:nvSpPr>
+          <p:cNvPr id="17" name="Rectangle 16"/>
+          <p:cNvSpPr/>
+          <p:nvPr/>
+        </p:nvSpPr>
+        <p:spPr>
+          <a:xfrm>
+            <a:off x="9334500" y="3429000"/>
+            <a:ext cx="3714750" cy="47625"/>
+          </a:xfrm>
+          <a:prstGeom prst="rect">
+            <a:avLst/>
+          </a:prstGeom>
+          <a:solidFill>
+            <a:srgbClr val="1E5BC6"/>
+          </a:solidFill>
+          <a:ln>
+            <a:noFill/>
+          </a:ln>
+          <a:effectLst/>
+        </p:spPr>
+        <p:txBody>
+          <a:bodyPr rtlCol="0" anchor="ctr" wrap="square"/>
+          <a:lstStyle/>
+          <a:p>
+            <a:pPr algn="ctr"/>
+          </a:p>
+        </p:txBody>
+      </p:sp>
+      <p:sp>
+        <p:nvSpPr>
+          <p:cNvPr id="18" name="deckgen:ornament"/>
+          <p:cNvSpPr txBox="1"/>
+          <p:nvPr/>
+        </p:nvSpPr>
+        <p:spPr>
+          <a:xfrm>
+            <a:off x="12192000" y="3638550"/>
+            <a:ext cx="590550" cy="400050"/>
+          </a:xfrm>
+          <a:prstGeom prst="rect">
+            <a:avLst/>
+          </a:prstGeom>
+          <a:noFill/>
+        </p:spPr>
+        <p:txBody>
+          <a:bodyPr wrap="square" lIns="0" rIns="0" tIns="0" bIns="0" anchor="t">
+            <a:spAutoFit/>
+          </a:bodyPr>
+          <a:lstStyle/>
+          <a:p>
+            <a:pPr algn="r">
+              <a:lnSpc>
+                <a:spcPct val="100000"/>
+              </a:lnSpc>
+            </a:pPr>
+            <a:r>
+              <a:rPr sz="2550" b="1">
+                <a:solidFill>
+                  <a:srgbClr val="3B4B7C"/>
+                </a:solidFill>
+                <a:latin typeface="Pretendard"/>
+                <a:ea typeface="Pretendard"/>
+                <a:cs typeface="Pretendard"/>
+              </a:rPr>
+              <a:t>03</a:t>
+            </a:r>
+          </a:p>
+        </p:txBody>
+      </p:sp>
+      <p:sp>
+        <p:nvSpPr>
+          <p:cNvPr id="19" name="TextBox 18"/>
+          <p:cNvSpPr txBox="1"/>
+          <p:nvPr/>
+        </p:nvSpPr>
+        <p:spPr>
+          <a:xfrm>
+            <a:off x="9658350" y="3752850"/>
+            <a:ext cx="3067050" cy="1828800"/>
+          </a:xfrm>
+          <a:prstGeom prst="rect">
+            <a:avLst/>
+          </a:prstGeom>
+          <a:noFill/>
+        </p:spPr>
+        <p:txBody>
+          <a:bodyPr wrap="square" lIns="0" rIns="0" tIns="0" bIns="0" anchor="ctr">
+            <a:spAutoFit/>
+          </a:bodyPr>
+          <a:lstStyle/>
+          <a:p>
+            <a:pPr>
+              <a:lnSpc>
+                <a:spcPct val="115000"/>
+              </a:lnSpc>
+            </a:pPr>
+            <a:r>
+              <a:rPr sz="2700" b="1">
+                <a:solidFill>
+                  <a:srgbClr val="FFFFFF"/>
+                </a:solidFill>
+                <a:latin typeface="Pretendard"/>
+                <a:ea typeface="Pretendard"/>
+                <a:cs typeface="Pretendard"/>
+              </a:rPr>
+              <a:t>실습 1.5H</a:t>
+            </a:r>
+          </a:p>
+          <a:p>
+            <a:pPr>
+              <a:lnSpc>
+                <a:spcPct val="146000"/>
+              </a:lnSpc>
+              <a:spcBef>
+                <a:spcPts val="1050"/>
+              </a:spcBef>
+            </a:pPr>
+            <a:r>
+              <a:rPr sz="2025" b="0">
+                <a:solidFill>
+                  <a:srgbClr val="D9E2F0"/>
+                </a:solidFill>
+                <a:latin typeface="Pretendard"/>
+                <a:ea typeface="Pretendard"/>
+                <a:cs typeface="Pretendard"/>
+              </a:rPr>
+              <a:t>Spark ETL 과</a:t>
+            </a:r>
+          </a:p>
+          <a:p>
+            <a:pPr>
+              <a:lnSpc>
+                <a:spcPct val="146000"/>
+              </a:lnSpc>
+            </a:pPr>
+            <a:r>
+              <a:rPr sz="2025" b="0">
+                <a:solidFill>
+                  <a:srgbClr val="D9E2F0"/>
+                </a:solidFill>
+                <a:latin typeface="Pretendard"/>
+                <a:ea typeface="Pretendard"/>
+                <a:cs typeface="Pretendard"/>
+              </a:rPr>
+              <a:t>MERGE 적재</a:t>
+            </a:r>
+          </a:p>
+        </p:txBody>
+      </p:sp>
+      <p:sp>
+        <p:nvSpPr>
+          <p:cNvPr id="20" name="Rounded Rectangle 19"/>
+          <p:cNvSpPr/>
+          <p:nvPr/>
+        </p:nvSpPr>
+        <p:spPr>
+          <a:xfrm>
+            <a:off x="13430250" y="3429000"/>
+            <a:ext cx="3714750" cy="2476500"/>
+          </a:xfrm>
+          <a:prstGeom prst="roundRect">
+            <a:avLst>
+              <a:gd name="adj" fmla="val 1923"/>
+            </a:avLst>
+          </a:prstGeom>
+          <a:solidFill>
+            <a:srgbClr val="FAFBFD"/>
+          </a:solidFill>
+          <a:ln w="9525">
+            <a:solidFill>
+              <a:srgbClr val="DCE1E8"/>
+            </a:solidFill>
+          </a:ln>
+          <a:effectLst/>
+        </p:spPr>
+        <p:txBody>
+          <a:bodyPr rtlCol="0" anchor="ctr" wrap="square"/>
+          <a:lstStyle/>
+          <a:p>
+            <a:pPr algn="ctr"/>
+          </a:p>
+        </p:txBody>
+      </p:sp>
+      <p:sp>
+        <p:nvSpPr>
+          <p:cNvPr id="21" name="Rectangle 20"/>
+          <p:cNvSpPr/>
+          <p:nvPr/>
+        </p:nvSpPr>
+        <p:spPr>
+          <a:xfrm>
+            <a:off x="13430250" y="3429000"/>
+            <a:ext cx="3714750" cy="47625"/>
+          </a:xfrm>
+          <a:prstGeom prst="rect">
+            <a:avLst/>
+          </a:prstGeom>
+          <a:solidFill>
+            <a:srgbClr val="1E5BC6"/>
+          </a:solidFill>
+          <a:ln>
+            <a:noFill/>
+          </a:ln>
+          <a:effectLst/>
+        </p:spPr>
+        <p:txBody>
+          <a:bodyPr rtlCol="0" anchor="ctr" wrap="square"/>
+          <a:lstStyle/>
+          <a:p>
+            <a:pPr algn="ctr"/>
+          </a:p>
+        </p:txBody>
+      </p:sp>
+      <p:sp>
+        <p:nvSpPr>
+          <p:cNvPr id="22" name="deckgen:ornament"/>
+          <p:cNvSpPr txBox="1"/>
+          <p:nvPr/>
+        </p:nvSpPr>
+        <p:spPr>
+          <a:xfrm>
+            <a:off x="16287750" y="3638550"/>
+            <a:ext cx="590550" cy="400050"/>
+          </a:xfrm>
+          <a:prstGeom prst="rect">
+            <a:avLst/>
+          </a:prstGeom>
+          <a:noFill/>
+        </p:spPr>
+        <p:txBody>
+          <a:bodyPr wrap="square" lIns="0" rIns="0" tIns="0" bIns="0" anchor="t">
+            <a:spAutoFit/>
+          </a:bodyPr>
+          <a:lstStyle/>
+          <a:p>
+            <a:pPr algn="r">
+              <a:lnSpc>
+                <a:spcPct val="100000"/>
+              </a:lnSpc>
+            </a:pPr>
+            <a:r>
+              <a:rPr sz="2550" b="1">
+                <a:solidFill>
+                  <a:srgbClr val="E4EBF4"/>
+                </a:solidFill>
+                <a:latin typeface="Pretendard"/>
+                <a:ea typeface="Pretendard"/>
+                <a:cs typeface="Pretendard"/>
+              </a:rPr>
+              <a:t>04</a:t>
+            </a:r>
+          </a:p>
+        </p:txBody>
+      </p:sp>
+      <p:sp>
+        <p:nvSpPr>
+          <p:cNvPr id="23" name="TextBox 22"/>
+          <p:cNvSpPr txBox="1"/>
+          <p:nvPr/>
+        </p:nvSpPr>
+        <p:spPr>
+          <a:xfrm>
+            <a:off x="13754100" y="3752850"/>
+            <a:ext cx="3067050" cy="1828800"/>
+          </a:xfrm>
+          <a:prstGeom prst="rect">
+            <a:avLst/>
+          </a:prstGeom>
+          <a:noFill/>
+        </p:spPr>
+        <p:txBody>
+          <a:bodyPr wrap="square" lIns="0" rIns="0" tIns="0" bIns="0" anchor="ctr">
+            <a:spAutoFit/>
+          </a:bodyPr>
+          <a:lstStyle/>
+          <a:p>
+            <a:pPr>
+              <a:lnSpc>
+                <a:spcPct val="115000"/>
+              </a:lnSpc>
+            </a:pPr>
+            <a:r>
+              <a:rPr sz="2700" b="1">
+                <a:solidFill>
+                  <a:srgbClr val="0D2B5E"/>
+                </a:solidFill>
+                <a:latin typeface="Pretendard"/>
+                <a:ea typeface="Pretendard"/>
+                <a:cs typeface="Pretendard"/>
+              </a:rPr>
+              <a:t>정리 0.5H</a:t>
+            </a:r>
+          </a:p>
+          <a:p>
+            <a:pPr>
+              <a:lnSpc>
+                <a:spcPct val="146000"/>
+              </a:lnSpc>
+              <a:spcBef>
+                <a:spcPts val="1050"/>
+              </a:spcBef>
+            </a:pPr>
+            <a:r>
+              <a:rPr sz="2025" b="0">
+                <a:solidFill>
+                  <a:srgbClr val="3D3D3D"/>
+                </a:solidFill>
+                <a:latin typeface="Pretendard"/>
+                <a:ea typeface="Pretendard"/>
+                <a:cs typeface="Pretendard"/>
+              </a:rPr>
+              <a:t>스냅샷 이력으로</a:t>
+            </a:r>
+          </a:p>
+          <a:p>
+            <a:pPr>
+              <a:lnSpc>
+                <a:spcPct val="146000"/>
+              </a:lnSpc>
+            </a:pPr>
+            <a:r>
+              <a:rPr sz="2025" b="0">
+                <a:solidFill>
+                  <a:srgbClr val="3D3D3D"/>
+                </a:solidFill>
+                <a:latin typeface="Pretendard"/>
+                <a:ea typeface="Pretendard"/>
+                <a:cs typeface="Pretendard"/>
+              </a:rPr>
+              <a:t>적재 결과 검증</a:t>
+            </a:r>
+          </a:p>
+        </p:txBody>
+      </p:sp>
+      <p:sp>
+        <p:nvSpPr>
+          <p:cNvPr id="24" name="Rectangle 23"/>
+          <p:cNvSpPr/>
+          <p:nvPr/>
+        </p:nvSpPr>
+        <p:spPr>
+          <a:xfrm>
+            <a:off x="1143000" y="6496050"/>
+            <a:ext cx="47625" cy="723900"/>
+          </a:xfrm>
+          <a:prstGeom prst="rect">
+            <a:avLst/>
+          </a:prstGeom>
+          <a:solidFill>
+            <a:srgbClr val="1E5BC6"/>
+          </a:solidFill>
+          <a:ln>
+            <a:noFill/>
+          </a:ln>
+          <a:effectLst/>
+        </p:spPr>
+        <p:txBody>
+          <a:bodyPr rtlCol="0" anchor="ctr" wrap="square"/>
+          <a:lstStyle/>
+          <a:p>
+            <a:pPr algn="ctr"/>
+          </a:p>
+        </p:txBody>
+      </p:sp>
+      <p:sp>
+        <p:nvSpPr>
+          <p:cNvPr id="25" name="TextBox 24"/>
+          <p:cNvSpPr txBox="1"/>
+          <p:nvPr/>
+        </p:nvSpPr>
+        <p:spPr>
+          <a:xfrm>
+            <a:off x="1390650" y="6553200"/>
+            <a:ext cx="15754350" cy="762000"/>
+          </a:xfrm>
+          <a:prstGeom prst="rect">
+            <a:avLst/>
+          </a:prstGeom>
+          <a:noFill/>
+        </p:spPr>
+        <p:txBody>
+          <a:bodyPr wrap="square" lIns="0" rIns="0" tIns="0" bIns="0" anchor="t">
+            <a:spAutoFit/>
+          </a:bodyPr>
+          <a:lstStyle/>
+          <a:p>
+            <a:pPr algn="l">
+              <a:lnSpc>
+                <a:spcPct val="150000"/>
+              </a:lnSpc>
+            </a:pPr>
+            <a:r>
+              <a:rPr sz="2025" b="1">
+                <a:solidFill>
+                  <a:srgbClr val="7D7D7D"/>
+                </a:solidFill>
+                <a:latin typeface="Pretendard"/>
+                <a:ea typeface="Pretendard"/>
+                <a:cs typeface="Pretendard"/>
+              </a:rPr>
+              <a:t>준비: 오늘 구성 그대로 docker compose up -d 로 4개 컨테이너 · spark-sql 에서 orders 를 SELECT 해 살아 있는지 확인</a:t>
+            </a:r>
+          </a:p>
+        </p:txBody>
+      </p:sp>
+      <p:sp>
+        <p:nvSpPr>
+          <p:cNvPr id="26" name="Rectangle 25"/>
+          <p:cNvSpPr/>
+          <p:nvPr/>
+        </p:nvSpPr>
+        <p:spPr>
+          <a:xfrm>
+            <a:off x="1143000" y="8058150"/>
+            <a:ext cx="16002000" cy="9525"/>
+          </a:xfrm>
+          <a:prstGeom prst="rect">
+            <a:avLst/>
+          </a:prstGeom>
+          <a:solidFill>
+            <a:srgbClr val="DCE1E8"/>
+          </a:solidFill>
+          <a:ln>
+            <a:noFill/>
+          </a:ln>
+          <a:effectLst/>
+        </p:spPr>
+        <p:txBody>
+          <a:bodyPr rtlCol="0" anchor="ctr" wrap="square"/>
+          <a:lstStyle/>
+          <a:p>
+            <a:pPr algn="ctr"/>
+          </a:p>
+        </p:txBody>
+      </p:sp>
+      <p:sp>
+        <p:nvSpPr>
+          <p:cNvPr id="27" name="TextBox 26"/>
+          <p:cNvSpPr txBox="1"/>
+          <p:nvPr/>
+        </p:nvSpPr>
+        <p:spPr>
+          <a:xfrm>
+            <a:off x="1143000" y="8248650"/>
+            <a:ext cx="13335000" cy="323850"/>
+          </a:xfrm>
+          <a:prstGeom prst="rect">
+            <a:avLst/>
+          </a:prstGeom>
+          <a:noFill/>
+        </p:spPr>
+        <p:txBody>
+          <a:bodyPr wrap="square" lIns="0" rIns="0" tIns="0" bIns="0" anchor="t">
+            <a:spAutoFit/>
+          </a:bodyPr>
+          <a:lstStyle/>
+          <a:p>
+            <a:pPr algn="l">
+              <a:lnSpc>
+                <a:spcPct val="100000"/>
+              </a:lnSpc>
+            </a:pPr>
+            <a:r>
+              <a:rPr sz="1725" b="0">
+                <a:solidFill>
+                  <a:srgbClr val="7D7D7D"/>
+                </a:solidFill>
+                <a:latin typeface="Pretendard"/>
+                <a:ea typeface="Pretendard"/>
+                <a:cs typeface="Pretendard"/>
+              </a:rPr>
+              <a:t>데이터 엔지니어링 &amp; RAG 파이프라인 160H · 4-2 · 정리·회고 0.5H</a:t>
+            </a:r>
+          </a:p>
+        </p:txBody>
+      </p:sp>
+      <p:sp>
+        <p:nvSpPr>
+          <p:cNvPr id="28" name="TextBox 27"/>
+          <p:cNvSpPr txBox="1"/>
+          <p:nvPr/>
+        </p:nvSpPr>
+        <p:spPr>
+          <a:xfrm>
+            <a:off x="15240000" y="8248650"/>
+            <a:ext cx="1905000" cy="323850"/>
+          </a:xfrm>
+          <a:prstGeom prst="rect">
+            <a:avLst/>
+          </a:prstGeom>
+          <a:noFill/>
+        </p:spPr>
+        <p:txBody>
+          <a:bodyPr wrap="square" lIns="0" rIns="0" tIns="0" bIns="0" anchor="t">
+            <a:spAutoFit/>
+          </a:bodyPr>
+          <a:lstStyle/>
+          <a:p>
+            <a:pPr algn="r">
+              <a:lnSpc>
+                <a:spcPct val="100000"/>
+              </a:lnSpc>
+            </a:pPr>
+            <a:r>
+              <a:rPr sz="1725" b="0">
+                <a:solidFill>
+                  <a:srgbClr val="7D7D7D"/>
+                </a:solidFill>
+                <a:latin typeface="Pretendard"/>
+                <a:ea typeface="Pretendard"/>
+                <a:cs typeface="Pretendard"/>
+              </a:rPr>
+              <a:t>10</a:t>
+            </a:r>
+          </a:p>
+        </p:txBody>
+      </p:sp>
+    </p:spTree>
+  </p:cSld>
+  <p:clrMapOvr>
+    <a:masterClrMapping/>
+  </p:clrMapOvr>
+</p:sld>
+</file>
+
+<file path=ppt/slides/slide11.xml><?xml version="1.0" encoding="utf-8"?>
+<p:sld xmlns:a="http://schemas.openxmlformats.org/drawingml/2006/main" xmlns:p="http://schemas.openxmlformats.org/presentationml/2006/main" xmlns:r="http://schemas.openxmlformats.org/officeDocument/2006/relationships">
+  <p:cSld>
+    <p:spTree>
+      <p:nvGrpSpPr>
+        <p:cNvPr id="1" name=""/>
+        <p:cNvGrpSpPr/>
+        <p:nvPr/>
+      </p:nvGrpSpPr>
+      <p:grpSpPr/>
+      <p:sp>
+        <p:nvSpPr>
+          <p:cNvPr id="2" name="deckgen:decor"/>
           <p:cNvSpPr/>
           <p:nvPr/>
         </p:nvSpPr>
@@ -3629,7 +4773,7 @@
       </p:sp>
       <p:sp>
         <p:nvSpPr>
-          <p:cNvPr id="3" name="Oval 2"/>
+          <p:cNvPr id="3" name="deckgen:decor"/>
           <p:cNvSpPr/>
           <p:nvPr/>
         </p:nvSpPr>
@@ -4406,7 +5550,7 @@
       <p:grpSpPr/>
       <p:sp>
         <p:nvSpPr>
-          <p:cNvPr id="2" name="Oval 1"/>
+          <p:cNvPr id="2" name="deckgen:decor"/>
           <p:cNvSpPr/>
           <p:nvPr/>
         </p:nvSpPr>
@@ -4436,7 +5580,7 @@
       </p:sp>
       <p:sp>
         <p:nvSpPr>
-          <p:cNvPr id="3" name="Oval 2"/>
+          <p:cNvPr id="3" name="deckgen:decor"/>
           <p:cNvSpPr/>
           <p:nvPr/>
         </p:nvSpPr>
@@ -4466,7 +5610,7 @@
       </p:sp>
       <p:sp>
         <p:nvSpPr>
-          <p:cNvPr id="4" name="Oval 3"/>
+          <p:cNvPr id="4" name="deckgen:decor"/>
           <p:cNvSpPr/>
           <p:nvPr/>
         </p:nvSpPr>
@@ -4893,7 +6037,7 @@
                 <a:ea typeface="Pretendard"/>
                 <a:cs typeface="Pretendard"/>
               </a:rPr>
-              <a:t>4-3 을 위한 상태(컨테이너 4개 · orders 4행 · raw CSV)를 확인한다</a:t>
+              <a:t>4-3 출발 상태(컨테이너 4개 · orders 4행 · raw)와 down → up 확인</a:t>
             </a:r>
           </a:p>
         </p:txBody>
@@ -5039,7 +6183,7 @@
                 <a:ea typeface="Pretendard"/>
                 <a:cs typeface="Pretendard"/>
               </a:rPr>
-              <a:t>자주 겪는 오류 네 가지의 원인과 해결을 안다</a:t>
+              <a:t>자주 겪는 오류 여섯 가지의 원인과 해결을 안다</a:t>
             </a:r>
           </a:p>
         </p:txBody>
@@ -5397,7 +6541,7 @@
       <p:grpSpPr/>
       <p:sp>
         <p:nvSpPr>
-          <p:cNvPr id="2" name="Oval 1"/>
+          <p:cNvPr id="2" name="deckgen:decor"/>
           <p:cNvSpPr/>
           <p:nvPr/>
         </p:nvSpPr>
@@ -5427,7 +6571,7 @@
       </p:sp>
       <p:sp>
         <p:nvSpPr>
-          <p:cNvPr id="3" name="Oval 2"/>
+          <p:cNvPr id="3" name="deckgen:decor"/>
           <p:cNvSpPr/>
           <p:nvPr/>
         </p:nvSpPr>
@@ -5457,7 +6601,7 @@
       </p:sp>
       <p:sp>
         <p:nvSpPr>
-          <p:cNvPr id="4" name="Oval 3"/>
+          <p:cNvPr id="4" name="deckgen:decor"/>
           <p:cNvSpPr/>
           <p:nvPr/>
         </p:nvSpPr>
@@ -6662,7 +7806,7 @@
       <p:grpSpPr/>
       <p:sp>
         <p:nvSpPr>
-          <p:cNvPr id="2" name="Oval 1"/>
+          <p:cNvPr id="2" name="deckgen:decor"/>
           <p:cNvSpPr/>
           <p:nvPr/>
         </p:nvSpPr>
@@ -6692,7 +7836,7 @@
       </p:sp>
       <p:sp>
         <p:nvSpPr>
-          <p:cNvPr id="3" name="Oval 2"/>
+          <p:cNvPr id="3" name="deckgen:decor"/>
           <p:cNvSpPr/>
           <p:nvPr/>
         </p:nvSpPr>
@@ -6722,7 +7866,7 @@
       </p:sp>
       <p:sp>
         <p:nvSpPr>
-          <p:cNvPr id="4" name="Oval 3"/>
+          <p:cNvPr id="4" name="deckgen:decor"/>
           <p:cNvSpPr/>
           <p:nvPr/>
         </p:nvSpPr>
@@ -7927,7 +9071,7 @@
       <p:grpSpPr/>
       <p:sp>
         <p:nvSpPr>
-          <p:cNvPr id="2" name="Oval 1"/>
+          <p:cNvPr id="2" name="deckgen:decor"/>
           <p:cNvSpPr/>
           <p:nvPr/>
         </p:nvSpPr>
@@ -7957,7 +9101,7 @@
       </p:sp>
       <p:sp>
         <p:nvSpPr>
-          <p:cNvPr id="3" name="Oval 2"/>
+          <p:cNvPr id="3" name="deckgen:decor"/>
           <p:cNvSpPr/>
           <p:nvPr/>
         </p:nvSpPr>
@@ -7987,7 +9131,7 @@
       </p:sp>
       <p:sp>
         <p:nvSpPr>
-          <p:cNvPr id="4" name="Oval 3"/>
+          <p:cNvPr id="4" name="deckgen:decor"/>
           <p:cNvSpPr/>
           <p:nvPr/>
         </p:nvSpPr>
@@ -8092,7 +9236,7 @@
                 <a:ea typeface="Pretendard"/>
                 <a:cs typeface="Pretendard"/>
               </a:rPr>
-              <a:t>네 줄로 확인 — 컨테이너 · 행 수 · 원천 CSV</a:t>
+              <a:t>상태 확인 — 그리고 down → up 뒤에도 4행</a:t>
             </a:r>
           </a:p>
         </p:txBody>
@@ -8136,7 +9280,7 @@
         <p:spPr>
           <a:xfrm>
             <a:off x="1143000" y="2781300"/>
-            <a:ext cx="1264194" cy="571500"/>
+            <a:ext cx="1383387" cy="571500"/>
           </a:xfrm>
           <a:prstGeom prst="rect">
             <a:avLst/>
@@ -8166,7 +9310,7 @@
         <p:spPr>
           <a:xfrm>
             <a:off x="1143000" y="2781300"/>
-            <a:ext cx="1264194" cy="571500"/>
+            <a:ext cx="1383387" cy="571500"/>
           </a:xfrm>
           <a:prstGeom prst="rect">
             <a:avLst/>
@@ -8206,8 +9350,8 @@
         </p:nvSpPr>
         <p:spPr>
           <a:xfrm>
-            <a:off x="2407194" y="2781300"/>
-            <a:ext cx="14737806" cy="571500"/>
+            <a:off x="2526387" y="2781300"/>
+            <a:ext cx="14618613" cy="571500"/>
           </a:xfrm>
           <a:prstGeom prst="rect">
             <a:avLst/>
@@ -8238,8 +9382,8 @@
         </p:nvSpPr>
         <p:spPr>
           <a:xfrm>
-            <a:off x="2559594" y="2781300"/>
-            <a:ext cx="14433006" cy="571500"/>
+            <a:off x="2678787" y="2781300"/>
+            <a:ext cx="14313813" cy="571500"/>
           </a:xfrm>
           <a:prstGeom prst="rect">
             <a:avLst/>
@@ -8280,7 +9424,7 @@
         <p:spPr>
           <a:xfrm>
             <a:off x="1143000" y="3429000"/>
-            <a:ext cx="1264194" cy="571500"/>
+            <a:ext cx="1383387" cy="571500"/>
           </a:xfrm>
           <a:prstGeom prst="rect">
             <a:avLst/>
@@ -8310,7 +9454,7 @@
         <p:spPr>
           <a:xfrm>
             <a:off x="1143000" y="3429000"/>
-            <a:ext cx="1264194" cy="571500"/>
+            <a:ext cx="1383387" cy="571500"/>
           </a:xfrm>
           <a:prstGeom prst="rect">
             <a:avLst/>
@@ -8350,8 +9494,8 @@
         </p:nvSpPr>
         <p:spPr>
           <a:xfrm>
-            <a:off x="2407194" y="3429000"/>
-            <a:ext cx="14737806" cy="571500"/>
+            <a:off x="2526387" y="3429000"/>
+            <a:ext cx="14618613" cy="571500"/>
           </a:xfrm>
           <a:prstGeom prst="rect">
             <a:avLst/>
@@ -8382,8 +9526,8 @@
         </p:nvSpPr>
         <p:spPr>
           <a:xfrm>
-            <a:off x="2559594" y="3429000"/>
-            <a:ext cx="14433006" cy="571500"/>
+            <a:off x="2678787" y="3429000"/>
+            <a:ext cx="14313813" cy="571500"/>
           </a:xfrm>
           <a:prstGeom prst="rect">
             <a:avLst/>
@@ -8424,7 +9568,7 @@
         <p:spPr>
           <a:xfrm>
             <a:off x="1143000" y="4076700"/>
-            <a:ext cx="1264194" cy="571500"/>
+            <a:ext cx="1383387" cy="571500"/>
           </a:xfrm>
           <a:prstGeom prst="rect">
             <a:avLst/>
@@ -8454,7 +9598,7 @@
         <p:spPr>
           <a:xfrm>
             <a:off x="1143000" y="4076700"/>
-            <a:ext cx="1264194" cy="571500"/>
+            <a:ext cx="1383387" cy="571500"/>
           </a:xfrm>
           <a:prstGeom prst="rect">
             <a:avLst/>
@@ -8494,8 +9638,8 @@
         </p:nvSpPr>
         <p:spPr>
           <a:xfrm>
-            <a:off x="2407194" y="4076700"/>
-            <a:ext cx="14737806" cy="571500"/>
+            <a:off x="2526387" y="4076700"/>
+            <a:ext cx="14618613" cy="571500"/>
           </a:xfrm>
           <a:prstGeom prst="rect">
             <a:avLst/>
@@ -8526,8 +9670,8 @@
         </p:nvSpPr>
         <p:spPr>
           <a:xfrm>
-            <a:off x="2559594" y="4076700"/>
-            <a:ext cx="14433006" cy="571500"/>
+            <a:off x="2678787" y="4076700"/>
+            <a:ext cx="14313813" cy="571500"/>
           </a:xfrm>
           <a:prstGeom prst="rect">
             <a:avLst/>
@@ -8568,7 +9712,7 @@
         <p:spPr>
           <a:xfrm>
             <a:off x="1143000" y="4724400"/>
-            <a:ext cx="1264194" cy="571500"/>
+            <a:ext cx="1383387" cy="571500"/>
           </a:xfrm>
           <a:prstGeom prst="rect">
             <a:avLst/>
@@ -8598,7 +9742,7 @@
         <p:spPr>
           <a:xfrm>
             <a:off x="1143000" y="4724400"/>
-            <a:ext cx="1264194" cy="571500"/>
+            <a:ext cx="1383387" cy="571500"/>
           </a:xfrm>
           <a:prstGeom prst="rect">
             <a:avLst/>
@@ -8638,8 +9782,8 @@
         </p:nvSpPr>
         <p:spPr>
           <a:xfrm>
-            <a:off x="2407194" y="4724400"/>
-            <a:ext cx="14737806" cy="571500"/>
+            <a:off x="2526387" y="4724400"/>
+            <a:ext cx="14618613" cy="571500"/>
           </a:xfrm>
           <a:prstGeom prst="rect">
             <a:avLst/>
@@ -8670,8 +9814,8 @@
         </p:nvSpPr>
         <p:spPr>
           <a:xfrm>
-            <a:off x="2559594" y="4724400"/>
-            <a:ext cx="14433006" cy="571500"/>
+            <a:off x="2678787" y="4724400"/>
+            <a:ext cx="14313813" cy="571500"/>
           </a:xfrm>
           <a:prstGeom prst="rect">
             <a:avLst/>
@@ -8705,7 +9849,439 @@
       </p:sp>
       <p:sp>
         <p:nvSpPr>
-          <p:cNvPr id="24" name="TextBox 23"/>
+          <p:cNvPr id="24" name="Rectangle 23"/>
+          <p:cNvSpPr/>
+          <p:nvPr/>
+        </p:nvSpPr>
+        <p:spPr>
+          <a:xfrm>
+            <a:off x="1143000" y="5372100"/>
+            <a:ext cx="1383387" cy="571500"/>
+          </a:xfrm>
+          <a:prstGeom prst="rect">
+            <a:avLst/>
+          </a:prstGeom>
+          <a:solidFill>
+            <a:srgbClr val="0D2B5E"/>
+          </a:solidFill>
+          <a:ln>
+            <a:noFill/>
+          </a:ln>
+          <a:effectLst/>
+        </p:spPr>
+        <p:txBody>
+          <a:bodyPr rtlCol="0" anchor="ctr" wrap="square"/>
+          <a:lstStyle/>
+          <a:p>
+            <a:pPr algn="ctr"/>
+          </a:p>
+        </p:txBody>
+      </p:sp>
+      <p:sp>
+        <p:nvSpPr>
+          <p:cNvPr id="25" name="TextBox 24"/>
+          <p:cNvSpPr txBox="1"/>
+          <p:nvPr/>
+        </p:nvSpPr>
+        <p:spPr>
+          <a:xfrm>
+            <a:off x="1143000" y="5372100"/>
+            <a:ext cx="1383387" cy="571500"/>
+          </a:xfrm>
+          <a:prstGeom prst="rect">
+            <a:avLst/>
+          </a:prstGeom>
+          <a:noFill/>
+        </p:spPr>
+        <p:txBody>
+          <a:bodyPr wrap="square" lIns="0" rIns="0" tIns="0" bIns="0" anchor="ctr">
+            <a:spAutoFit/>
+          </a:bodyPr>
+          <a:lstStyle/>
+          <a:p>
+            <a:pPr algn="ctr">
+              <a:lnSpc>
+                <a:spcPct val="100000"/>
+              </a:lnSpc>
+            </a:pPr>
+            <a:r>
+              <a:rPr sz="1800" b="1">
+                <a:solidFill>
+                  <a:srgbClr val="FFFFFF"/>
+                </a:solidFill>
+                <a:latin typeface="Pretendard"/>
+                <a:ea typeface="Pretendard"/>
+                <a:cs typeface="Pretendard"/>
+              </a:rPr>
+              <a:t>내리기</a:t>
+            </a:r>
+          </a:p>
+        </p:txBody>
+      </p:sp>
+      <p:sp>
+        <p:nvSpPr>
+          <p:cNvPr id="26" name="Rectangle 25"/>
+          <p:cNvSpPr/>
+          <p:nvPr/>
+        </p:nvSpPr>
+        <p:spPr>
+          <a:xfrm>
+            <a:off x="2526387" y="5372100"/>
+            <a:ext cx="14618613" cy="571500"/>
+          </a:xfrm>
+          <a:prstGeom prst="rect">
+            <a:avLst/>
+          </a:prstGeom>
+          <a:solidFill>
+            <a:srgbClr val="FAFBFD"/>
+          </a:solidFill>
+          <a:ln w="9525">
+            <a:solidFill>
+              <a:srgbClr val="DCE1E8"/>
+            </a:solidFill>
+          </a:ln>
+          <a:effectLst/>
+        </p:spPr>
+        <p:txBody>
+          <a:bodyPr rtlCol="0" anchor="ctr" wrap="square"/>
+          <a:lstStyle/>
+          <a:p>
+            <a:pPr algn="ctr"/>
+          </a:p>
+        </p:txBody>
+      </p:sp>
+      <p:sp>
+        <p:nvSpPr>
+          <p:cNvPr id="27" name="TextBox 26"/>
+          <p:cNvSpPr txBox="1"/>
+          <p:nvPr/>
+        </p:nvSpPr>
+        <p:spPr>
+          <a:xfrm>
+            <a:off x="2678787" y="5372100"/>
+            <a:ext cx="14313813" cy="571500"/>
+          </a:xfrm>
+          <a:prstGeom prst="rect">
+            <a:avLst/>
+          </a:prstGeom>
+          <a:noFill/>
+        </p:spPr>
+        <p:txBody>
+          <a:bodyPr wrap="square" lIns="0" rIns="0" tIns="0" bIns="0" anchor="ctr">
+            <a:spAutoFit/>
+          </a:bodyPr>
+          <a:lstStyle/>
+          <a:p>
+            <a:pPr algn="l">
+              <a:lnSpc>
+                <a:spcPct val="115000"/>
+              </a:lnSpc>
+            </a:pPr>
+            <a:r>
+              <a:rPr sz="1800" b="0">
+                <a:solidFill>
+                  <a:srgbClr val="3D3D3D"/>
+                </a:solidFill>
+                <a:latin typeface="Pretendard"/>
+                <a:ea typeface="Pretendard"/>
+                <a:cs typeface="Pretendard"/>
+              </a:rPr>
+              <a:t>docker compose down</a:t>
+            </a:r>
+          </a:p>
+        </p:txBody>
+      </p:sp>
+      <p:sp>
+        <p:nvSpPr>
+          <p:cNvPr id="28" name="Rectangle 27"/>
+          <p:cNvSpPr/>
+          <p:nvPr/>
+        </p:nvSpPr>
+        <p:spPr>
+          <a:xfrm>
+            <a:off x="1143000" y="6019800"/>
+            <a:ext cx="1383387" cy="571500"/>
+          </a:xfrm>
+          <a:prstGeom prst="rect">
+            <a:avLst/>
+          </a:prstGeom>
+          <a:solidFill>
+            <a:srgbClr val="0D2B5E"/>
+          </a:solidFill>
+          <a:ln>
+            <a:noFill/>
+          </a:ln>
+          <a:effectLst/>
+        </p:spPr>
+        <p:txBody>
+          <a:bodyPr rtlCol="0" anchor="ctr" wrap="square"/>
+          <a:lstStyle/>
+          <a:p>
+            <a:pPr algn="ctr"/>
+          </a:p>
+        </p:txBody>
+      </p:sp>
+      <p:sp>
+        <p:nvSpPr>
+          <p:cNvPr id="29" name="TextBox 28"/>
+          <p:cNvSpPr txBox="1"/>
+          <p:nvPr/>
+        </p:nvSpPr>
+        <p:spPr>
+          <a:xfrm>
+            <a:off x="1143000" y="6019800"/>
+            <a:ext cx="1383387" cy="571500"/>
+          </a:xfrm>
+          <a:prstGeom prst="rect">
+            <a:avLst/>
+          </a:prstGeom>
+          <a:noFill/>
+        </p:spPr>
+        <p:txBody>
+          <a:bodyPr wrap="square" lIns="0" rIns="0" tIns="0" bIns="0" anchor="ctr">
+            <a:spAutoFit/>
+          </a:bodyPr>
+          <a:lstStyle/>
+          <a:p>
+            <a:pPr algn="ctr">
+              <a:lnSpc>
+                <a:spcPct val="100000"/>
+              </a:lnSpc>
+            </a:pPr>
+            <a:r>
+              <a:rPr sz="1800" b="1">
+                <a:solidFill>
+                  <a:srgbClr val="FFFFFF"/>
+                </a:solidFill>
+                <a:latin typeface="Pretendard"/>
+                <a:ea typeface="Pretendard"/>
+                <a:cs typeface="Pretendard"/>
+              </a:rPr>
+              <a:t>다시 올리기</a:t>
+            </a:r>
+          </a:p>
+        </p:txBody>
+      </p:sp>
+      <p:sp>
+        <p:nvSpPr>
+          <p:cNvPr id="30" name="Rectangle 29"/>
+          <p:cNvSpPr/>
+          <p:nvPr/>
+        </p:nvSpPr>
+        <p:spPr>
+          <a:xfrm>
+            <a:off x="2526387" y="6019800"/>
+            <a:ext cx="14618613" cy="571500"/>
+          </a:xfrm>
+          <a:prstGeom prst="rect">
+            <a:avLst/>
+          </a:prstGeom>
+          <a:solidFill>
+            <a:srgbClr val="FAFBFD"/>
+          </a:solidFill>
+          <a:ln w="9525">
+            <a:solidFill>
+              <a:srgbClr val="DCE1E8"/>
+            </a:solidFill>
+          </a:ln>
+          <a:effectLst/>
+        </p:spPr>
+        <p:txBody>
+          <a:bodyPr rtlCol="0" anchor="ctr" wrap="square"/>
+          <a:lstStyle/>
+          <a:p>
+            <a:pPr algn="ctr"/>
+          </a:p>
+        </p:txBody>
+      </p:sp>
+      <p:sp>
+        <p:nvSpPr>
+          <p:cNvPr id="31" name="TextBox 30"/>
+          <p:cNvSpPr txBox="1"/>
+          <p:nvPr/>
+        </p:nvSpPr>
+        <p:spPr>
+          <a:xfrm>
+            <a:off x="2678787" y="6019800"/>
+            <a:ext cx="14313813" cy="571500"/>
+          </a:xfrm>
+          <a:prstGeom prst="rect">
+            <a:avLst/>
+          </a:prstGeom>
+          <a:noFill/>
+        </p:spPr>
+        <p:txBody>
+          <a:bodyPr wrap="square" lIns="0" rIns="0" tIns="0" bIns="0" anchor="ctr">
+            <a:spAutoFit/>
+          </a:bodyPr>
+          <a:lstStyle/>
+          <a:p>
+            <a:pPr algn="l">
+              <a:lnSpc>
+                <a:spcPct val="115000"/>
+              </a:lnSpc>
+            </a:pPr>
+            <a:r>
+              <a:rPr sz="1800" b="0">
+                <a:solidFill>
+                  <a:srgbClr val="3D3D3D"/>
+                </a:solidFill>
+                <a:latin typeface="Pretendard"/>
+                <a:ea typeface="Pretendard"/>
+                <a:cs typeface="Pretendard"/>
+              </a:rPr>
+              <a:t>docker compose up -d</a:t>
+            </a:r>
+          </a:p>
+        </p:txBody>
+      </p:sp>
+      <p:sp>
+        <p:nvSpPr>
+          <p:cNvPr id="32" name="Rectangle 31"/>
+          <p:cNvSpPr/>
+          <p:nvPr/>
+        </p:nvSpPr>
+        <p:spPr>
+          <a:xfrm>
+            <a:off x="1143000" y="6667500"/>
+            <a:ext cx="1383387" cy="571500"/>
+          </a:xfrm>
+          <a:prstGeom prst="rect">
+            <a:avLst/>
+          </a:prstGeom>
+          <a:solidFill>
+            <a:srgbClr val="0D2B5E"/>
+          </a:solidFill>
+          <a:ln>
+            <a:noFill/>
+          </a:ln>
+          <a:effectLst/>
+        </p:spPr>
+        <p:txBody>
+          <a:bodyPr rtlCol="0" anchor="ctr" wrap="square"/>
+          <a:lstStyle/>
+          <a:p>
+            <a:pPr algn="ctr"/>
+          </a:p>
+        </p:txBody>
+      </p:sp>
+      <p:sp>
+        <p:nvSpPr>
+          <p:cNvPr id="33" name="TextBox 32"/>
+          <p:cNvSpPr txBox="1"/>
+          <p:nvPr/>
+        </p:nvSpPr>
+        <p:spPr>
+          <a:xfrm>
+            <a:off x="1143000" y="6667500"/>
+            <a:ext cx="1383387" cy="571500"/>
+          </a:xfrm>
+          <a:prstGeom prst="rect">
+            <a:avLst/>
+          </a:prstGeom>
+          <a:noFill/>
+        </p:spPr>
+        <p:txBody>
+          <a:bodyPr wrap="square" lIns="0" rIns="0" tIns="0" bIns="0" anchor="ctr">
+            <a:spAutoFit/>
+          </a:bodyPr>
+          <a:lstStyle/>
+          <a:p>
+            <a:pPr algn="ctr">
+              <a:lnSpc>
+                <a:spcPct val="100000"/>
+              </a:lnSpc>
+            </a:pPr>
+            <a:r>
+              <a:rPr sz="1800" b="1">
+                <a:solidFill>
+                  <a:srgbClr val="FFFFFF"/>
+                </a:solidFill>
+                <a:latin typeface="Pretendard"/>
+                <a:ea typeface="Pretendard"/>
+                <a:cs typeface="Pretendard"/>
+              </a:rPr>
+              <a:t>다시 행 수</a:t>
+            </a:r>
+          </a:p>
+        </p:txBody>
+      </p:sp>
+      <p:sp>
+        <p:nvSpPr>
+          <p:cNvPr id="34" name="Rectangle 33"/>
+          <p:cNvSpPr/>
+          <p:nvPr/>
+        </p:nvSpPr>
+        <p:spPr>
+          <a:xfrm>
+            <a:off x="2526387" y="6667500"/>
+            <a:ext cx="14618613" cy="571500"/>
+          </a:xfrm>
+          <a:prstGeom prst="rect">
+            <a:avLst/>
+          </a:prstGeom>
+          <a:solidFill>
+            <a:srgbClr val="FAFBFD"/>
+          </a:solidFill>
+          <a:ln w="9525">
+            <a:solidFill>
+              <a:srgbClr val="DCE1E8"/>
+            </a:solidFill>
+          </a:ln>
+          <a:effectLst/>
+        </p:spPr>
+        <p:txBody>
+          <a:bodyPr rtlCol="0" anchor="ctr" wrap="square"/>
+          <a:lstStyle/>
+          <a:p>
+            <a:pPr algn="ctr"/>
+          </a:p>
+        </p:txBody>
+      </p:sp>
+      <p:sp>
+        <p:nvSpPr>
+          <p:cNvPr id="35" name="TextBox 34"/>
+          <p:cNvSpPr txBox="1"/>
+          <p:nvPr/>
+        </p:nvSpPr>
+        <p:spPr>
+          <a:xfrm>
+            <a:off x="2678787" y="6667500"/>
+            <a:ext cx="14313813" cy="571500"/>
+          </a:xfrm>
+          <a:prstGeom prst="rect">
+            <a:avLst/>
+          </a:prstGeom>
+          <a:noFill/>
+        </p:spPr>
+        <p:txBody>
+          <a:bodyPr wrap="square" lIns="0" rIns="0" tIns="0" bIns="0" anchor="ctr">
+            <a:spAutoFit/>
+          </a:bodyPr>
+          <a:lstStyle/>
+          <a:p>
+            <a:pPr algn="l">
+              <a:lnSpc>
+                <a:spcPct val="115000"/>
+              </a:lnSpc>
+            </a:pPr>
+            <a:r>
+              <a:rPr sz="1800" b="0">
+                <a:solidFill>
+                  <a:srgbClr val="3D3D3D"/>
+                </a:solidFill>
+                <a:latin typeface="Pretendard"/>
+                <a:ea typeface="Pretendard"/>
+                <a:cs typeface="Pretendard"/>
+              </a:rPr>
+              <a:t>같은 count 명령 → 4 그대로</a:t>
+            </a:r>
+          </a:p>
+        </p:txBody>
+      </p:sp>
+      <p:sp>
+        <p:nvSpPr>
+          <p:cNvPr id="36" name="TextBox 35"/>
           <p:cNvSpPr txBox="1"/>
           <p:nvPr/>
         </p:nvSpPr>
@@ -8739,14 +10315,14 @@
                 <a:ea typeface="Pretendard"/>
                 <a:cs typeface="Pretendard"/>
               </a:rPr>
-              <a:t>확인 포인트: 컨테이너 4개 Up · orders 가 4행 · raw/orders/ 에 orders_2026-08-01.csv 가 있으면 4-3 준비 끝</a:t>
-            </a:r>
-          </a:p>
-        </p:txBody>
-      </p:sp>
-      <p:sp>
-        <p:nvSpPr>
-          <p:cNvPr id="25" name="Rectangle 24"/>
+              <a:t>컨테이너 4개 Up · count 4 · raw 에 orders_2026-08-01.csv · down → up 뒤에도 count 4 — rest-catalog 볼륨 덕분, down -v 는 쓰지 않기</a:t>
+            </a:r>
+          </a:p>
+        </p:txBody>
+      </p:sp>
+      <p:sp>
+        <p:nvSpPr>
+          <p:cNvPr id="37" name="Rectangle 36"/>
           <p:cNvSpPr/>
           <p:nvPr/>
         </p:nvSpPr>
@@ -8776,7 +10352,7 @@
       </p:sp>
       <p:sp>
         <p:nvSpPr>
-          <p:cNvPr id="26" name="TextBox 25"/>
+          <p:cNvPr id="38" name="TextBox 37"/>
           <p:cNvSpPr txBox="1"/>
           <p:nvPr/>
         </p:nvSpPr>
@@ -8817,7 +10393,7 @@
       </p:sp>
       <p:sp>
         <p:nvSpPr>
-          <p:cNvPr id="27" name="TextBox 26"/>
+          <p:cNvPr id="39" name="TextBox 38"/>
           <p:cNvSpPr txBox="1"/>
           <p:nvPr/>
         </p:nvSpPr>
@@ -8876,7 +10452,7 @@
       <p:grpSpPr/>
       <p:sp>
         <p:nvSpPr>
-          <p:cNvPr id="2" name="Oval 1"/>
+          <p:cNvPr id="2" name="deckgen:decor"/>
           <p:cNvSpPr/>
           <p:nvPr/>
         </p:nvSpPr>
@@ -8906,7 +10482,7 @@
       </p:sp>
       <p:sp>
         <p:nvSpPr>
-          <p:cNvPr id="3" name="Oval 2"/>
+          <p:cNvPr id="3" name="deckgen:decor"/>
           <p:cNvSpPr/>
           <p:nvPr/>
         </p:nvSpPr>
@@ -8936,7 +10512,7 @@
       </p:sp>
       <p:sp>
         <p:nvSpPr>
-          <p:cNvPr id="4" name="Oval 3"/>
+          <p:cNvPr id="4" name="deckgen:decor"/>
           <p:cNvSpPr/>
           <p:nvPr/>
         </p:nvSpPr>
@@ -9041,7 +10617,7 @@
                 <a:ea typeface="Pretendard"/>
                 <a:cs typeface="Pretendard"/>
               </a:rPr>
-              <a:t>여덟 개를 스스로 확인해 보세요</a:t>
+              <a:t>열두 개를 스스로 확인해 보세요</a:t>
             </a:r>
           </a:p>
         </p:txBody>
@@ -9078,18 +10654,377 @@
       </p:sp>
       <p:sp>
         <p:nvSpPr>
-          <p:cNvPr id="8" name="Rounded Rectangle 7"/>
-          <p:cNvSpPr/>
-          <p:nvPr/>
-        </p:nvSpPr>
-        <p:spPr>
-          <a:xfrm>
-            <a:off x="1143000" y="2886075"/>
-            <a:ext cx="16002000" cy="523875"/>
+          <p:cNvPr id="8" name="Rectangle 7"/>
+          <p:cNvSpPr/>
+          <p:nvPr/>
+        </p:nvSpPr>
+        <p:spPr>
+          <a:xfrm>
+            <a:off x="1143000" y="2781300"/>
+            <a:ext cx="922020" cy="590550"/>
+          </a:xfrm>
+          <a:prstGeom prst="rect">
+            <a:avLst/>
+          </a:prstGeom>
+          <a:solidFill>
+            <a:srgbClr val="0D2B5E"/>
+          </a:solidFill>
+          <a:ln>
+            <a:noFill/>
+          </a:ln>
+          <a:effectLst/>
+        </p:spPr>
+        <p:txBody>
+          <a:bodyPr rtlCol="0" anchor="ctr" wrap="square"/>
+          <a:lstStyle/>
+          <a:p>
+            <a:pPr algn="ctr"/>
+          </a:p>
+        </p:txBody>
+      </p:sp>
+      <p:sp>
+        <p:nvSpPr>
+          <p:cNvPr id="9" name="TextBox 8"/>
+          <p:cNvSpPr txBox="1"/>
+          <p:nvPr/>
+        </p:nvSpPr>
+        <p:spPr>
+          <a:xfrm>
+            <a:off x="1143000" y="2781300"/>
+            <a:ext cx="922020" cy="590550"/>
+          </a:xfrm>
+          <a:prstGeom prst="rect">
+            <a:avLst/>
+          </a:prstGeom>
+          <a:noFill/>
+        </p:spPr>
+        <p:txBody>
+          <a:bodyPr wrap="square" lIns="0" rIns="0" tIns="0" bIns="0" anchor="ctr">
+            <a:spAutoFit/>
+          </a:bodyPr>
+          <a:lstStyle/>
+          <a:p>
+            <a:pPr algn="ctr">
+              <a:lnSpc>
+                <a:spcPct val="100000"/>
+              </a:lnSpc>
+            </a:pPr>
+            <a:r>
+              <a:rPr sz="2025" b="1">
+                <a:solidFill>
+                  <a:srgbClr val="FFFFFF"/>
+                </a:solidFill>
+                <a:latin typeface="Pretendard"/>
+                <a:ea typeface="Pretendard"/>
+                <a:cs typeface="Pretendard"/>
+              </a:rPr>
+              <a:t>#</a:t>
+            </a:r>
+          </a:p>
+        </p:txBody>
+      </p:sp>
+      <p:sp>
+        <p:nvSpPr>
+          <p:cNvPr id="10" name="Rectangle 9"/>
+          <p:cNvSpPr/>
+          <p:nvPr/>
+        </p:nvSpPr>
+        <p:spPr>
+          <a:xfrm>
+            <a:off x="2103120" y="2781300"/>
+            <a:ext cx="7002780" cy="590550"/>
+          </a:xfrm>
+          <a:prstGeom prst="rect">
+            <a:avLst/>
+          </a:prstGeom>
+          <a:solidFill>
+            <a:srgbClr val="1E5BC6"/>
+          </a:solidFill>
+          <a:ln>
+            <a:noFill/>
+          </a:ln>
+          <a:effectLst/>
+        </p:spPr>
+        <p:txBody>
+          <a:bodyPr rtlCol="0" anchor="ctr" wrap="square"/>
+          <a:lstStyle/>
+          <a:p>
+            <a:pPr algn="ctr"/>
+          </a:p>
+        </p:txBody>
+      </p:sp>
+      <p:sp>
+        <p:nvSpPr>
+          <p:cNvPr id="11" name="TextBox 10"/>
+          <p:cNvSpPr txBox="1"/>
+          <p:nvPr/>
+        </p:nvSpPr>
+        <p:spPr>
+          <a:xfrm>
+            <a:off x="2103120" y="2781300"/>
+            <a:ext cx="7002780" cy="590550"/>
+          </a:xfrm>
+          <a:prstGeom prst="rect">
+            <a:avLst/>
+          </a:prstGeom>
+          <a:noFill/>
+        </p:spPr>
+        <p:txBody>
+          <a:bodyPr wrap="square" lIns="0" rIns="0" tIns="0" bIns="0" anchor="ctr">
+            <a:spAutoFit/>
+          </a:bodyPr>
+          <a:lstStyle/>
+          <a:p>
+            <a:pPr algn="ctr">
+              <a:lnSpc>
+                <a:spcPct val="100000"/>
+              </a:lnSpc>
+            </a:pPr>
+            <a:r>
+              <a:rPr sz="2025" b="1">
+                <a:solidFill>
+                  <a:srgbClr val="FFFFFF"/>
+                </a:solidFill>
+                <a:latin typeface="Pretendard"/>
+                <a:ea typeface="Pretendard"/>
+                <a:cs typeface="Pretendard"/>
+              </a:rPr>
+              <a:t>확인할 것</a:t>
+            </a:r>
+          </a:p>
+        </p:txBody>
+      </p:sp>
+      <p:sp>
+        <p:nvSpPr>
+          <p:cNvPr id="12" name="Rectangle 11"/>
+          <p:cNvSpPr/>
+          <p:nvPr/>
+        </p:nvSpPr>
+        <p:spPr>
+          <a:xfrm>
+            <a:off x="9144000" y="2781300"/>
+            <a:ext cx="922020" cy="590550"/>
+          </a:xfrm>
+          <a:prstGeom prst="rect">
+            <a:avLst/>
+          </a:prstGeom>
+          <a:solidFill>
+            <a:srgbClr val="1E5BC6"/>
+          </a:solidFill>
+          <a:ln>
+            <a:noFill/>
+          </a:ln>
+          <a:effectLst/>
+        </p:spPr>
+        <p:txBody>
+          <a:bodyPr rtlCol="0" anchor="ctr" wrap="square"/>
+          <a:lstStyle/>
+          <a:p>
+            <a:pPr algn="ctr"/>
+          </a:p>
+        </p:txBody>
+      </p:sp>
+      <p:sp>
+        <p:nvSpPr>
+          <p:cNvPr id="13" name="TextBox 12"/>
+          <p:cNvSpPr txBox="1"/>
+          <p:nvPr/>
+        </p:nvSpPr>
+        <p:spPr>
+          <a:xfrm>
+            <a:off x="9144000" y="2781300"/>
+            <a:ext cx="922020" cy="590550"/>
+          </a:xfrm>
+          <a:prstGeom prst="rect">
+            <a:avLst/>
+          </a:prstGeom>
+          <a:noFill/>
+        </p:spPr>
+        <p:txBody>
+          <a:bodyPr wrap="square" lIns="0" rIns="0" tIns="0" bIns="0" anchor="ctr">
+            <a:spAutoFit/>
+          </a:bodyPr>
+          <a:lstStyle/>
+          <a:p>
+            <a:pPr algn="ctr">
+              <a:lnSpc>
+                <a:spcPct val="100000"/>
+              </a:lnSpc>
+            </a:pPr>
+            <a:r>
+              <a:rPr sz="2025" b="1">
+                <a:solidFill>
+                  <a:srgbClr val="FFFFFF"/>
+                </a:solidFill>
+                <a:latin typeface="Pretendard"/>
+                <a:ea typeface="Pretendard"/>
+                <a:cs typeface="Pretendard"/>
+              </a:rPr>
+              <a:t>#</a:t>
+            </a:r>
+          </a:p>
+        </p:txBody>
+      </p:sp>
+      <p:sp>
+        <p:nvSpPr>
+          <p:cNvPr id="14" name="Rectangle 13"/>
+          <p:cNvSpPr/>
+          <p:nvPr/>
+        </p:nvSpPr>
+        <p:spPr>
+          <a:xfrm>
+            <a:off x="10104120" y="2781300"/>
+            <a:ext cx="7040880" cy="590550"/>
+          </a:xfrm>
+          <a:prstGeom prst="rect">
+            <a:avLst/>
+          </a:prstGeom>
+          <a:solidFill>
+            <a:srgbClr val="1E5BC6"/>
+          </a:solidFill>
+          <a:ln>
+            <a:noFill/>
+          </a:ln>
+          <a:effectLst/>
+        </p:spPr>
+        <p:txBody>
+          <a:bodyPr rtlCol="0" anchor="ctr" wrap="square"/>
+          <a:lstStyle/>
+          <a:p>
+            <a:pPr algn="ctr"/>
+          </a:p>
+        </p:txBody>
+      </p:sp>
+      <p:sp>
+        <p:nvSpPr>
+          <p:cNvPr id="15" name="TextBox 14"/>
+          <p:cNvSpPr txBox="1"/>
+          <p:nvPr/>
+        </p:nvSpPr>
+        <p:spPr>
+          <a:xfrm>
+            <a:off x="10104120" y="2781300"/>
+            <a:ext cx="7040880" cy="590550"/>
+          </a:xfrm>
+          <a:prstGeom prst="rect">
+            <a:avLst/>
+          </a:prstGeom>
+          <a:noFill/>
+        </p:spPr>
+        <p:txBody>
+          <a:bodyPr wrap="square" lIns="0" rIns="0" tIns="0" bIns="0" anchor="ctr">
+            <a:spAutoFit/>
+          </a:bodyPr>
+          <a:lstStyle/>
+          <a:p>
+            <a:pPr algn="ctr">
+              <a:lnSpc>
+                <a:spcPct val="100000"/>
+              </a:lnSpc>
+            </a:pPr>
+            <a:r>
+              <a:rPr sz="2025" b="1">
+                <a:solidFill>
+                  <a:srgbClr val="FFFFFF"/>
+                </a:solidFill>
+                <a:latin typeface="Pretendard"/>
+                <a:ea typeface="Pretendard"/>
+                <a:cs typeface="Pretendard"/>
+              </a:rPr>
+              <a:t>확인할 것</a:t>
+            </a:r>
+          </a:p>
+        </p:txBody>
+      </p:sp>
+      <p:sp>
+        <p:nvSpPr>
+          <p:cNvPr id="16" name="Rounded Rectangle 15"/>
+          <p:cNvSpPr/>
+          <p:nvPr/>
+        </p:nvSpPr>
+        <p:spPr>
+          <a:xfrm>
+            <a:off x="1143000" y="3448050"/>
+            <a:ext cx="922020" cy="619125"/>
           </a:xfrm>
           <a:prstGeom prst="roundRect">
             <a:avLst>
-              <a:gd name="adj" fmla="val 9090"/>
+              <a:gd name="adj" fmla="val 6153"/>
+            </a:avLst>
+          </a:prstGeom>
+          <a:solidFill>
+            <a:srgbClr val="EDF3FD"/>
+          </a:solidFill>
+          <a:ln w="9525">
+            <a:solidFill>
+              <a:srgbClr val="BFD3F5"/>
+            </a:solidFill>
+          </a:ln>
+          <a:effectLst/>
+        </p:spPr>
+        <p:txBody>
+          <a:bodyPr rtlCol="0" anchor="ctr" wrap="square"/>
+          <a:lstStyle/>
+          <a:p>
+            <a:pPr algn="ctr"/>
+          </a:p>
+        </p:txBody>
+      </p:sp>
+      <p:sp>
+        <p:nvSpPr>
+          <p:cNvPr id="17" name="TextBox 16"/>
+          <p:cNvSpPr txBox="1"/>
+          <p:nvPr/>
+        </p:nvSpPr>
+        <p:spPr>
+          <a:xfrm>
+            <a:off x="1238250" y="3448050"/>
+            <a:ext cx="731520" cy="619125"/>
+          </a:xfrm>
+          <a:prstGeom prst="rect">
+            <a:avLst/>
+          </a:prstGeom>
+          <a:noFill/>
+        </p:spPr>
+        <p:txBody>
+          <a:bodyPr wrap="square" lIns="0" rIns="0" tIns="0" bIns="0" anchor="ctr">
+            <a:spAutoFit/>
+          </a:bodyPr>
+          <a:lstStyle/>
+          <a:p>
+            <a:pPr algn="l">
+              <a:lnSpc>
+                <a:spcPct val="115000"/>
+              </a:lnSpc>
+            </a:pPr>
+            <a:r>
+              <a:rPr sz="1875" b="1">
+                <a:solidFill>
+                  <a:srgbClr val="0D2B5E"/>
+                </a:solidFill>
+                <a:latin typeface="Pretendard"/>
+                <a:ea typeface="Pretendard"/>
+                <a:cs typeface="Pretendard"/>
+              </a:rPr>
+              <a:t>1</a:t>
+            </a:r>
+          </a:p>
+        </p:txBody>
+      </p:sp>
+      <p:sp>
+        <p:nvSpPr>
+          <p:cNvPr id="18" name="Rounded Rectangle 17"/>
+          <p:cNvSpPr/>
+          <p:nvPr/>
+        </p:nvSpPr>
+        <p:spPr>
+          <a:xfrm>
+            <a:off x="2103120" y="3448050"/>
+            <a:ext cx="7002780" cy="619125"/>
+          </a:xfrm>
+          <a:prstGeom prst="roundRect">
+            <a:avLst>
+              <a:gd name="adj" fmla="val 6153"/>
             </a:avLst>
           </a:prstGeom>
           <a:solidFill>
@@ -9112,130 +11047,59 @@
       </p:sp>
       <p:sp>
         <p:nvSpPr>
-          <p:cNvPr id="9" name="Oval 8"/>
-          <p:cNvSpPr/>
-          <p:nvPr/>
-        </p:nvSpPr>
-        <p:spPr>
-          <a:xfrm>
-            <a:off x="1390650" y="2881312"/>
-            <a:ext cx="533400" cy="533400"/>
-          </a:xfrm>
-          <a:prstGeom prst="ellipse">
-            <a:avLst/>
-          </a:prstGeom>
-          <a:solidFill>
-            <a:srgbClr val="0D2B5E"/>
-          </a:solidFill>
-          <a:ln>
-            <a:noFill/>
-          </a:ln>
-          <a:effectLst/>
-        </p:spPr>
-        <p:txBody>
-          <a:bodyPr rtlCol="0" anchor="ctr" wrap="square"/>
-          <a:lstStyle/>
-          <a:p>
-            <a:pPr algn="ctr"/>
-          </a:p>
-        </p:txBody>
-      </p:sp>
-      <p:sp>
-        <p:nvSpPr>
-          <p:cNvPr id="10" name="TextBox 9"/>
-          <p:cNvSpPr txBox="1"/>
-          <p:nvPr/>
-        </p:nvSpPr>
-        <p:spPr>
-          <a:xfrm>
-            <a:off x="1390650" y="3005138"/>
-            <a:ext cx="533400" cy="323850"/>
-          </a:xfrm>
-          <a:prstGeom prst="rect">
-            <a:avLst/>
-          </a:prstGeom>
-          <a:noFill/>
-        </p:spPr>
-        <p:txBody>
-          <a:bodyPr wrap="square" lIns="0" rIns="0" tIns="0" bIns="0" anchor="t">
+          <p:cNvPr id="19" name="TextBox 18"/>
+          <p:cNvSpPr txBox="1"/>
+          <p:nvPr/>
+        </p:nvSpPr>
+        <p:spPr>
+          <a:xfrm>
+            <a:off x="2198370" y="3448050"/>
+            <a:ext cx="6812280" cy="619125"/>
+          </a:xfrm>
+          <a:prstGeom prst="rect">
+            <a:avLst/>
+          </a:prstGeom>
+          <a:noFill/>
+        </p:spPr>
+        <p:txBody>
+          <a:bodyPr wrap="square" lIns="0" rIns="0" tIns="0" bIns="0" anchor="ctr">
             <a:spAutoFit/>
           </a:bodyPr>
           <a:lstStyle/>
           <a:p>
             <a:pPr algn="ctr">
               <a:lnSpc>
-                <a:spcPct val="100000"/>
-              </a:lnSpc>
-            </a:pPr>
-            <a:r>
-              <a:rPr sz="2100" b="1">
-                <a:solidFill>
-                  <a:srgbClr val="FFFFFF"/>
-                </a:solidFill>
-                <a:latin typeface="Pretendard"/>
-                <a:ea typeface="Pretendard"/>
-                <a:cs typeface="Pretendard"/>
-              </a:rPr>
-              <a:t>1</a:t>
-            </a:r>
-          </a:p>
-        </p:txBody>
-      </p:sp>
-      <p:sp>
-        <p:nvSpPr>
-          <p:cNvPr id="11" name="TextBox 10"/>
-          <p:cNvSpPr txBox="1"/>
-          <p:nvPr/>
-        </p:nvSpPr>
-        <p:spPr>
-          <a:xfrm>
-            <a:off x="2190750" y="2886075"/>
-            <a:ext cx="14573250" cy="523875"/>
-          </a:xfrm>
-          <a:prstGeom prst="rect">
-            <a:avLst/>
-          </a:prstGeom>
-          <a:noFill/>
-        </p:spPr>
-        <p:txBody>
-          <a:bodyPr wrap="square" lIns="0" rIns="0" tIns="0" bIns="0" anchor="ctr">
-            <a:spAutoFit/>
-          </a:bodyPr>
-          <a:lstStyle/>
-          <a:p>
-            <a:pPr algn="l">
-              <a:lnSpc>
-                <a:spcPct val="100000"/>
-              </a:lnSpc>
-            </a:pPr>
-            <a:r>
-              <a:rPr sz="2100" b="1">
-                <a:solidFill>
-                  <a:srgbClr val="0D2B5E"/>
-                </a:solidFill>
-                <a:latin typeface="Pretendard"/>
-                <a:ea typeface="Pretendard"/>
-                <a:cs typeface="Pretendard"/>
-              </a:rPr>
-              <a:t>파일만 쌓았을 때 안 되는 것을 세 가지 이상 말할 수 있다</a:t>
-            </a:r>
-          </a:p>
-        </p:txBody>
-      </p:sp>
-      <p:sp>
-        <p:nvSpPr>
-          <p:cNvPr id="12" name="Rounded Rectangle 11"/>
-          <p:cNvSpPr/>
-          <p:nvPr/>
-        </p:nvSpPr>
-        <p:spPr>
-          <a:xfrm>
-            <a:off x="1143000" y="3524250"/>
-            <a:ext cx="16002000" cy="523875"/>
+                <a:spcPct val="115000"/>
+              </a:lnSpc>
+            </a:pPr>
+            <a:r>
+              <a:rPr sz="1875" b="0">
+                <a:solidFill>
+                  <a:srgbClr val="3D3D3D"/>
+                </a:solidFill>
+                <a:latin typeface="Pretendard"/>
+                <a:ea typeface="Pretendard"/>
+                <a:cs typeface="Pretendard"/>
+              </a:rPr>
+              <a:t>파일만 쌓으면 안 되는 것 세 가지</a:t>
+            </a:r>
+          </a:p>
+        </p:txBody>
+      </p:sp>
+      <p:sp>
+        <p:nvSpPr>
+          <p:cNvPr id="20" name="Rounded Rectangle 19"/>
+          <p:cNvSpPr/>
+          <p:nvPr/>
+        </p:nvSpPr>
+        <p:spPr>
+          <a:xfrm>
+            <a:off x="9144000" y="3448050"/>
+            <a:ext cx="922020" cy="619125"/>
           </a:xfrm>
           <a:prstGeom prst="roundRect">
             <a:avLst>
-              <a:gd name="adj" fmla="val 9090"/>
+              <a:gd name="adj" fmla="val 6153"/>
             </a:avLst>
           </a:prstGeom>
           <a:solidFill>
@@ -9258,130 +11122,59 @@
       </p:sp>
       <p:sp>
         <p:nvSpPr>
-          <p:cNvPr id="13" name="Oval 12"/>
-          <p:cNvSpPr/>
-          <p:nvPr/>
-        </p:nvSpPr>
-        <p:spPr>
-          <a:xfrm>
-            <a:off x="1390650" y="3519488"/>
-            <a:ext cx="533400" cy="533400"/>
-          </a:xfrm>
-          <a:prstGeom prst="ellipse">
-            <a:avLst/>
-          </a:prstGeom>
-          <a:solidFill>
-            <a:srgbClr val="0D2B5E"/>
-          </a:solidFill>
-          <a:ln>
-            <a:noFill/>
-          </a:ln>
-          <a:effectLst/>
-        </p:spPr>
-        <p:txBody>
-          <a:bodyPr rtlCol="0" anchor="ctr" wrap="square"/>
-          <a:lstStyle/>
-          <a:p>
-            <a:pPr algn="ctr"/>
-          </a:p>
-        </p:txBody>
-      </p:sp>
-      <p:sp>
-        <p:nvSpPr>
-          <p:cNvPr id="14" name="TextBox 13"/>
-          <p:cNvSpPr txBox="1"/>
-          <p:nvPr/>
-        </p:nvSpPr>
-        <p:spPr>
-          <a:xfrm>
-            <a:off x="1390650" y="3643312"/>
-            <a:ext cx="533400" cy="323850"/>
-          </a:xfrm>
-          <a:prstGeom prst="rect">
-            <a:avLst/>
-          </a:prstGeom>
-          <a:noFill/>
-        </p:spPr>
-        <p:txBody>
-          <a:bodyPr wrap="square" lIns="0" rIns="0" tIns="0" bIns="0" anchor="t">
+          <p:cNvPr id="21" name="TextBox 20"/>
+          <p:cNvSpPr txBox="1"/>
+          <p:nvPr/>
+        </p:nvSpPr>
+        <p:spPr>
+          <a:xfrm>
+            <a:off x="9239250" y="3448050"/>
+            <a:ext cx="731520" cy="619125"/>
+          </a:xfrm>
+          <a:prstGeom prst="rect">
+            <a:avLst/>
+          </a:prstGeom>
+          <a:noFill/>
+        </p:spPr>
+        <p:txBody>
+          <a:bodyPr wrap="square" lIns="0" rIns="0" tIns="0" bIns="0" anchor="ctr">
             <a:spAutoFit/>
           </a:bodyPr>
           <a:lstStyle/>
           <a:p>
             <a:pPr algn="ctr">
               <a:lnSpc>
-                <a:spcPct val="100000"/>
-              </a:lnSpc>
-            </a:pPr>
-            <a:r>
-              <a:rPr sz="2100" b="1">
-                <a:solidFill>
-                  <a:srgbClr val="FFFFFF"/>
-                </a:solidFill>
-                <a:latin typeface="Pretendard"/>
-                <a:ea typeface="Pretendard"/>
-                <a:cs typeface="Pretendard"/>
-              </a:rPr>
-              <a:t>2</a:t>
-            </a:r>
-          </a:p>
-        </p:txBody>
-      </p:sp>
-      <p:sp>
-        <p:nvSpPr>
-          <p:cNvPr id="15" name="TextBox 14"/>
-          <p:cNvSpPr txBox="1"/>
-          <p:nvPr/>
-        </p:nvSpPr>
-        <p:spPr>
-          <a:xfrm>
-            <a:off x="2190750" y="3524250"/>
-            <a:ext cx="14573250" cy="523875"/>
-          </a:xfrm>
-          <a:prstGeom prst="rect">
-            <a:avLst/>
-          </a:prstGeom>
-          <a:noFill/>
-        </p:spPr>
-        <p:txBody>
-          <a:bodyPr wrap="square" lIns="0" rIns="0" tIns="0" bIns="0" anchor="ctr">
-            <a:spAutoFit/>
-          </a:bodyPr>
-          <a:lstStyle/>
-          <a:p>
-            <a:pPr algn="l">
-              <a:lnSpc>
-                <a:spcPct val="100000"/>
-              </a:lnSpc>
-            </a:pPr>
-            <a:r>
-              <a:rPr sz="2100" b="1">
-                <a:solidFill>
-                  <a:srgbClr val="0D2B5E"/>
-                </a:solidFill>
-                <a:latin typeface="Pretendard"/>
-                <a:ea typeface="Pretendard"/>
-                <a:cs typeface="Pretendard"/>
-              </a:rPr>
-              <a:t>카탈로그 → 스냅샷 → 매니페스트 → 데이터 파일 사슬을 그릴 수 있다</a:t>
-            </a:r>
-          </a:p>
-        </p:txBody>
-      </p:sp>
-      <p:sp>
-        <p:nvSpPr>
-          <p:cNvPr id="16" name="Rounded Rectangle 15"/>
-          <p:cNvSpPr/>
-          <p:nvPr/>
-        </p:nvSpPr>
-        <p:spPr>
-          <a:xfrm>
-            <a:off x="1143000" y="4162425"/>
-            <a:ext cx="16002000" cy="523875"/>
+                <a:spcPct val="115000"/>
+              </a:lnSpc>
+            </a:pPr>
+            <a:r>
+              <a:rPr sz="1875" b="0">
+                <a:solidFill>
+                  <a:srgbClr val="3D3D3D"/>
+                </a:solidFill>
+                <a:latin typeface="Pretendard"/>
+                <a:ea typeface="Pretendard"/>
+                <a:cs typeface="Pretendard"/>
+              </a:rPr>
+              <a:t>7</a:t>
+            </a:r>
+          </a:p>
+        </p:txBody>
+      </p:sp>
+      <p:sp>
+        <p:nvSpPr>
+          <p:cNvPr id="22" name="Rounded Rectangle 21"/>
+          <p:cNvSpPr/>
+          <p:nvPr/>
+        </p:nvSpPr>
+        <p:spPr>
+          <a:xfrm>
+            <a:off x="10104120" y="3448050"/>
+            <a:ext cx="7040880" cy="619125"/>
           </a:xfrm>
           <a:prstGeom prst="roundRect">
             <a:avLst>
-              <a:gd name="adj" fmla="val 9090"/>
+              <a:gd name="adj" fmla="val 6153"/>
             </a:avLst>
           </a:prstGeom>
           <a:solidFill>
@@ -9404,130 +11197,134 @@
       </p:sp>
       <p:sp>
         <p:nvSpPr>
-          <p:cNvPr id="17" name="Oval 16"/>
-          <p:cNvSpPr/>
-          <p:nvPr/>
-        </p:nvSpPr>
-        <p:spPr>
-          <a:xfrm>
-            <a:off x="1390650" y="4157662"/>
-            <a:ext cx="533400" cy="533400"/>
-          </a:xfrm>
-          <a:prstGeom prst="ellipse">
-            <a:avLst/>
-          </a:prstGeom>
-          <a:solidFill>
-            <a:srgbClr val="0D2B5E"/>
-          </a:solidFill>
-          <a:ln>
-            <a:noFill/>
-          </a:ln>
-          <a:effectLst/>
-        </p:spPr>
-        <p:txBody>
-          <a:bodyPr rtlCol="0" anchor="ctr" wrap="square"/>
-          <a:lstStyle/>
-          <a:p>
-            <a:pPr algn="ctr"/>
-          </a:p>
-        </p:txBody>
-      </p:sp>
-      <p:sp>
-        <p:nvSpPr>
-          <p:cNvPr id="18" name="TextBox 17"/>
-          <p:cNvSpPr txBox="1"/>
-          <p:nvPr/>
-        </p:nvSpPr>
-        <p:spPr>
-          <a:xfrm>
-            <a:off x="1390650" y="4281488"/>
-            <a:ext cx="533400" cy="323850"/>
-          </a:xfrm>
-          <a:prstGeom prst="rect">
-            <a:avLst/>
-          </a:prstGeom>
-          <a:noFill/>
-        </p:spPr>
-        <p:txBody>
-          <a:bodyPr wrap="square" lIns="0" rIns="0" tIns="0" bIns="0" anchor="t">
+          <p:cNvPr id="23" name="TextBox 22"/>
+          <p:cNvSpPr txBox="1"/>
+          <p:nvPr/>
+        </p:nvSpPr>
+        <p:spPr>
+          <a:xfrm>
+            <a:off x="10199370" y="3448050"/>
+            <a:ext cx="6850380" cy="619125"/>
+          </a:xfrm>
+          <a:prstGeom prst="rect">
+            <a:avLst/>
+          </a:prstGeom>
+          <a:noFill/>
+        </p:spPr>
+        <p:txBody>
+          <a:bodyPr wrap="square" lIns="0" rIns="0" tIns="0" bIns="0" anchor="ctr">
             <a:spAutoFit/>
           </a:bodyPr>
           <a:lstStyle/>
           <a:p>
             <a:pPr algn="ctr">
               <a:lnSpc>
-                <a:spcPct val="100000"/>
-              </a:lnSpc>
-            </a:pPr>
-            <a:r>
-              <a:rPr sz="2100" b="1">
-                <a:solidFill>
-                  <a:srgbClr val="FFFFFF"/>
-                </a:solidFill>
-                <a:latin typeface="Pretendard"/>
-                <a:ea typeface="Pretendard"/>
-                <a:cs typeface="Pretendard"/>
-              </a:rPr>
-              <a:t>3</a:t>
-            </a:r>
-          </a:p>
-        </p:txBody>
-      </p:sp>
-      <p:sp>
-        <p:nvSpPr>
-          <p:cNvPr id="19" name="TextBox 18"/>
-          <p:cNvSpPr txBox="1"/>
-          <p:nvPr/>
-        </p:nvSpPr>
-        <p:spPr>
-          <a:xfrm>
-            <a:off x="2190750" y="4162425"/>
-            <a:ext cx="14573250" cy="523875"/>
-          </a:xfrm>
-          <a:prstGeom prst="rect">
-            <a:avLst/>
-          </a:prstGeom>
-          <a:noFill/>
-        </p:spPr>
-        <p:txBody>
-          <a:bodyPr wrap="square" lIns="0" rIns="0" tIns="0" bIns="0" anchor="ctr">
-            <a:spAutoFit/>
-          </a:bodyPr>
-          <a:lstStyle/>
-          <a:p>
-            <a:pPr algn="l">
-              <a:lnSpc>
-                <a:spcPct val="100000"/>
-              </a:lnSpc>
-            </a:pPr>
-            <a:r>
-              <a:rPr sz="2100" b="1">
-                <a:solidFill>
-                  <a:srgbClr val="0D2B5E"/>
-                </a:solidFill>
-                <a:latin typeface="Pretendard"/>
-                <a:ea typeface="Pretendard"/>
-                <a:cs typeface="Pretendard"/>
-              </a:rPr>
-              <a:t>컨테이너 4개(minio·mc·rest·spark-iceberg)가 모두 Up 이다</a:t>
-            </a:r>
-          </a:p>
-        </p:txBody>
-      </p:sp>
-      <p:sp>
-        <p:nvSpPr>
-          <p:cNvPr id="20" name="Rounded Rectangle 19"/>
-          <p:cNvSpPr/>
-          <p:nvPr/>
-        </p:nvSpPr>
-        <p:spPr>
-          <a:xfrm>
-            <a:off x="1143000" y="4800600"/>
-            <a:ext cx="16002000" cy="523875"/>
+                <a:spcPct val="115000"/>
+              </a:lnSpc>
+            </a:pPr>
+            <a:r>
+              <a:rPr sz="1875" b="0">
+                <a:solidFill>
+                  <a:srgbClr val="3D3D3D"/>
+                </a:solidFill>
+                <a:latin typeface="Pretendard"/>
+                <a:ea typeface="Pretendard"/>
+                <a:cs typeface="Pretendard"/>
+              </a:rPr>
+              <a:t>snapshots id 로 VERSION AS OF</a:t>
+            </a:r>
+          </a:p>
+        </p:txBody>
+      </p:sp>
+      <p:sp>
+        <p:nvSpPr>
+          <p:cNvPr id="24" name="Rounded Rectangle 23"/>
+          <p:cNvSpPr/>
+          <p:nvPr/>
+        </p:nvSpPr>
+        <p:spPr>
+          <a:xfrm>
+            <a:off x="1143000" y="4143375"/>
+            <a:ext cx="922020" cy="619125"/>
           </a:xfrm>
           <a:prstGeom prst="roundRect">
             <a:avLst>
-              <a:gd name="adj" fmla="val 9090"/>
+              <a:gd name="adj" fmla="val 6153"/>
+            </a:avLst>
+          </a:prstGeom>
+          <a:solidFill>
+            <a:srgbClr val="EDF3FD"/>
+          </a:solidFill>
+          <a:ln w="9525">
+            <a:solidFill>
+              <a:srgbClr val="BFD3F5"/>
+            </a:solidFill>
+          </a:ln>
+          <a:effectLst/>
+        </p:spPr>
+        <p:txBody>
+          <a:bodyPr rtlCol="0" anchor="ctr" wrap="square"/>
+          <a:lstStyle/>
+          <a:p>
+            <a:pPr algn="ctr"/>
+          </a:p>
+        </p:txBody>
+      </p:sp>
+      <p:sp>
+        <p:nvSpPr>
+          <p:cNvPr id="25" name="TextBox 24"/>
+          <p:cNvSpPr txBox="1"/>
+          <p:nvPr/>
+        </p:nvSpPr>
+        <p:spPr>
+          <a:xfrm>
+            <a:off x="1238250" y="4143375"/>
+            <a:ext cx="731520" cy="619125"/>
+          </a:xfrm>
+          <a:prstGeom prst="rect">
+            <a:avLst/>
+          </a:prstGeom>
+          <a:noFill/>
+        </p:spPr>
+        <p:txBody>
+          <a:bodyPr wrap="square" lIns="0" rIns="0" tIns="0" bIns="0" anchor="ctr">
+            <a:spAutoFit/>
+          </a:bodyPr>
+          <a:lstStyle/>
+          <a:p>
+            <a:pPr algn="l">
+              <a:lnSpc>
+                <a:spcPct val="115000"/>
+              </a:lnSpc>
+            </a:pPr>
+            <a:r>
+              <a:rPr sz="1875" b="1">
+                <a:solidFill>
+                  <a:srgbClr val="0D2B5E"/>
+                </a:solidFill>
+                <a:latin typeface="Pretendard"/>
+                <a:ea typeface="Pretendard"/>
+                <a:cs typeface="Pretendard"/>
+              </a:rPr>
+              <a:t>2</a:t>
+            </a:r>
+          </a:p>
+        </p:txBody>
+      </p:sp>
+      <p:sp>
+        <p:nvSpPr>
+          <p:cNvPr id="26" name="Rounded Rectangle 25"/>
+          <p:cNvSpPr/>
+          <p:nvPr/>
+        </p:nvSpPr>
+        <p:spPr>
+          <a:xfrm>
+            <a:off x="2103120" y="4143375"/>
+            <a:ext cx="7002780" cy="619125"/>
+          </a:xfrm>
+          <a:prstGeom prst="roundRect">
+            <a:avLst>
+              <a:gd name="adj" fmla="val 6153"/>
             </a:avLst>
           </a:prstGeom>
           <a:solidFill>
@@ -9550,130 +11347,59 @@
       </p:sp>
       <p:sp>
         <p:nvSpPr>
-          <p:cNvPr id="21" name="Oval 20"/>
-          <p:cNvSpPr/>
-          <p:nvPr/>
-        </p:nvSpPr>
-        <p:spPr>
-          <a:xfrm>
-            <a:off x="1390650" y="4795838"/>
-            <a:ext cx="533400" cy="533400"/>
-          </a:xfrm>
-          <a:prstGeom prst="ellipse">
-            <a:avLst/>
-          </a:prstGeom>
-          <a:solidFill>
-            <a:srgbClr val="0D2B5E"/>
-          </a:solidFill>
-          <a:ln>
-            <a:noFill/>
-          </a:ln>
-          <a:effectLst/>
-        </p:spPr>
-        <p:txBody>
-          <a:bodyPr rtlCol="0" anchor="ctr" wrap="square"/>
-          <a:lstStyle/>
-          <a:p>
-            <a:pPr algn="ctr"/>
-          </a:p>
-        </p:txBody>
-      </p:sp>
-      <p:sp>
-        <p:nvSpPr>
-          <p:cNvPr id="22" name="TextBox 21"/>
-          <p:cNvSpPr txBox="1"/>
-          <p:nvPr/>
-        </p:nvSpPr>
-        <p:spPr>
-          <a:xfrm>
-            <a:off x="1390650" y="4919662"/>
-            <a:ext cx="533400" cy="323850"/>
-          </a:xfrm>
-          <a:prstGeom prst="rect">
-            <a:avLst/>
-          </a:prstGeom>
-          <a:noFill/>
-        </p:spPr>
-        <p:txBody>
-          <a:bodyPr wrap="square" lIns="0" rIns="0" tIns="0" bIns="0" anchor="t">
+          <p:cNvPr id="27" name="TextBox 26"/>
+          <p:cNvSpPr txBox="1"/>
+          <p:nvPr/>
+        </p:nvSpPr>
+        <p:spPr>
+          <a:xfrm>
+            <a:off x="2198370" y="4143375"/>
+            <a:ext cx="6812280" cy="619125"/>
+          </a:xfrm>
+          <a:prstGeom prst="rect">
+            <a:avLst/>
+          </a:prstGeom>
+          <a:noFill/>
+        </p:spPr>
+        <p:txBody>
+          <a:bodyPr wrap="square" lIns="0" rIns="0" tIns="0" bIns="0" anchor="ctr">
             <a:spAutoFit/>
           </a:bodyPr>
           <a:lstStyle/>
           <a:p>
             <a:pPr algn="ctr">
               <a:lnSpc>
-                <a:spcPct val="100000"/>
-              </a:lnSpc>
-            </a:pPr>
-            <a:r>
-              <a:rPr sz="2100" b="1">
-                <a:solidFill>
-                  <a:srgbClr val="FFFFFF"/>
-                </a:solidFill>
-                <a:latin typeface="Pretendard"/>
-                <a:ea typeface="Pretendard"/>
-                <a:cs typeface="Pretendard"/>
-              </a:rPr>
-              <a:t>4</a:t>
-            </a:r>
-          </a:p>
-        </p:txBody>
-      </p:sp>
-      <p:sp>
-        <p:nvSpPr>
-          <p:cNvPr id="23" name="TextBox 22"/>
-          <p:cNvSpPr txBox="1"/>
-          <p:nvPr/>
-        </p:nvSpPr>
-        <p:spPr>
-          <a:xfrm>
-            <a:off x="2190750" y="4800600"/>
-            <a:ext cx="14573250" cy="523875"/>
-          </a:xfrm>
-          <a:prstGeom prst="rect">
-            <a:avLst/>
-          </a:prstGeom>
-          <a:noFill/>
-        </p:spPr>
-        <p:txBody>
-          <a:bodyPr wrap="square" lIns="0" rIns="0" tIns="0" bIns="0" anchor="ctr">
-            <a:spAutoFit/>
-          </a:bodyPr>
-          <a:lstStyle/>
-          <a:p>
-            <a:pPr algn="l">
-              <a:lnSpc>
-                <a:spcPct val="100000"/>
-              </a:lnSpc>
-            </a:pPr>
-            <a:r>
-              <a:rPr sz="2100" b="1">
-                <a:solidFill>
-                  <a:srgbClr val="0D2B5E"/>
-                </a:solidFill>
-                <a:latin typeface="Pretendard"/>
-                <a:ea typeface="Pretendard"/>
-                <a:cs typeface="Pretendard"/>
-              </a:rPr>
-              <a:t>REST 카탈로그(8181) 응답과 Spark 카탈로그 설정을 직접 확인했다</a:t>
-            </a:r>
-          </a:p>
-        </p:txBody>
-      </p:sp>
-      <p:sp>
-        <p:nvSpPr>
-          <p:cNvPr id="24" name="Rounded Rectangle 23"/>
-          <p:cNvSpPr/>
-          <p:nvPr/>
-        </p:nvSpPr>
-        <p:spPr>
-          <a:xfrm>
-            <a:off x="1143000" y="5438775"/>
-            <a:ext cx="16002000" cy="523875"/>
+                <a:spcPct val="115000"/>
+              </a:lnSpc>
+            </a:pPr>
+            <a:r>
+              <a:rPr sz="1875" b="0">
+                <a:solidFill>
+                  <a:srgbClr val="3D3D3D"/>
+                </a:solidFill>
+                <a:latin typeface="Pretendard"/>
+                <a:ea typeface="Pretendard"/>
+                <a:cs typeface="Pretendard"/>
+              </a:rPr>
+              <a:t>카탈로그→…→데이터 파일 사슬 그리기</a:t>
+            </a:r>
+          </a:p>
+        </p:txBody>
+      </p:sp>
+      <p:sp>
+        <p:nvSpPr>
+          <p:cNvPr id="28" name="Rounded Rectangle 27"/>
+          <p:cNvSpPr/>
+          <p:nvPr/>
+        </p:nvSpPr>
+        <p:spPr>
+          <a:xfrm>
+            <a:off x="9144000" y="4143375"/>
+            <a:ext cx="922020" cy="619125"/>
           </a:xfrm>
           <a:prstGeom prst="roundRect">
             <a:avLst>
-              <a:gd name="adj" fmla="val 9090"/>
+              <a:gd name="adj" fmla="val 6153"/>
             </a:avLst>
           </a:prstGeom>
           <a:solidFill>
@@ -9696,130 +11422,59 @@
       </p:sp>
       <p:sp>
         <p:nvSpPr>
-          <p:cNvPr id="25" name="Oval 24"/>
-          <p:cNvSpPr/>
-          <p:nvPr/>
-        </p:nvSpPr>
-        <p:spPr>
-          <a:xfrm>
-            <a:off x="1390650" y="5434012"/>
-            <a:ext cx="533400" cy="533400"/>
-          </a:xfrm>
-          <a:prstGeom prst="ellipse">
-            <a:avLst/>
-          </a:prstGeom>
-          <a:solidFill>
-            <a:srgbClr val="0D2B5E"/>
-          </a:solidFill>
-          <a:ln>
-            <a:noFill/>
-          </a:ln>
-          <a:effectLst/>
-        </p:spPr>
-        <p:txBody>
-          <a:bodyPr rtlCol="0" anchor="ctr" wrap="square"/>
-          <a:lstStyle/>
-          <a:p>
-            <a:pPr algn="ctr"/>
-          </a:p>
-        </p:txBody>
-      </p:sp>
-      <p:sp>
-        <p:nvSpPr>
-          <p:cNvPr id="26" name="TextBox 25"/>
-          <p:cNvSpPr txBox="1"/>
-          <p:nvPr/>
-        </p:nvSpPr>
-        <p:spPr>
-          <a:xfrm>
-            <a:off x="1390650" y="5557838"/>
-            <a:ext cx="533400" cy="323850"/>
-          </a:xfrm>
-          <a:prstGeom prst="rect">
-            <a:avLst/>
-          </a:prstGeom>
-          <a:noFill/>
-        </p:spPr>
-        <p:txBody>
-          <a:bodyPr wrap="square" lIns="0" rIns="0" tIns="0" bIns="0" anchor="t">
+          <p:cNvPr id="29" name="TextBox 28"/>
+          <p:cNvSpPr txBox="1"/>
+          <p:nvPr/>
+        </p:nvSpPr>
+        <p:spPr>
+          <a:xfrm>
+            <a:off x="9239250" y="4143375"/>
+            <a:ext cx="731520" cy="619125"/>
+          </a:xfrm>
+          <a:prstGeom prst="rect">
+            <a:avLst/>
+          </a:prstGeom>
+          <a:noFill/>
+        </p:spPr>
+        <p:txBody>
+          <a:bodyPr wrap="square" lIns="0" rIns="0" tIns="0" bIns="0" anchor="ctr">
             <a:spAutoFit/>
           </a:bodyPr>
           <a:lstStyle/>
           <a:p>
             <a:pPr algn="ctr">
               <a:lnSpc>
-                <a:spcPct val="100000"/>
-              </a:lnSpc>
-            </a:pPr>
-            <a:r>
-              <a:rPr sz="2100" b="1">
-                <a:solidFill>
-                  <a:srgbClr val="FFFFFF"/>
-                </a:solidFill>
-                <a:latin typeface="Pretendard"/>
-                <a:ea typeface="Pretendard"/>
-                <a:cs typeface="Pretendard"/>
-              </a:rPr>
-              <a:t>5</a:t>
-            </a:r>
-          </a:p>
-        </p:txBody>
-      </p:sp>
-      <p:sp>
-        <p:nvSpPr>
-          <p:cNvPr id="27" name="TextBox 26"/>
-          <p:cNvSpPr txBox="1"/>
-          <p:nvPr/>
-        </p:nvSpPr>
-        <p:spPr>
-          <a:xfrm>
-            <a:off x="2190750" y="5438775"/>
-            <a:ext cx="14573250" cy="523875"/>
-          </a:xfrm>
-          <a:prstGeom prst="rect">
-            <a:avLst/>
-          </a:prstGeom>
-          <a:noFill/>
-        </p:spPr>
-        <p:txBody>
-          <a:bodyPr wrap="square" lIns="0" rIns="0" tIns="0" bIns="0" anchor="ctr">
-            <a:spAutoFit/>
-          </a:bodyPr>
-          <a:lstStyle/>
-          <a:p>
-            <a:pPr algn="l">
-              <a:lnSpc>
-                <a:spcPct val="100000"/>
-              </a:lnSpc>
-            </a:pPr>
-            <a:r>
-              <a:rPr sz="2100" b="1">
-                <a:solidFill>
-                  <a:srgbClr val="0D2B5E"/>
-                </a:solidFill>
-                <a:latin typeface="Pretendard"/>
-                <a:ea typeface="Pretendard"/>
-                <a:cs typeface="Pretendard"/>
-              </a:rPr>
-              <a:t>MinIO 에서 metadata/ · data/ 파일이 실제로 생긴 것을 확인했다</a:t>
-            </a:r>
-          </a:p>
-        </p:txBody>
-      </p:sp>
-      <p:sp>
-        <p:nvSpPr>
-          <p:cNvPr id="28" name="Rounded Rectangle 27"/>
-          <p:cNvSpPr/>
-          <p:nvPr/>
-        </p:nvSpPr>
-        <p:spPr>
-          <a:xfrm>
-            <a:off x="1143000" y="6076950"/>
-            <a:ext cx="16002000" cy="523875"/>
+                <a:spcPct val="115000"/>
+              </a:lnSpc>
+            </a:pPr>
+            <a:r>
+              <a:rPr sz="1875" b="0">
+                <a:solidFill>
+                  <a:srgbClr val="3D3D3D"/>
+                </a:solidFill>
+                <a:latin typeface="Pretendard"/>
+                <a:ea typeface="Pretendard"/>
+                <a:cs typeface="Pretendard"/>
+              </a:rPr>
+              <a:t>8</a:t>
+            </a:r>
+          </a:p>
+        </p:txBody>
+      </p:sp>
+      <p:sp>
+        <p:nvSpPr>
+          <p:cNvPr id="30" name="Rounded Rectangle 29"/>
+          <p:cNvSpPr/>
+          <p:nvPr/>
+        </p:nvSpPr>
+        <p:spPr>
+          <a:xfrm>
+            <a:off x="10104120" y="4143375"/>
+            <a:ext cx="7040880" cy="619125"/>
           </a:xfrm>
           <a:prstGeom prst="roundRect">
             <a:avLst>
-              <a:gd name="adj" fmla="val 9090"/>
+              <a:gd name="adj" fmla="val 6153"/>
             </a:avLst>
           </a:prstGeom>
           <a:solidFill>
@@ -9842,112 +11497,41 @@
       </p:sp>
       <p:sp>
         <p:nvSpPr>
-          <p:cNvPr id="29" name="Oval 28"/>
-          <p:cNvSpPr/>
-          <p:nvPr/>
-        </p:nvSpPr>
-        <p:spPr>
-          <a:xfrm>
-            <a:off x="1390650" y="6072188"/>
-            <a:ext cx="533400" cy="533400"/>
-          </a:xfrm>
-          <a:prstGeom prst="ellipse">
-            <a:avLst/>
-          </a:prstGeom>
-          <a:solidFill>
-            <a:srgbClr val="0D2B5E"/>
-          </a:solidFill>
-          <a:ln>
-            <a:noFill/>
-          </a:ln>
-          <a:effectLst/>
-        </p:spPr>
-        <p:txBody>
-          <a:bodyPr rtlCol="0" anchor="ctr" wrap="square"/>
-          <a:lstStyle/>
-          <a:p>
-            <a:pPr algn="ctr"/>
-          </a:p>
-        </p:txBody>
-      </p:sp>
-      <p:sp>
-        <p:nvSpPr>
-          <p:cNvPr id="30" name="TextBox 29"/>
-          <p:cNvSpPr txBox="1"/>
-          <p:nvPr/>
-        </p:nvSpPr>
-        <p:spPr>
-          <a:xfrm>
-            <a:off x="1390650" y="6196012"/>
-            <a:ext cx="533400" cy="323850"/>
-          </a:xfrm>
-          <a:prstGeom prst="rect">
-            <a:avLst/>
-          </a:prstGeom>
-          <a:noFill/>
-        </p:spPr>
-        <p:txBody>
-          <a:bodyPr wrap="square" lIns="0" rIns="0" tIns="0" bIns="0" anchor="t">
+          <p:cNvPr id="31" name="TextBox 30"/>
+          <p:cNvSpPr txBox="1"/>
+          <p:nvPr/>
+        </p:nvSpPr>
+        <p:spPr>
+          <a:xfrm>
+            <a:off x="10199370" y="4143375"/>
+            <a:ext cx="6850380" cy="619125"/>
+          </a:xfrm>
+          <a:prstGeom prst="rect">
+            <a:avLst/>
+          </a:prstGeom>
+          <a:noFill/>
+        </p:spPr>
+        <p:txBody>
+          <a:bodyPr wrap="square" lIns="0" rIns="0" tIns="0" bIns="0" anchor="ctr">
             <a:spAutoFit/>
           </a:bodyPr>
           <a:lstStyle/>
           <a:p>
             <a:pPr algn="ctr">
               <a:lnSpc>
-                <a:spcPct val="100000"/>
-              </a:lnSpc>
-            </a:pPr>
-            <a:r>
-              <a:rPr sz="2100" b="1">
-                <a:solidFill>
-                  <a:srgbClr val="FFFFFF"/>
-                </a:solidFill>
-                <a:latin typeface="Pretendard"/>
-                <a:ea typeface="Pretendard"/>
-                <a:cs typeface="Pretendard"/>
-              </a:rPr>
-              <a:t>6</a:t>
-            </a:r>
-          </a:p>
-        </p:txBody>
-      </p:sp>
-      <p:sp>
-        <p:nvSpPr>
-          <p:cNvPr id="31" name="TextBox 30"/>
-          <p:cNvSpPr txBox="1"/>
-          <p:nvPr/>
-        </p:nvSpPr>
-        <p:spPr>
-          <a:xfrm>
-            <a:off x="2190750" y="6076950"/>
-            <a:ext cx="14573250" cy="523875"/>
-          </a:xfrm>
-          <a:prstGeom prst="rect">
-            <a:avLst/>
-          </a:prstGeom>
-          <a:noFill/>
-        </p:spPr>
-        <p:txBody>
-          <a:bodyPr wrap="square" lIns="0" rIns="0" tIns="0" bIns="0" anchor="ctr">
-            <a:spAutoFit/>
-          </a:bodyPr>
-          <a:lstStyle/>
-          <a:p>
-            <a:pPr algn="l">
-              <a:lnSpc>
-                <a:spcPct val="100000"/>
-              </a:lnSpc>
-            </a:pPr>
-            <a:r>
-              <a:rPr sz="2100" b="1">
-                <a:solidFill>
-                  <a:srgbClr val="0D2B5E"/>
-                </a:solidFill>
-                <a:latin typeface="Pretendard"/>
-                <a:ea typeface="Pretendard"/>
-                <a:cs typeface="Pretendard"/>
-              </a:rPr>
-              <a:t>snapshots 에서 id 를 찾아 VERSION AS OF 조회에 성공했다</a:t>
+                <a:spcPct val="115000"/>
+              </a:lnSpc>
+            </a:pPr>
+            <a:r>
+              <a:rPr sz="1875" b="0">
+                <a:solidFill>
+                  <a:srgbClr val="3D3D3D"/>
+                </a:solidFill>
+                <a:latin typeface="Pretendard"/>
+                <a:ea typeface="Pretendard"/>
+                <a:cs typeface="Pretendard"/>
+              </a:rPr>
+              <a:t>두 시점을 UNION ALL 로 비교</a:t>
             </a:r>
           </a:p>
         </p:txBody>
@@ -9960,12 +11544,87 @@
         </p:nvSpPr>
         <p:spPr>
           <a:xfrm>
-            <a:off x="1143000" y="6715125"/>
-            <a:ext cx="16002000" cy="523875"/>
+            <a:off x="1143000" y="4838700"/>
+            <a:ext cx="922020" cy="619125"/>
           </a:xfrm>
           <a:prstGeom prst="roundRect">
             <a:avLst>
-              <a:gd name="adj" fmla="val 9090"/>
+              <a:gd name="adj" fmla="val 6153"/>
+            </a:avLst>
+          </a:prstGeom>
+          <a:solidFill>
+            <a:srgbClr val="EDF3FD"/>
+          </a:solidFill>
+          <a:ln w="9525">
+            <a:solidFill>
+              <a:srgbClr val="BFD3F5"/>
+            </a:solidFill>
+          </a:ln>
+          <a:effectLst/>
+        </p:spPr>
+        <p:txBody>
+          <a:bodyPr rtlCol="0" anchor="ctr" wrap="square"/>
+          <a:lstStyle/>
+          <a:p>
+            <a:pPr algn="ctr"/>
+          </a:p>
+        </p:txBody>
+      </p:sp>
+      <p:sp>
+        <p:nvSpPr>
+          <p:cNvPr id="33" name="TextBox 32"/>
+          <p:cNvSpPr txBox="1"/>
+          <p:nvPr/>
+        </p:nvSpPr>
+        <p:spPr>
+          <a:xfrm>
+            <a:off x="1238250" y="4838700"/>
+            <a:ext cx="731520" cy="619125"/>
+          </a:xfrm>
+          <a:prstGeom prst="rect">
+            <a:avLst/>
+          </a:prstGeom>
+          <a:noFill/>
+        </p:spPr>
+        <p:txBody>
+          <a:bodyPr wrap="square" lIns="0" rIns="0" tIns="0" bIns="0" anchor="ctr">
+            <a:spAutoFit/>
+          </a:bodyPr>
+          <a:lstStyle/>
+          <a:p>
+            <a:pPr algn="l">
+              <a:lnSpc>
+                <a:spcPct val="115000"/>
+              </a:lnSpc>
+            </a:pPr>
+            <a:r>
+              <a:rPr sz="1875" b="1">
+                <a:solidFill>
+                  <a:srgbClr val="0D2B5E"/>
+                </a:solidFill>
+                <a:latin typeface="Pretendard"/>
+                <a:ea typeface="Pretendard"/>
+                <a:cs typeface="Pretendard"/>
+              </a:rPr>
+              <a:t>3</a:t>
+            </a:r>
+          </a:p>
+        </p:txBody>
+      </p:sp>
+      <p:sp>
+        <p:nvSpPr>
+          <p:cNvPr id="34" name="Rounded Rectangle 33"/>
+          <p:cNvSpPr/>
+          <p:nvPr/>
+        </p:nvSpPr>
+        <p:spPr>
+          <a:xfrm>
+            <a:off x="2103120" y="4838700"/>
+            <a:ext cx="7002780" cy="619125"/>
+          </a:xfrm>
+          <a:prstGeom prst="roundRect">
+            <a:avLst>
+              <a:gd name="adj" fmla="val 6153"/>
             </a:avLst>
           </a:prstGeom>
           <a:solidFill>
@@ -9988,112 +11647,41 @@
       </p:sp>
       <p:sp>
         <p:nvSpPr>
-          <p:cNvPr id="33" name="Oval 32"/>
-          <p:cNvSpPr/>
-          <p:nvPr/>
-        </p:nvSpPr>
-        <p:spPr>
-          <a:xfrm>
-            <a:off x="1390650" y="6710362"/>
-            <a:ext cx="533400" cy="533400"/>
-          </a:xfrm>
-          <a:prstGeom prst="ellipse">
-            <a:avLst/>
-          </a:prstGeom>
-          <a:solidFill>
-            <a:srgbClr val="0D2B5E"/>
-          </a:solidFill>
-          <a:ln>
-            <a:noFill/>
-          </a:ln>
-          <a:effectLst/>
-        </p:spPr>
-        <p:txBody>
-          <a:bodyPr rtlCol="0" anchor="ctr" wrap="square"/>
-          <a:lstStyle/>
-          <a:p>
-            <a:pPr algn="ctr"/>
-          </a:p>
-        </p:txBody>
-      </p:sp>
-      <p:sp>
-        <p:nvSpPr>
-          <p:cNvPr id="34" name="TextBox 33"/>
-          <p:cNvSpPr txBox="1"/>
-          <p:nvPr/>
-        </p:nvSpPr>
-        <p:spPr>
-          <a:xfrm>
-            <a:off x="1390650" y="6834188"/>
-            <a:ext cx="533400" cy="323850"/>
-          </a:xfrm>
-          <a:prstGeom prst="rect">
-            <a:avLst/>
-          </a:prstGeom>
-          <a:noFill/>
-        </p:spPr>
-        <p:txBody>
-          <a:bodyPr wrap="square" lIns="0" rIns="0" tIns="0" bIns="0" anchor="t">
+          <p:cNvPr id="35" name="TextBox 34"/>
+          <p:cNvSpPr txBox="1"/>
+          <p:nvPr/>
+        </p:nvSpPr>
+        <p:spPr>
+          <a:xfrm>
+            <a:off x="2198370" y="4838700"/>
+            <a:ext cx="6812280" cy="619125"/>
+          </a:xfrm>
+          <a:prstGeom prst="rect">
+            <a:avLst/>
+          </a:prstGeom>
+          <a:noFill/>
+        </p:spPr>
+        <p:txBody>
+          <a:bodyPr wrap="square" lIns="0" rIns="0" tIns="0" bIns="0" anchor="ctr">
             <a:spAutoFit/>
           </a:bodyPr>
           <a:lstStyle/>
           <a:p>
             <a:pPr algn="ctr">
               <a:lnSpc>
-                <a:spcPct val="100000"/>
-              </a:lnSpc>
-            </a:pPr>
-            <a:r>
-              <a:rPr sz="2100" b="1">
-                <a:solidFill>
-                  <a:srgbClr val="FFFFFF"/>
-                </a:solidFill>
-                <a:latin typeface="Pretendard"/>
-                <a:ea typeface="Pretendard"/>
-                <a:cs typeface="Pretendard"/>
-              </a:rPr>
-              <a:t>7</a:t>
-            </a:r>
-          </a:p>
-        </p:txBody>
-      </p:sp>
-      <p:sp>
-        <p:nvSpPr>
-          <p:cNvPr id="35" name="TextBox 34"/>
-          <p:cNvSpPr txBox="1"/>
-          <p:nvPr/>
-        </p:nvSpPr>
-        <p:spPr>
-          <a:xfrm>
-            <a:off x="2190750" y="6715125"/>
-            <a:ext cx="14573250" cy="523875"/>
-          </a:xfrm>
-          <a:prstGeom prst="rect">
-            <a:avLst/>
-          </a:prstGeom>
-          <a:noFill/>
-        </p:spPr>
-        <p:txBody>
-          <a:bodyPr wrap="square" lIns="0" rIns="0" tIns="0" bIns="0" anchor="ctr">
-            <a:spAutoFit/>
-          </a:bodyPr>
-          <a:lstStyle/>
-          <a:p>
-            <a:pPr algn="l">
-              <a:lnSpc>
-                <a:spcPct val="100000"/>
-              </a:lnSpc>
-            </a:pPr>
-            <a:r>
-              <a:rPr sz="2100" b="1">
-                <a:solidFill>
-                  <a:srgbClr val="0D2B5E"/>
-                </a:solidFill>
-                <a:latin typeface="Pretendard"/>
-                <a:ea typeface="Pretendard"/>
-                <a:cs typeface="Pretendard"/>
-              </a:rPr>
-              <a:t>rollback_to_snapshot 으로 되돌리고 이력에 남는 것을 확인했다</a:t>
+                <a:spcPct val="115000"/>
+              </a:lnSpc>
+            </a:pPr>
+            <a:r>
+              <a:rPr sz="1875" b="0">
+                <a:solidFill>
+                  <a:srgbClr val="3D3D3D"/>
+                </a:solidFill>
+                <a:latin typeface="Pretendard"/>
+                <a:ea typeface="Pretendard"/>
+                <a:cs typeface="Pretendard"/>
+              </a:rPr>
+              <a:t>컨테이너 4개 모두 Up</a:t>
             </a:r>
           </a:p>
         </p:txBody>
@@ -10106,12 +11694,12 @@
         </p:nvSpPr>
         <p:spPr>
           <a:xfrm>
-            <a:off x="1143000" y="7353300"/>
-            <a:ext cx="16002000" cy="523875"/>
+            <a:off x="9144000" y="4838700"/>
+            <a:ext cx="922020" cy="619125"/>
           </a:xfrm>
           <a:prstGeom prst="roundRect">
             <a:avLst>
-              <a:gd name="adj" fmla="val 9090"/>
+              <a:gd name="adj" fmla="val 6153"/>
             </a:avLst>
           </a:prstGeom>
           <a:solidFill>
@@ -10134,20 +11722,1077 @@
       </p:sp>
       <p:sp>
         <p:nvSpPr>
-          <p:cNvPr id="37" name="Oval 36"/>
-          <p:cNvSpPr/>
-          <p:nvPr/>
-        </p:nvSpPr>
-        <p:spPr>
-          <a:xfrm>
-            <a:off x="1390650" y="7348538"/>
-            <a:ext cx="533400" cy="533400"/>
-          </a:xfrm>
-          <a:prstGeom prst="ellipse">
-            <a:avLst/>
-          </a:prstGeom>
-          <a:solidFill>
-            <a:srgbClr val="0D2B5E"/>
+          <p:cNvPr id="37" name="TextBox 36"/>
+          <p:cNvSpPr txBox="1"/>
+          <p:nvPr/>
+        </p:nvSpPr>
+        <p:spPr>
+          <a:xfrm>
+            <a:off x="9239250" y="4838700"/>
+            <a:ext cx="731520" cy="619125"/>
+          </a:xfrm>
+          <a:prstGeom prst="rect">
+            <a:avLst/>
+          </a:prstGeom>
+          <a:noFill/>
+        </p:spPr>
+        <p:txBody>
+          <a:bodyPr wrap="square" lIns="0" rIns="0" tIns="0" bIns="0" anchor="ctr">
+            <a:spAutoFit/>
+          </a:bodyPr>
+          <a:lstStyle/>
+          <a:p>
+            <a:pPr algn="ctr">
+              <a:lnSpc>
+                <a:spcPct val="115000"/>
+              </a:lnSpc>
+            </a:pPr>
+            <a:r>
+              <a:rPr sz="1875" b="0">
+                <a:solidFill>
+                  <a:srgbClr val="3D3D3D"/>
+                </a:solidFill>
+                <a:latin typeface="Pretendard"/>
+                <a:ea typeface="Pretendard"/>
+                <a:cs typeface="Pretendard"/>
+              </a:rPr>
+              <a:t>9</a:t>
+            </a:r>
+          </a:p>
+        </p:txBody>
+      </p:sp>
+      <p:sp>
+        <p:nvSpPr>
+          <p:cNvPr id="38" name="Rounded Rectangle 37"/>
+          <p:cNvSpPr/>
+          <p:nvPr/>
+        </p:nvSpPr>
+        <p:spPr>
+          <a:xfrm>
+            <a:off x="10104120" y="4838700"/>
+            <a:ext cx="7040880" cy="619125"/>
+          </a:xfrm>
+          <a:prstGeom prst="roundRect">
+            <a:avLst>
+              <a:gd name="adj" fmla="val 6153"/>
+            </a:avLst>
+          </a:prstGeom>
+          <a:solidFill>
+            <a:srgbClr val="FAFBFD"/>
+          </a:solidFill>
+          <a:ln w="9525">
+            <a:solidFill>
+              <a:srgbClr val="DCE1E8"/>
+            </a:solidFill>
+          </a:ln>
+          <a:effectLst/>
+        </p:spPr>
+        <p:txBody>
+          <a:bodyPr rtlCol="0" anchor="ctr" wrap="square"/>
+          <a:lstStyle/>
+          <a:p>
+            <a:pPr algn="ctr"/>
+          </a:p>
+        </p:txBody>
+      </p:sp>
+      <p:sp>
+        <p:nvSpPr>
+          <p:cNvPr id="39" name="TextBox 38"/>
+          <p:cNvSpPr txBox="1"/>
+          <p:nvPr/>
+        </p:nvSpPr>
+        <p:spPr>
+          <a:xfrm>
+            <a:off x="10199370" y="4838700"/>
+            <a:ext cx="6850380" cy="619125"/>
+          </a:xfrm>
+          <a:prstGeom prst="rect">
+            <a:avLst/>
+          </a:prstGeom>
+          <a:noFill/>
+        </p:spPr>
+        <p:txBody>
+          <a:bodyPr wrap="square" lIns="0" rIns="0" tIns="0" bIns="0" anchor="ctr">
+            <a:spAutoFit/>
+          </a:bodyPr>
+          <a:lstStyle/>
+          <a:p>
+            <a:pPr algn="ctr">
+              <a:lnSpc>
+                <a:spcPct val="115000"/>
+              </a:lnSpc>
+            </a:pPr>
+            <a:r>
+              <a:rPr sz="1875" b="0">
+                <a:solidFill>
+                  <a:srgbClr val="3D3D3D"/>
+                </a:solidFill>
+                <a:latin typeface="Pretendard"/>
+                <a:ea typeface="Pretendard"/>
+                <a:cs typeface="Pretendard"/>
+              </a:rPr>
+              <a:t>롤백: snapshots 그대로 · history +1</a:t>
+            </a:r>
+          </a:p>
+        </p:txBody>
+      </p:sp>
+      <p:sp>
+        <p:nvSpPr>
+          <p:cNvPr id="40" name="Rounded Rectangle 39"/>
+          <p:cNvSpPr/>
+          <p:nvPr/>
+        </p:nvSpPr>
+        <p:spPr>
+          <a:xfrm>
+            <a:off x="1143000" y="5534025"/>
+            <a:ext cx="922020" cy="619125"/>
+          </a:xfrm>
+          <a:prstGeom prst="roundRect">
+            <a:avLst>
+              <a:gd name="adj" fmla="val 6153"/>
+            </a:avLst>
+          </a:prstGeom>
+          <a:solidFill>
+            <a:srgbClr val="EDF3FD"/>
+          </a:solidFill>
+          <a:ln w="9525">
+            <a:solidFill>
+              <a:srgbClr val="BFD3F5"/>
+            </a:solidFill>
+          </a:ln>
+          <a:effectLst/>
+        </p:spPr>
+        <p:txBody>
+          <a:bodyPr rtlCol="0" anchor="ctr" wrap="square"/>
+          <a:lstStyle/>
+          <a:p>
+            <a:pPr algn="ctr"/>
+          </a:p>
+        </p:txBody>
+      </p:sp>
+      <p:sp>
+        <p:nvSpPr>
+          <p:cNvPr id="41" name="TextBox 40"/>
+          <p:cNvSpPr txBox="1"/>
+          <p:nvPr/>
+        </p:nvSpPr>
+        <p:spPr>
+          <a:xfrm>
+            <a:off x="1238250" y="5534025"/>
+            <a:ext cx="731520" cy="619125"/>
+          </a:xfrm>
+          <a:prstGeom prst="rect">
+            <a:avLst/>
+          </a:prstGeom>
+          <a:noFill/>
+        </p:spPr>
+        <p:txBody>
+          <a:bodyPr wrap="square" lIns="0" rIns="0" tIns="0" bIns="0" anchor="ctr">
+            <a:spAutoFit/>
+          </a:bodyPr>
+          <a:lstStyle/>
+          <a:p>
+            <a:pPr algn="l">
+              <a:lnSpc>
+                <a:spcPct val="115000"/>
+              </a:lnSpc>
+            </a:pPr>
+            <a:r>
+              <a:rPr sz="1875" b="1">
+                <a:solidFill>
+                  <a:srgbClr val="0D2B5E"/>
+                </a:solidFill>
+                <a:latin typeface="Pretendard"/>
+                <a:ea typeface="Pretendard"/>
+                <a:cs typeface="Pretendard"/>
+              </a:rPr>
+              <a:t>4</a:t>
+            </a:r>
+          </a:p>
+        </p:txBody>
+      </p:sp>
+      <p:sp>
+        <p:nvSpPr>
+          <p:cNvPr id="42" name="Rounded Rectangle 41"/>
+          <p:cNvSpPr/>
+          <p:nvPr/>
+        </p:nvSpPr>
+        <p:spPr>
+          <a:xfrm>
+            <a:off x="2103120" y="5534025"/>
+            <a:ext cx="7002780" cy="619125"/>
+          </a:xfrm>
+          <a:prstGeom prst="roundRect">
+            <a:avLst>
+              <a:gd name="adj" fmla="val 6153"/>
+            </a:avLst>
+          </a:prstGeom>
+          <a:solidFill>
+            <a:srgbClr val="FAFBFD"/>
+          </a:solidFill>
+          <a:ln w="9525">
+            <a:solidFill>
+              <a:srgbClr val="DCE1E8"/>
+            </a:solidFill>
+          </a:ln>
+          <a:effectLst/>
+        </p:spPr>
+        <p:txBody>
+          <a:bodyPr rtlCol="0" anchor="ctr" wrap="square"/>
+          <a:lstStyle/>
+          <a:p>
+            <a:pPr algn="ctr"/>
+          </a:p>
+        </p:txBody>
+      </p:sp>
+      <p:sp>
+        <p:nvSpPr>
+          <p:cNvPr id="43" name="TextBox 42"/>
+          <p:cNvSpPr txBox="1"/>
+          <p:nvPr/>
+        </p:nvSpPr>
+        <p:spPr>
+          <a:xfrm>
+            <a:off x="2198370" y="5534025"/>
+            <a:ext cx="6812280" cy="619125"/>
+          </a:xfrm>
+          <a:prstGeom prst="rect">
+            <a:avLst/>
+          </a:prstGeom>
+          <a:noFill/>
+        </p:spPr>
+        <p:txBody>
+          <a:bodyPr wrap="square" lIns="0" rIns="0" tIns="0" bIns="0" anchor="ctr">
+            <a:spAutoFit/>
+          </a:bodyPr>
+          <a:lstStyle/>
+          <a:p>
+            <a:pPr algn="ctr">
+              <a:lnSpc>
+                <a:spcPct val="115000"/>
+              </a:lnSpc>
+            </a:pPr>
+            <a:r>
+              <a:rPr sz="1875" b="0">
+                <a:solidFill>
+                  <a:srgbClr val="3D3D3D"/>
+                </a:solidFill>
+                <a:latin typeface="Pretendard"/>
+                <a:ea typeface="Pretendard"/>
+                <a:cs typeface="Pretendard"/>
+              </a:rPr>
+              <a:t>8181 응답 · Spark 카탈로그 설정</a:t>
+            </a:r>
+          </a:p>
+        </p:txBody>
+      </p:sp>
+      <p:sp>
+        <p:nvSpPr>
+          <p:cNvPr id="44" name="Rounded Rectangle 43"/>
+          <p:cNvSpPr/>
+          <p:nvPr/>
+        </p:nvSpPr>
+        <p:spPr>
+          <a:xfrm>
+            <a:off x="9144000" y="5534025"/>
+            <a:ext cx="922020" cy="619125"/>
+          </a:xfrm>
+          <a:prstGeom prst="roundRect">
+            <a:avLst>
+              <a:gd name="adj" fmla="val 6153"/>
+            </a:avLst>
+          </a:prstGeom>
+          <a:solidFill>
+            <a:srgbClr val="FAFBFD"/>
+          </a:solidFill>
+          <a:ln w="9525">
+            <a:solidFill>
+              <a:srgbClr val="DCE1E8"/>
+            </a:solidFill>
+          </a:ln>
+          <a:effectLst/>
+        </p:spPr>
+        <p:txBody>
+          <a:bodyPr rtlCol="0" anchor="ctr" wrap="square"/>
+          <a:lstStyle/>
+          <a:p>
+            <a:pPr algn="ctr"/>
+          </a:p>
+        </p:txBody>
+      </p:sp>
+      <p:sp>
+        <p:nvSpPr>
+          <p:cNvPr id="45" name="TextBox 44"/>
+          <p:cNvSpPr txBox="1"/>
+          <p:nvPr/>
+        </p:nvSpPr>
+        <p:spPr>
+          <a:xfrm>
+            <a:off x="9239250" y="5534025"/>
+            <a:ext cx="731520" cy="619125"/>
+          </a:xfrm>
+          <a:prstGeom prst="rect">
+            <a:avLst/>
+          </a:prstGeom>
+          <a:noFill/>
+        </p:spPr>
+        <p:txBody>
+          <a:bodyPr wrap="square" lIns="0" rIns="0" tIns="0" bIns="0" anchor="ctr">
+            <a:spAutoFit/>
+          </a:bodyPr>
+          <a:lstStyle/>
+          <a:p>
+            <a:pPr algn="ctr">
+              <a:lnSpc>
+                <a:spcPct val="115000"/>
+              </a:lnSpc>
+            </a:pPr>
+            <a:r>
+              <a:rPr sz="1875" b="0">
+                <a:solidFill>
+                  <a:srgbClr val="3D3D3D"/>
+                </a:solidFill>
+                <a:latin typeface="Pretendard"/>
+                <a:ea typeface="Pretendard"/>
+                <a:cs typeface="Pretendard"/>
+              </a:rPr>
+              <a:t>10</a:t>
+            </a:r>
+          </a:p>
+        </p:txBody>
+      </p:sp>
+      <p:sp>
+        <p:nvSpPr>
+          <p:cNvPr id="46" name="Rounded Rectangle 45"/>
+          <p:cNvSpPr/>
+          <p:nvPr/>
+        </p:nvSpPr>
+        <p:spPr>
+          <a:xfrm>
+            <a:off x="10104120" y="5534025"/>
+            <a:ext cx="7040880" cy="619125"/>
+          </a:xfrm>
+          <a:prstGeom prst="roundRect">
+            <a:avLst>
+              <a:gd name="adj" fmla="val 6153"/>
+            </a:avLst>
+          </a:prstGeom>
+          <a:solidFill>
+            <a:srgbClr val="FAFBFD"/>
+          </a:solidFill>
+          <a:ln w="9525">
+            <a:solidFill>
+              <a:srgbClr val="DCE1E8"/>
+            </a:solidFill>
+          </a:ln>
+          <a:effectLst/>
+        </p:spPr>
+        <p:txBody>
+          <a:bodyPr rtlCol="0" anchor="ctr" wrap="square"/>
+          <a:lstStyle/>
+          <a:p>
+            <a:pPr algn="ctr"/>
+          </a:p>
+        </p:txBody>
+      </p:sp>
+      <p:sp>
+        <p:nvSpPr>
+          <p:cNvPr id="47" name="TextBox 46"/>
+          <p:cNvSpPr txBox="1"/>
+          <p:nvPr/>
+        </p:nvSpPr>
+        <p:spPr>
+          <a:xfrm>
+            <a:off x="10199370" y="5534025"/>
+            <a:ext cx="6850380" cy="619125"/>
+          </a:xfrm>
+          <a:prstGeom prst="rect">
+            <a:avLst/>
+          </a:prstGeom>
+          <a:noFill/>
+        </p:spPr>
+        <p:txBody>
+          <a:bodyPr wrap="square" lIns="0" rIns="0" tIns="0" bIns="0" anchor="ctr">
+            <a:spAutoFit/>
+          </a:bodyPr>
+          <a:lstStyle/>
+          <a:p>
+            <a:pPr algn="ctr">
+              <a:lnSpc>
+                <a:spcPct val="115000"/>
+              </a:lnSpc>
+            </a:pPr>
+            <a:r>
+              <a:rPr sz="1875" b="0">
+                <a:solidFill>
+                  <a:srgbClr val="3D3D3D"/>
+                </a:solidFill>
+                <a:latin typeface="Pretendard"/>
+                <a:ea typeface="Pretendard"/>
+                <a:cs typeface="Pretendard"/>
+              </a:rPr>
+              <a:t>ADD COLUMN 뒤 parquet 그대로</a:t>
+            </a:r>
+          </a:p>
+        </p:txBody>
+      </p:sp>
+      <p:sp>
+        <p:nvSpPr>
+          <p:cNvPr id="48" name="Rounded Rectangle 47"/>
+          <p:cNvSpPr/>
+          <p:nvPr/>
+        </p:nvSpPr>
+        <p:spPr>
+          <a:xfrm>
+            <a:off x="1143000" y="6229350"/>
+            <a:ext cx="922020" cy="619125"/>
+          </a:xfrm>
+          <a:prstGeom prst="roundRect">
+            <a:avLst>
+              <a:gd name="adj" fmla="val 6153"/>
+            </a:avLst>
+          </a:prstGeom>
+          <a:solidFill>
+            <a:srgbClr val="EDF3FD"/>
+          </a:solidFill>
+          <a:ln w="9525">
+            <a:solidFill>
+              <a:srgbClr val="BFD3F5"/>
+            </a:solidFill>
+          </a:ln>
+          <a:effectLst/>
+        </p:spPr>
+        <p:txBody>
+          <a:bodyPr rtlCol="0" anchor="ctr" wrap="square"/>
+          <a:lstStyle/>
+          <a:p>
+            <a:pPr algn="ctr"/>
+          </a:p>
+        </p:txBody>
+      </p:sp>
+      <p:sp>
+        <p:nvSpPr>
+          <p:cNvPr id="49" name="TextBox 48"/>
+          <p:cNvSpPr txBox="1"/>
+          <p:nvPr/>
+        </p:nvSpPr>
+        <p:spPr>
+          <a:xfrm>
+            <a:off x="1238250" y="6229350"/>
+            <a:ext cx="731520" cy="619125"/>
+          </a:xfrm>
+          <a:prstGeom prst="rect">
+            <a:avLst/>
+          </a:prstGeom>
+          <a:noFill/>
+        </p:spPr>
+        <p:txBody>
+          <a:bodyPr wrap="square" lIns="0" rIns="0" tIns="0" bIns="0" anchor="ctr">
+            <a:spAutoFit/>
+          </a:bodyPr>
+          <a:lstStyle/>
+          <a:p>
+            <a:pPr algn="l">
+              <a:lnSpc>
+                <a:spcPct val="115000"/>
+              </a:lnSpc>
+            </a:pPr>
+            <a:r>
+              <a:rPr sz="1875" b="1">
+                <a:solidFill>
+                  <a:srgbClr val="0D2B5E"/>
+                </a:solidFill>
+                <a:latin typeface="Pretendard"/>
+                <a:ea typeface="Pretendard"/>
+                <a:cs typeface="Pretendard"/>
+              </a:rPr>
+              <a:t>5</a:t>
+            </a:r>
+          </a:p>
+        </p:txBody>
+      </p:sp>
+      <p:sp>
+        <p:nvSpPr>
+          <p:cNvPr id="50" name="Rounded Rectangle 49"/>
+          <p:cNvSpPr/>
+          <p:nvPr/>
+        </p:nvSpPr>
+        <p:spPr>
+          <a:xfrm>
+            <a:off x="2103120" y="6229350"/>
+            <a:ext cx="7002780" cy="619125"/>
+          </a:xfrm>
+          <a:prstGeom prst="roundRect">
+            <a:avLst>
+              <a:gd name="adj" fmla="val 6153"/>
+            </a:avLst>
+          </a:prstGeom>
+          <a:solidFill>
+            <a:srgbClr val="FAFBFD"/>
+          </a:solidFill>
+          <a:ln w="9525">
+            <a:solidFill>
+              <a:srgbClr val="DCE1E8"/>
+            </a:solidFill>
+          </a:ln>
+          <a:effectLst/>
+        </p:spPr>
+        <p:txBody>
+          <a:bodyPr rtlCol="0" anchor="ctr" wrap="square"/>
+          <a:lstStyle/>
+          <a:p>
+            <a:pPr algn="ctr"/>
+          </a:p>
+        </p:txBody>
+      </p:sp>
+      <p:sp>
+        <p:nvSpPr>
+          <p:cNvPr id="51" name="TextBox 50"/>
+          <p:cNvSpPr txBox="1"/>
+          <p:nvPr/>
+        </p:nvSpPr>
+        <p:spPr>
+          <a:xfrm>
+            <a:off x="2198370" y="6229350"/>
+            <a:ext cx="6812280" cy="619125"/>
+          </a:xfrm>
+          <a:prstGeom prst="rect">
+            <a:avLst/>
+          </a:prstGeom>
+          <a:noFill/>
+        </p:spPr>
+        <p:txBody>
+          <a:bodyPr wrap="square" lIns="0" rIns="0" tIns="0" bIns="0" anchor="ctr">
+            <a:spAutoFit/>
+          </a:bodyPr>
+          <a:lstStyle/>
+          <a:p>
+            <a:pPr algn="ctr">
+              <a:lnSpc>
+                <a:spcPct val="115000"/>
+              </a:lnSpc>
+            </a:pPr>
+            <a:r>
+              <a:rPr sz="1875" b="0">
+                <a:solidFill>
+                  <a:srgbClr val="3D3D3D"/>
+                </a:solidFill>
+                <a:latin typeface="Pretendard"/>
+                <a:ea typeface="Pretendard"/>
+                <a:cs typeface="Pretendard"/>
+              </a:rPr>
+              <a:t>orders 만들고 INSERT · UPDATE</a:t>
+            </a:r>
+          </a:p>
+        </p:txBody>
+      </p:sp>
+      <p:sp>
+        <p:nvSpPr>
+          <p:cNvPr id="52" name="Rounded Rectangle 51"/>
+          <p:cNvSpPr/>
+          <p:nvPr/>
+        </p:nvSpPr>
+        <p:spPr>
+          <a:xfrm>
+            <a:off x="9144000" y="6229350"/>
+            <a:ext cx="922020" cy="619125"/>
+          </a:xfrm>
+          <a:prstGeom prst="roundRect">
+            <a:avLst>
+              <a:gd name="adj" fmla="val 6153"/>
+            </a:avLst>
+          </a:prstGeom>
+          <a:solidFill>
+            <a:srgbClr val="FAFBFD"/>
+          </a:solidFill>
+          <a:ln w="9525">
+            <a:solidFill>
+              <a:srgbClr val="DCE1E8"/>
+            </a:solidFill>
+          </a:ln>
+          <a:effectLst/>
+        </p:spPr>
+        <p:txBody>
+          <a:bodyPr rtlCol="0" anchor="ctr" wrap="square"/>
+          <a:lstStyle/>
+          <a:p>
+            <a:pPr algn="ctr"/>
+          </a:p>
+        </p:txBody>
+      </p:sp>
+      <p:sp>
+        <p:nvSpPr>
+          <p:cNvPr id="53" name="TextBox 52"/>
+          <p:cNvSpPr txBox="1"/>
+          <p:nvPr/>
+        </p:nvSpPr>
+        <p:spPr>
+          <a:xfrm>
+            <a:off x="9239250" y="6229350"/>
+            <a:ext cx="731520" cy="619125"/>
+          </a:xfrm>
+          <a:prstGeom prst="rect">
+            <a:avLst/>
+          </a:prstGeom>
+          <a:noFill/>
+        </p:spPr>
+        <p:txBody>
+          <a:bodyPr wrap="square" lIns="0" rIns="0" tIns="0" bIns="0" anchor="ctr">
+            <a:spAutoFit/>
+          </a:bodyPr>
+          <a:lstStyle/>
+          <a:p>
+            <a:pPr algn="ctr">
+              <a:lnSpc>
+                <a:spcPct val="115000"/>
+              </a:lnSpc>
+            </a:pPr>
+            <a:r>
+              <a:rPr sz="1875" b="0">
+                <a:solidFill>
+                  <a:srgbClr val="3D3D3D"/>
+                </a:solidFill>
+                <a:latin typeface="Pretendard"/>
+                <a:ea typeface="Pretendard"/>
+                <a:cs typeface="Pretendard"/>
+              </a:rPr>
+              <a:t>11</a:t>
+            </a:r>
+          </a:p>
+        </p:txBody>
+      </p:sp>
+      <p:sp>
+        <p:nvSpPr>
+          <p:cNvPr id="54" name="Rounded Rectangle 53"/>
+          <p:cNvSpPr/>
+          <p:nvPr/>
+        </p:nvSpPr>
+        <p:spPr>
+          <a:xfrm>
+            <a:off x="10104120" y="6229350"/>
+            <a:ext cx="7040880" cy="619125"/>
+          </a:xfrm>
+          <a:prstGeom prst="roundRect">
+            <a:avLst>
+              <a:gd name="adj" fmla="val 6153"/>
+            </a:avLst>
+          </a:prstGeom>
+          <a:solidFill>
+            <a:srgbClr val="FAFBFD"/>
+          </a:solidFill>
+          <a:ln w="9525">
+            <a:solidFill>
+              <a:srgbClr val="DCE1E8"/>
+            </a:solidFill>
+          </a:ln>
+          <a:effectLst/>
+        </p:spPr>
+        <p:txBody>
+          <a:bodyPr rtlCol="0" anchor="ctr" wrap="square"/>
+          <a:lstStyle/>
+          <a:p>
+            <a:pPr algn="ctr"/>
+          </a:p>
+        </p:txBody>
+      </p:sp>
+      <p:sp>
+        <p:nvSpPr>
+          <p:cNvPr id="55" name="TextBox 54"/>
+          <p:cNvSpPr txBox="1"/>
+          <p:nvPr/>
+        </p:nvSpPr>
+        <p:spPr>
+          <a:xfrm>
+            <a:off x="10199370" y="6229350"/>
+            <a:ext cx="6850380" cy="619125"/>
+          </a:xfrm>
+          <a:prstGeom prst="rect">
+            <a:avLst/>
+          </a:prstGeom>
+          <a:noFill/>
+        </p:spPr>
+        <p:txBody>
+          <a:bodyPr wrap="square" lIns="0" rIns="0" tIns="0" bIns="0" anchor="ctr">
+            <a:spAutoFit/>
+          </a:bodyPr>
+          <a:lstStyle/>
+          <a:p>
+            <a:pPr algn="ctr">
+              <a:lnSpc>
+                <a:spcPct val="115000"/>
+              </a:lnSpc>
+            </a:pPr>
+            <a:r>
+              <a:rPr sz="1875" b="0">
+                <a:solidFill>
+                  <a:srgbClr val="3D3D3D"/>
+                </a:solidFill>
+                <a:latin typeface="Pretendard"/>
+                <a:ea typeface="Pretendard"/>
+                <a:cs typeface="Pretendard"/>
+              </a:rPr>
+              <a:t>files 에는 유효한 파일만</a:t>
+            </a:r>
+          </a:p>
+        </p:txBody>
+      </p:sp>
+      <p:sp>
+        <p:nvSpPr>
+          <p:cNvPr id="56" name="Rounded Rectangle 55"/>
+          <p:cNvSpPr/>
+          <p:nvPr/>
+        </p:nvSpPr>
+        <p:spPr>
+          <a:xfrm>
+            <a:off x="1143000" y="6924675"/>
+            <a:ext cx="922020" cy="619125"/>
+          </a:xfrm>
+          <a:prstGeom prst="roundRect">
+            <a:avLst>
+              <a:gd name="adj" fmla="val 6153"/>
+            </a:avLst>
+          </a:prstGeom>
+          <a:solidFill>
+            <a:srgbClr val="EDF3FD"/>
+          </a:solidFill>
+          <a:ln w="9525">
+            <a:solidFill>
+              <a:srgbClr val="BFD3F5"/>
+            </a:solidFill>
+          </a:ln>
+          <a:effectLst/>
+        </p:spPr>
+        <p:txBody>
+          <a:bodyPr rtlCol="0" anchor="ctr" wrap="square"/>
+          <a:lstStyle/>
+          <a:p>
+            <a:pPr algn="ctr"/>
+          </a:p>
+        </p:txBody>
+      </p:sp>
+      <p:sp>
+        <p:nvSpPr>
+          <p:cNvPr id="57" name="TextBox 56"/>
+          <p:cNvSpPr txBox="1"/>
+          <p:nvPr/>
+        </p:nvSpPr>
+        <p:spPr>
+          <a:xfrm>
+            <a:off x="1238250" y="6924675"/>
+            <a:ext cx="731520" cy="619125"/>
+          </a:xfrm>
+          <a:prstGeom prst="rect">
+            <a:avLst/>
+          </a:prstGeom>
+          <a:noFill/>
+        </p:spPr>
+        <p:txBody>
+          <a:bodyPr wrap="square" lIns="0" rIns="0" tIns="0" bIns="0" anchor="ctr">
+            <a:spAutoFit/>
+          </a:bodyPr>
+          <a:lstStyle/>
+          <a:p>
+            <a:pPr algn="l">
+              <a:lnSpc>
+                <a:spcPct val="115000"/>
+              </a:lnSpc>
+            </a:pPr>
+            <a:r>
+              <a:rPr sz="1875" b="1">
+                <a:solidFill>
+                  <a:srgbClr val="0D2B5E"/>
+                </a:solidFill>
+                <a:latin typeface="Pretendard"/>
+                <a:ea typeface="Pretendard"/>
+                <a:cs typeface="Pretendard"/>
+              </a:rPr>
+              <a:t>6</a:t>
+            </a:r>
+          </a:p>
+        </p:txBody>
+      </p:sp>
+      <p:sp>
+        <p:nvSpPr>
+          <p:cNvPr id="58" name="Rounded Rectangle 57"/>
+          <p:cNvSpPr/>
+          <p:nvPr/>
+        </p:nvSpPr>
+        <p:spPr>
+          <a:xfrm>
+            <a:off x="2103120" y="6924675"/>
+            <a:ext cx="7002780" cy="619125"/>
+          </a:xfrm>
+          <a:prstGeom prst="roundRect">
+            <a:avLst>
+              <a:gd name="adj" fmla="val 6153"/>
+            </a:avLst>
+          </a:prstGeom>
+          <a:solidFill>
+            <a:srgbClr val="FAFBFD"/>
+          </a:solidFill>
+          <a:ln w="9525">
+            <a:solidFill>
+              <a:srgbClr val="DCE1E8"/>
+            </a:solidFill>
+          </a:ln>
+          <a:effectLst/>
+        </p:spPr>
+        <p:txBody>
+          <a:bodyPr rtlCol="0" anchor="ctr" wrap="square"/>
+          <a:lstStyle/>
+          <a:p>
+            <a:pPr algn="ctr"/>
+          </a:p>
+        </p:txBody>
+      </p:sp>
+      <p:sp>
+        <p:nvSpPr>
+          <p:cNvPr id="59" name="TextBox 58"/>
+          <p:cNvSpPr txBox="1"/>
+          <p:nvPr/>
+        </p:nvSpPr>
+        <p:spPr>
+          <a:xfrm>
+            <a:off x="2198370" y="6924675"/>
+            <a:ext cx="6812280" cy="619125"/>
+          </a:xfrm>
+          <a:prstGeom prst="rect">
+            <a:avLst/>
+          </a:prstGeom>
+          <a:noFill/>
+        </p:spPr>
+        <p:txBody>
+          <a:bodyPr wrap="square" lIns="0" rIns="0" tIns="0" bIns="0" anchor="ctr">
+            <a:spAutoFit/>
+          </a:bodyPr>
+          <a:lstStyle/>
+          <a:p>
+            <a:pPr algn="ctr">
+              <a:lnSpc>
+                <a:spcPct val="115000"/>
+              </a:lnSpc>
+            </a:pPr>
+            <a:r>
+              <a:rPr sz="1875" b="0">
+                <a:solidFill>
+                  <a:srgbClr val="3D3D3D"/>
+                </a:solidFill>
+                <a:latin typeface="Pretendard"/>
+                <a:ea typeface="Pretendard"/>
+                <a:cs typeface="Pretendard"/>
+              </a:rPr>
+              <a:t>MinIO 에 metadata/ · data/ 생김</a:t>
+            </a:r>
+          </a:p>
+        </p:txBody>
+      </p:sp>
+      <p:sp>
+        <p:nvSpPr>
+          <p:cNvPr id="60" name="Rounded Rectangle 59"/>
+          <p:cNvSpPr/>
+          <p:nvPr/>
+        </p:nvSpPr>
+        <p:spPr>
+          <a:xfrm>
+            <a:off x="9144000" y="6924675"/>
+            <a:ext cx="922020" cy="619125"/>
+          </a:xfrm>
+          <a:prstGeom prst="roundRect">
+            <a:avLst>
+              <a:gd name="adj" fmla="val 6153"/>
+            </a:avLst>
+          </a:prstGeom>
+          <a:solidFill>
+            <a:srgbClr val="FAFBFD"/>
+          </a:solidFill>
+          <a:ln w="9525">
+            <a:solidFill>
+              <a:srgbClr val="DCE1E8"/>
+            </a:solidFill>
+          </a:ln>
+          <a:effectLst/>
+        </p:spPr>
+        <p:txBody>
+          <a:bodyPr rtlCol="0" anchor="ctr" wrap="square"/>
+          <a:lstStyle/>
+          <a:p>
+            <a:pPr algn="ctr"/>
+          </a:p>
+        </p:txBody>
+      </p:sp>
+      <p:sp>
+        <p:nvSpPr>
+          <p:cNvPr id="61" name="TextBox 60"/>
+          <p:cNvSpPr txBox="1"/>
+          <p:nvPr/>
+        </p:nvSpPr>
+        <p:spPr>
+          <a:xfrm>
+            <a:off x="9239250" y="6924675"/>
+            <a:ext cx="731520" cy="619125"/>
+          </a:xfrm>
+          <a:prstGeom prst="rect">
+            <a:avLst/>
+          </a:prstGeom>
+          <a:noFill/>
+        </p:spPr>
+        <p:txBody>
+          <a:bodyPr wrap="square" lIns="0" rIns="0" tIns="0" bIns="0" anchor="ctr">
+            <a:spAutoFit/>
+          </a:bodyPr>
+          <a:lstStyle/>
+          <a:p>
+            <a:pPr algn="ctr">
+              <a:lnSpc>
+                <a:spcPct val="115000"/>
+              </a:lnSpc>
+            </a:pPr>
+            <a:r>
+              <a:rPr sz="1875" b="0">
+                <a:solidFill>
+                  <a:srgbClr val="3D3D3D"/>
+                </a:solidFill>
+                <a:latin typeface="Pretendard"/>
+                <a:ea typeface="Pretendard"/>
+                <a:cs typeface="Pretendard"/>
+              </a:rPr>
+              <a:t>12</a:t>
+            </a:r>
+          </a:p>
+        </p:txBody>
+      </p:sp>
+      <p:sp>
+        <p:nvSpPr>
+          <p:cNvPr id="62" name="Rounded Rectangle 61"/>
+          <p:cNvSpPr/>
+          <p:nvPr/>
+        </p:nvSpPr>
+        <p:spPr>
+          <a:xfrm>
+            <a:off x="10104120" y="6924675"/>
+            <a:ext cx="7040880" cy="619125"/>
+          </a:xfrm>
+          <a:prstGeom prst="roundRect">
+            <a:avLst>
+              <a:gd name="adj" fmla="val 6153"/>
+            </a:avLst>
+          </a:prstGeom>
+          <a:solidFill>
+            <a:srgbClr val="FAFBFD"/>
+          </a:solidFill>
+          <a:ln w="9525">
+            <a:solidFill>
+              <a:srgbClr val="DCE1E8"/>
+            </a:solidFill>
+          </a:ln>
+          <a:effectLst/>
+        </p:spPr>
+        <p:txBody>
+          <a:bodyPr rtlCol="0" anchor="ctr" wrap="square"/>
+          <a:lstStyle/>
+          <a:p>
+            <a:pPr algn="ctr"/>
+          </a:p>
+        </p:txBody>
+      </p:sp>
+      <p:sp>
+        <p:nvSpPr>
+          <p:cNvPr id="63" name="TextBox 62"/>
+          <p:cNvSpPr txBox="1"/>
+          <p:nvPr/>
+        </p:nvSpPr>
+        <p:spPr>
+          <a:xfrm>
+            <a:off x="10199370" y="6924675"/>
+            <a:ext cx="6850380" cy="619125"/>
+          </a:xfrm>
+          <a:prstGeom prst="rect">
+            <a:avLst/>
+          </a:prstGeom>
+          <a:noFill/>
+        </p:spPr>
+        <p:txBody>
+          <a:bodyPr wrap="square" lIns="0" rIns="0" tIns="0" bIns="0" anchor="ctr">
+            <a:spAutoFit/>
+          </a:bodyPr>
+          <a:lstStyle/>
+          <a:p>
+            <a:pPr algn="ctr">
+              <a:lnSpc>
+                <a:spcPct val="115000"/>
+              </a:lnSpc>
+            </a:pPr>
+            <a:r>
+              <a:rPr sz="1875" b="0">
+                <a:solidFill>
+                  <a:srgbClr val="3D3D3D"/>
+                </a:solidFill>
+                <a:latin typeface="Pretendard"/>
+                <a:ea typeface="Pretendard"/>
+                <a:cs typeface="Pretendard"/>
+              </a:rPr>
+              <a:t>down → up 뒤에도 테이블 유지</a:t>
+            </a:r>
+          </a:p>
+        </p:txBody>
+      </p:sp>
+      <p:sp>
+        <p:nvSpPr>
+          <p:cNvPr id="64" name="TextBox 63"/>
+          <p:cNvSpPr txBox="1"/>
+          <p:nvPr/>
+        </p:nvSpPr>
+        <p:spPr>
+          <a:xfrm>
+            <a:off x="1143000" y="7620000"/>
+            <a:ext cx="16002000" cy="342900"/>
+          </a:xfrm>
+          <a:prstGeom prst="rect">
+            <a:avLst/>
+          </a:prstGeom>
+          <a:noFill/>
+        </p:spPr>
+        <p:txBody>
+          <a:bodyPr wrap="square" lIns="0" rIns="0" tIns="0" bIns="0" anchor="t">
+            <a:spAutoFit/>
+          </a:bodyPr>
+          <a:lstStyle/>
+          <a:p>
+            <a:pPr algn="l">
+              <a:lnSpc>
+                <a:spcPct val="100000"/>
+              </a:lnSpc>
+            </a:pPr>
+            <a:r>
+              <a:rPr sz="1875" b="1">
+                <a:solidFill>
+                  <a:srgbClr val="7D7D7D"/>
+                </a:solidFill>
+                <a:latin typeface="Pretendard"/>
+                <a:ea typeface="Pretendard"/>
+                <a:cs typeface="Pretendard"/>
+              </a:rPr>
+              <a:t>하나라도 비면 그 단계의 노트로 돌아가 다시 해 보세요 — 12번이 4-3 출발 조건</a:t>
+            </a:r>
+          </a:p>
+        </p:txBody>
+      </p:sp>
+      <p:sp>
+        <p:nvSpPr>
+          <p:cNvPr id="65" name="Rectangle 64"/>
+          <p:cNvSpPr/>
+          <p:nvPr/>
+        </p:nvSpPr>
+        <p:spPr>
+          <a:xfrm>
+            <a:off x="1143000" y="8058150"/>
+            <a:ext cx="16002000" cy="9525"/>
+          </a:xfrm>
+          <a:prstGeom prst="rect">
+            <a:avLst/>
+          </a:prstGeom>
+          <a:solidFill>
+            <a:srgbClr val="DCE1E8"/>
           </a:solidFill>
           <a:ln>
             <a:noFill/>
@@ -10164,119 +12809,7 @@
       </p:sp>
       <p:sp>
         <p:nvSpPr>
-          <p:cNvPr id="38" name="TextBox 37"/>
-          <p:cNvSpPr txBox="1"/>
-          <p:nvPr/>
-        </p:nvSpPr>
-        <p:spPr>
-          <a:xfrm>
-            <a:off x="1390650" y="7472362"/>
-            <a:ext cx="533400" cy="323850"/>
-          </a:xfrm>
-          <a:prstGeom prst="rect">
-            <a:avLst/>
-          </a:prstGeom>
-          <a:noFill/>
-        </p:spPr>
-        <p:txBody>
-          <a:bodyPr wrap="square" lIns="0" rIns="0" tIns="0" bIns="0" anchor="t">
-            <a:spAutoFit/>
-          </a:bodyPr>
-          <a:lstStyle/>
-          <a:p>
-            <a:pPr algn="ctr">
-              <a:lnSpc>
-                <a:spcPct val="100000"/>
-              </a:lnSpc>
-            </a:pPr>
-            <a:r>
-              <a:rPr sz="2100" b="1">
-                <a:solidFill>
-                  <a:srgbClr val="FFFFFF"/>
-                </a:solidFill>
-                <a:latin typeface="Pretendard"/>
-                <a:ea typeface="Pretendard"/>
-                <a:cs typeface="Pretendard"/>
-              </a:rPr>
-              <a:t>8</a:t>
-            </a:r>
-          </a:p>
-        </p:txBody>
-      </p:sp>
-      <p:sp>
-        <p:nvSpPr>
-          <p:cNvPr id="39" name="TextBox 38"/>
-          <p:cNvSpPr txBox="1"/>
-          <p:nvPr/>
-        </p:nvSpPr>
-        <p:spPr>
-          <a:xfrm>
-            <a:off x="2190750" y="7353300"/>
-            <a:ext cx="14573250" cy="523875"/>
-          </a:xfrm>
-          <a:prstGeom prst="rect">
-            <a:avLst/>
-          </a:prstGeom>
-          <a:noFill/>
-        </p:spPr>
-        <p:txBody>
-          <a:bodyPr wrap="square" lIns="0" rIns="0" tIns="0" bIns="0" anchor="ctr">
-            <a:spAutoFit/>
-          </a:bodyPr>
-          <a:lstStyle/>
-          <a:p>
-            <a:pPr algn="l">
-              <a:lnSpc>
-                <a:spcPct val="100000"/>
-              </a:lnSpc>
-            </a:pPr>
-            <a:r>
-              <a:rPr sz="2100" b="1">
-                <a:solidFill>
-                  <a:srgbClr val="0D2B5E"/>
-                </a:solidFill>
-                <a:latin typeface="Pretendard"/>
-                <a:ea typeface="Pretendard"/>
-                <a:cs typeface="Pretendard"/>
-              </a:rPr>
-              <a:t>ADD COLUMN 뒤 parquet 개수가 안 늘어나는 것을 확인했다</a:t>
-            </a:r>
-          </a:p>
-        </p:txBody>
-      </p:sp>
-      <p:sp>
-        <p:nvSpPr>
-          <p:cNvPr id="40" name="Rectangle 39"/>
-          <p:cNvSpPr/>
-          <p:nvPr/>
-        </p:nvSpPr>
-        <p:spPr>
-          <a:xfrm>
-            <a:off x="1143000" y="8058150"/>
-            <a:ext cx="16002000" cy="9525"/>
-          </a:xfrm>
-          <a:prstGeom prst="rect">
-            <a:avLst/>
-          </a:prstGeom>
-          <a:solidFill>
-            <a:srgbClr val="DCE1E8"/>
-          </a:solidFill>
-          <a:ln>
-            <a:noFill/>
-          </a:ln>
-          <a:effectLst/>
-        </p:spPr>
-        <p:txBody>
-          <a:bodyPr rtlCol="0" anchor="ctr" wrap="square"/>
-          <a:lstStyle/>
-          <a:p>
-            <a:pPr algn="ctr"/>
-          </a:p>
-        </p:txBody>
-      </p:sp>
-      <p:sp>
-        <p:nvSpPr>
-          <p:cNvPr id="41" name="TextBox 40"/>
+          <p:cNvPr id="66" name="TextBox 65"/>
           <p:cNvSpPr txBox="1"/>
           <p:nvPr/>
         </p:nvSpPr>
@@ -10317,7 +12850,7 @@
       </p:sp>
       <p:sp>
         <p:nvSpPr>
-          <p:cNvPr id="42" name="TextBox 41"/>
+          <p:cNvPr id="67" name="TextBox 66"/>
           <p:cNvSpPr txBox="1"/>
           <p:nvPr/>
         </p:nvSpPr>
@@ -10376,7 +12909,7 @@
       <p:grpSpPr/>
       <p:sp>
         <p:nvSpPr>
-          <p:cNvPr id="2" name="Oval 1"/>
+          <p:cNvPr id="2" name="deckgen:decor"/>
           <p:cNvSpPr/>
           <p:nvPr/>
         </p:nvSpPr>
@@ -10406,7 +12939,7 @@
       </p:sp>
       <p:sp>
         <p:nvSpPr>
-          <p:cNvPr id="3" name="Oval 2"/>
+          <p:cNvPr id="3" name="deckgen:decor"/>
           <p:cNvSpPr/>
           <p:nvPr/>
         </p:nvSpPr>
@@ -10436,7 +12969,7 @@
       </p:sp>
       <p:sp>
         <p:nvSpPr>
-          <p:cNvPr id="4" name="Oval 3"/>
+          <p:cNvPr id="4" name="deckgen:decor"/>
           <p:cNvSpPr/>
           <p:nvPr/>
         </p:nvSpPr>
@@ -10500,7 +13033,7 @@
                 <a:ea typeface="Pretendard"/>
                 <a:cs typeface="Pretendard"/>
               </a:rPr>
-              <a:t>자주 겪는 오류</a:t>
+              <a:t>자주 겪는 오류 ①</a:t>
             </a:r>
           </a:p>
         </p:txBody>
@@ -10541,7 +13074,7 @@
                 <a:ea typeface="Pretendard"/>
                 <a:cs typeface="Pretendard"/>
               </a:rPr>
-              <a:t>증상으로 찾는 원인과 해결</a:t>
+              <a:t>환경 · 카탈로그에서 막힐 때</a:t>
             </a:r>
           </a:p>
         </p:txBody>
@@ -10585,7 +13118,7 @@
         <p:spPr>
           <a:xfrm>
             <a:off x="1143000" y="2781300"/>
-            <a:ext cx="5082540" cy="590550"/>
+            <a:ext cx="5402580" cy="590550"/>
           </a:xfrm>
           <a:prstGeom prst="rect">
             <a:avLst/>
@@ -10615,7 +13148,7 @@
         <p:spPr>
           <a:xfrm>
             <a:off x="1143000" y="2781300"/>
-            <a:ext cx="5082540" cy="590550"/>
+            <a:ext cx="5402580" cy="590550"/>
           </a:xfrm>
           <a:prstGeom prst="rect">
             <a:avLst/>
@@ -10655,7 +13188,7 @@
         </p:nvSpPr>
         <p:spPr>
           <a:xfrm>
-            <a:off x="6263640" y="2781300"/>
+            <a:off x="6583680" y="2781300"/>
             <a:ext cx="5082540" cy="590550"/>
           </a:xfrm>
           <a:prstGeom prst="rect">
@@ -10685,7 +13218,7 @@
         </p:nvSpPr>
         <p:spPr>
           <a:xfrm>
-            <a:off x="6263640" y="2781300"/>
+            <a:off x="6583680" y="2781300"/>
             <a:ext cx="5082540" cy="590550"/>
           </a:xfrm>
           <a:prstGeom prst="rect">
@@ -10726,8 +13259,8 @@
         </p:nvSpPr>
         <p:spPr>
           <a:xfrm>
-            <a:off x="11384280" y="2781300"/>
-            <a:ext cx="5760720" cy="590550"/>
+            <a:off x="11704320" y="2781300"/>
+            <a:ext cx="5440680" cy="590550"/>
           </a:xfrm>
           <a:prstGeom prst="rect">
             <a:avLst/>
@@ -10756,8 +13289,8 @@
         </p:nvSpPr>
         <p:spPr>
           <a:xfrm>
-            <a:off x="11384280" y="2781300"/>
-            <a:ext cx="5760720" cy="590550"/>
+            <a:off x="11704320" y="2781300"/>
+            <a:ext cx="5440680" cy="590550"/>
           </a:xfrm>
           <a:prstGeom prst="rect">
             <a:avLst/>
@@ -10798,7 +13331,7 @@
         <p:spPr>
           <a:xfrm>
             <a:off x="1143000" y="3448050"/>
-            <a:ext cx="5082540" cy="647700"/>
+            <a:ext cx="5402580" cy="647700"/>
           </a:xfrm>
           <a:prstGeom prst="roundRect">
             <a:avLst>
@@ -10832,7 +13365,7 @@
         <p:spPr>
           <a:xfrm>
             <a:off x="1238250" y="3448050"/>
-            <a:ext cx="4892040" cy="647700"/>
+            <a:ext cx="5212080" cy="647700"/>
           </a:xfrm>
           <a:prstGeom prst="rect">
             <a:avLst/>
@@ -10890,7 +13423,7 @@
         </p:nvSpPr>
         <p:spPr>
           <a:xfrm>
-            <a:off x="6263640" y="3448050"/>
+            <a:off x="6583680" y="3448050"/>
             <a:ext cx="5082540" cy="647700"/>
           </a:xfrm>
           <a:prstGeom prst="roundRect">
@@ -10924,7 +13457,7 @@
         </p:nvSpPr>
         <p:spPr>
           <a:xfrm>
-            <a:off x="6358890" y="3448050"/>
+            <a:off x="6678930" y="3448050"/>
             <a:ext cx="4892040" cy="647700"/>
           </a:xfrm>
           <a:prstGeom prst="rect">
@@ -10983,8 +13516,8 @@
         </p:nvSpPr>
         <p:spPr>
           <a:xfrm>
-            <a:off x="11384280" y="3448050"/>
-            <a:ext cx="5760720" cy="647700"/>
+            <a:off x="11704320" y="3448050"/>
+            <a:ext cx="5440680" cy="647700"/>
           </a:xfrm>
           <a:prstGeom prst="roundRect">
             <a:avLst>
@@ -11017,8 +13550,8 @@
         </p:nvSpPr>
         <p:spPr>
           <a:xfrm>
-            <a:off x="11479530" y="3448050"/>
-            <a:ext cx="5570220" cy="647700"/>
+            <a:off x="11799570" y="3448050"/>
+            <a:ext cx="5250180" cy="647700"/>
           </a:xfrm>
           <a:prstGeom prst="rect">
             <a:avLst/>
@@ -11077,7 +13610,7 @@
         <p:spPr>
           <a:xfrm>
             <a:off x="1143000" y="4171950"/>
-            <a:ext cx="5082540" cy="647700"/>
+            <a:ext cx="5402580" cy="647700"/>
           </a:xfrm>
           <a:prstGeom prst="roundRect">
             <a:avLst>
@@ -11111,7 +13644,7 @@
         <p:spPr>
           <a:xfrm>
             <a:off x="1238250" y="4171950"/>
-            <a:ext cx="4892040" cy="647700"/>
+            <a:ext cx="5212080" cy="647700"/>
           </a:xfrm>
           <a:prstGeom prst="rect">
             <a:avLst/>
@@ -11138,7 +13671,7 @@
                 <a:ea typeface="Pretendard"/>
                 <a:cs typeface="Pretendard"/>
               </a:rPr>
-              <a:t>rest:8181</a:t>
+              <a:t>UnknownHostException: rest</a:t>
             </a:r>
           </a:p>
           <a:p>
@@ -11156,7 +13689,7 @@
                 <a:ea typeface="Pretendard"/>
                 <a:cs typeface="Pretendard"/>
               </a:rPr>
-              <a:t>connection refused</a:t>
+              <a:t>/ connection refused</a:t>
             </a:r>
           </a:p>
         </p:txBody>
@@ -11169,7 +13702,7 @@
         </p:nvSpPr>
         <p:spPr>
           <a:xfrm>
-            <a:off x="6263640" y="4171950"/>
+            <a:off x="6583680" y="4171950"/>
             <a:ext cx="5082540" cy="647700"/>
           </a:xfrm>
           <a:prstGeom prst="roundRect">
@@ -11203,7 +13736,7 @@
         </p:nvSpPr>
         <p:spPr>
           <a:xfrm>
-            <a:off x="6358890" y="4171950"/>
+            <a:off x="6678930" y="4171950"/>
             <a:ext cx="4892040" cy="647700"/>
           </a:xfrm>
           <a:prstGeom prst="rect">
@@ -11231,7 +13764,7 @@
                 <a:ea typeface="Pretendard"/>
                 <a:cs typeface="Pretendard"/>
               </a:rPr>
-              <a:t>REST 카탈로그 컨테이너가</a:t>
+              <a:t>rest 가 멈췄다</a:t>
             </a:r>
           </a:p>
           <a:p>
@@ -11249,7 +13782,7 @@
                 <a:ea typeface="Pretendard"/>
                 <a:cs typeface="Pretendard"/>
               </a:rPr>
-              <a:t>안 떴거나 죽었다</a:t>
+              <a:t>/ 아직 뜨는 중</a:t>
             </a:r>
           </a:p>
         </p:txBody>
@@ -11262,8 +13795,8 @@
         </p:nvSpPr>
         <p:spPr>
           <a:xfrm>
-            <a:off x="11384280" y="4171950"/>
-            <a:ext cx="5760720" cy="647700"/>
+            <a:off x="11704320" y="4171950"/>
+            <a:ext cx="5440680" cy="647700"/>
           </a:xfrm>
           <a:prstGeom prst="roundRect">
             <a:avLst>
@@ -11296,8 +13829,8 @@
         </p:nvSpPr>
         <p:spPr>
           <a:xfrm>
-            <a:off x="11479530" y="4171950"/>
-            <a:ext cx="5570220" cy="647700"/>
+            <a:off x="11799570" y="4171950"/>
+            <a:ext cx="5250180" cy="647700"/>
           </a:xfrm>
           <a:prstGeom prst="rect">
             <a:avLst/>
@@ -11356,7 +13889,7 @@
         <p:spPr>
           <a:xfrm>
             <a:off x="1143000" y="4895850"/>
-            <a:ext cx="5082540" cy="647700"/>
+            <a:ext cx="5402580" cy="647700"/>
           </a:xfrm>
           <a:prstGeom prst="roundRect">
             <a:avLst>
@@ -11390,7 +13923,7 @@
         <p:spPr>
           <a:xfrm>
             <a:off x="1238250" y="4895850"/>
-            <a:ext cx="4892040" cy="647700"/>
+            <a:ext cx="5212080" cy="647700"/>
           </a:xfrm>
           <a:prstGeom prst="rect">
             <a:avLst/>
@@ -11417,7 +13950,7 @@
                 <a:ea typeface="Pretendard"/>
                 <a:cs typeface="Pretendard"/>
               </a:rPr>
-              <a:t>VERSION AS OF 에서</a:t>
+              <a:t>down → up 뒤</a:t>
             </a:r>
           </a:p>
           <a:p>
@@ -11435,7 +13968,7 @@
                 <a:ea typeface="Pretendard"/>
                 <a:cs typeface="Pretendard"/>
               </a:rPr>
-              <a:t>Cannot find snapshot</a:t>
+              <a:t>TABLE_OR_VIEW_NOT_FOUND</a:t>
             </a:r>
           </a:p>
         </p:txBody>
@@ -11448,7 +13981,7 @@
         </p:nvSpPr>
         <p:spPr>
           <a:xfrm>
-            <a:off x="6263640" y="4895850"/>
+            <a:off x="6583680" y="4895850"/>
             <a:ext cx="5082540" cy="647700"/>
           </a:xfrm>
           <a:prstGeom prst="roundRect">
@@ -11482,7 +14015,7 @@
         </p:nvSpPr>
         <p:spPr>
           <a:xfrm>
-            <a:off x="6358890" y="4895850"/>
+            <a:off x="6678930" y="4895850"/>
             <a:ext cx="4892040" cy="647700"/>
           </a:xfrm>
           <a:prstGeom prst="rect">
@@ -11510,7 +14043,7 @@
                 <a:ea typeface="Pretendard"/>
                 <a:cs typeface="Pretendard"/>
               </a:rPr>
-              <a:t>없는 id 이거나</a:t>
+              <a:t>예전 판 compose</a:t>
             </a:r>
           </a:p>
           <a:p>
@@ -11528,7 +14061,7 @@
                 <a:ea typeface="Pretendard"/>
                 <a:cs typeface="Pretendard"/>
               </a:rPr>
-              <a:t>따옴표로 감쌌다</a:t>
+              <a:t>(rest-catalog 볼륨 없음)</a:t>
             </a:r>
           </a:p>
         </p:txBody>
@@ -11541,8 +14074,8 @@
         </p:nvSpPr>
         <p:spPr>
           <a:xfrm>
-            <a:off x="11384280" y="4895850"/>
-            <a:ext cx="5760720" cy="647700"/>
+            <a:off x="11704320" y="4895850"/>
+            <a:ext cx="5440680" cy="647700"/>
           </a:xfrm>
           <a:prstGeom prst="roundRect">
             <a:avLst>
@@ -11575,8 +14108,8 @@
         </p:nvSpPr>
         <p:spPr>
           <a:xfrm>
-            <a:off x="11479530" y="4895850"/>
-            <a:ext cx="5570220" cy="647700"/>
+            <a:off x="11799570" y="4895850"/>
+            <a:ext cx="5250180" cy="647700"/>
           </a:xfrm>
           <a:prstGeom prst="rect">
             <a:avLst/>
@@ -11603,7 +14136,7 @@
                 <a:ea typeface="Pretendard"/>
                 <a:cs typeface="Pretendard"/>
               </a:rPr>
-              <a:t>snapshots 의 id 를</a:t>
+              <a:t>1단계 compose 로 교체</a:t>
             </a:r>
           </a:p>
           <a:p>
@@ -11621,7 +14154,7 @@
                 <a:ea typeface="Pretendard"/>
                 <a:cs typeface="Pretendard"/>
               </a:rPr>
-              <a:t>따옴표 없는 숫자로</a:t>
+              <a:t>→ 재설정 뒤 다시</a:t>
             </a:r>
           </a:p>
         </p:txBody>
@@ -11662,7 +14195,7 @@
                 <a:ea typeface="Pretendard"/>
                 <a:cs typeface="Pretendard"/>
               </a:rPr>
-              <a:t>spark-sql 이 뜨다 죽거나 느리면 메모리 부족 — Docker Desktop → Settings → Resources → Memory 8GB 이상, 안 쓰는 컨테이너는 stop</a:t>
+              <a:t>TABLE_OR_VIEW_NOT_FOUND 때도 MinIO 의 warehouse 파일은 그대로 — 사라진 것은 카탈로그의 테이블 목록</a:t>
             </a:r>
           </a:p>
         </p:txBody>
@@ -11799,7 +14332,7 @@
       <p:grpSpPr/>
       <p:sp>
         <p:nvSpPr>
-          <p:cNvPr id="2" name="Oval 1"/>
+          <p:cNvPr id="2" name="deckgen:decor"/>
           <p:cNvSpPr/>
           <p:nvPr/>
         </p:nvSpPr>
@@ -11829,7 +14362,7 @@
       </p:sp>
       <p:sp>
         <p:nvSpPr>
-          <p:cNvPr id="3" name="Oval 2"/>
+          <p:cNvPr id="3" name="deckgen:decor"/>
           <p:cNvSpPr/>
           <p:nvPr/>
         </p:nvSpPr>
@@ -11859,7 +14392,7 @@
       </p:sp>
       <p:sp>
         <p:nvSpPr>
-          <p:cNvPr id="4" name="Oval 3"/>
+          <p:cNvPr id="4" name="deckgen:decor"/>
           <p:cNvSpPr/>
           <p:nvPr/>
         </p:nvSpPr>
@@ -11923,7 +14456,7 @@
                 <a:ea typeface="Pretendard"/>
                 <a:cs typeface="Pretendard"/>
               </a:rPr>
-              <a:t>예상 질문</a:t>
+              <a:t>자주 겪는 오류 ②</a:t>
             </a:r>
           </a:p>
         </p:txBody>
@@ -11964,7 +14497,7 @@
                 <a:ea typeface="Pretendard"/>
                 <a:cs typeface="Pretendard"/>
               </a:rPr>
-              <a:t>자주 나오는 질문 네 가지</a:t>
+              <a:t>시점 조회 · 메모리에서 막힐 때</a:t>
             </a:r>
           </a:p>
         </p:txBody>
@@ -12001,18 +14534,324 @@
       </p:sp>
       <p:sp>
         <p:nvSpPr>
-          <p:cNvPr id="8" name="Rounded Rectangle 7"/>
-          <p:cNvSpPr/>
-          <p:nvPr/>
-        </p:nvSpPr>
-        <p:spPr>
-          <a:xfrm>
-            <a:off x="1143000" y="3352800"/>
-            <a:ext cx="16002000" cy="914400"/>
+          <p:cNvPr id="8" name="Rectangle 7"/>
+          <p:cNvSpPr/>
+          <p:nvPr/>
+        </p:nvSpPr>
+        <p:spPr>
+          <a:xfrm>
+            <a:off x="1143000" y="2781300"/>
+            <a:ext cx="5402580" cy="590550"/>
+          </a:xfrm>
+          <a:prstGeom prst="rect">
+            <a:avLst/>
+          </a:prstGeom>
+          <a:solidFill>
+            <a:srgbClr val="0D2B5E"/>
+          </a:solidFill>
+          <a:ln>
+            <a:noFill/>
+          </a:ln>
+          <a:effectLst/>
+        </p:spPr>
+        <p:txBody>
+          <a:bodyPr rtlCol="0" anchor="ctr" wrap="square"/>
+          <a:lstStyle/>
+          <a:p>
+            <a:pPr algn="ctr"/>
+          </a:p>
+        </p:txBody>
+      </p:sp>
+      <p:sp>
+        <p:nvSpPr>
+          <p:cNvPr id="9" name="TextBox 8"/>
+          <p:cNvSpPr txBox="1"/>
+          <p:nvPr/>
+        </p:nvSpPr>
+        <p:spPr>
+          <a:xfrm>
+            <a:off x="1143000" y="2781300"/>
+            <a:ext cx="5402580" cy="590550"/>
+          </a:xfrm>
+          <a:prstGeom prst="rect">
+            <a:avLst/>
+          </a:prstGeom>
+          <a:noFill/>
+        </p:spPr>
+        <p:txBody>
+          <a:bodyPr wrap="square" lIns="0" rIns="0" tIns="0" bIns="0" anchor="ctr">
+            <a:spAutoFit/>
+          </a:bodyPr>
+          <a:lstStyle/>
+          <a:p>
+            <a:pPr algn="ctr">
+              <a:lnSpc>
+                <a:spcPct val="100000"/>
+              </a:lnSpc>
+            </a:pPr>
+            <a:r>
+              <a:rPr sz="2025" b="1">
+                <a:solidFill>
+                  <a:srgbClr val="FFFFFF"/>
+                </a:solidFill>
+                <a:latin typeface="Pretendard"/>
+                <a:ea typeface="Pretendard"/>
+                <a:cs typeface="Pretendard"/>
+              </a:rPr>
+              <a:t>증상</a:t>
+            </a:r>
+          </a:p>
+        </p:txBody>
+      </p:sp>
+      <p:sp>
+        <p:nvSpPr>
+          <p:cNvPr id="10" name="Rectangle 9"/>
+          <p:cNvSpPr/>
+          <p:nvPr/>
+        </p:nvSpPr>
+        <p:spPr>
+          <a:xfrm>
+            <a:off x="6583680" y="2781300"/>
+            <a:ext cx="5402580" cy="590550"/>
+          </a:xfrm>
+          <a:prstGeom prst="rect">
+            <a:avLst/>
+          </a:prstGeom>
+          <a:solidFill>
+            <a:srgbClr val="1E5BC6"/>
+          </a:solidFill>
+          <a:ln>
+            <a:noFill/>
+          </a:ln>
+          <a:effectLst/>
+        </p:spPr>
+        <p:txBody>
+          <a:bodyPr rtlCol="0" anchor="ctr" wrap="square"/>
+          <a:lstStyle/>
+          <a:p>
+            <a:pPr algn="ctr"/>
+          </a:p>
+        </p:txBody>
+      </p:sp>
+      <p:sp>
+        <p:nvSpPr>
+          <p:cNvPr id="11" name="TextBox 10"/>
+          <p:cNvSpPr txBox="1"/>
+          <p:nvPr/>
+        </p:nvSpPr>
+        <p:spPr>
+          <a:xfrm>
+            <a:off x="6583680" y="2781300"/>
+            <a:ext cx="5402580" cy="590550"/>
+          </a:xfrm>
+          <a:prstGeom prst="rect">
+            <a:avLst/>
+          </a:prstGeom>
+          <a:noFill/>
+        </p:spPr>
+        <p:txBody>
+          <a:bodyPr wrap="square" lIns="0" rIns="0" tIns="0" bIns="0" anchor="ctr">
+            <a:spAutoFit/>
+          </a:bodyPr>
+          <a:lstStyle/>
+          <a:p>
+            <a:pPr algn="ctr">
+              <a:lnSpc>
+                <a:spcPct val="100000"/>
+              </a:lnSpc>
+            </a:pPr>
+            <a:r>
+              <a:rPr sz="2025" b="1">
+                <a:solidFill>
+                  <a:srgbClr val="FFFFFF"/>
+                </a:solidFill>
+                <a:latin typeface="Pretendard"/>
+                <a:ea typeface="Pretendard"/>
+                <a:cs typeface="Pretendard"/>
+              </a:rPr>
+              <a:t>원인</a:t>
+            </a:r>
+          </a:p>
+        </p:txBody>
+      </p:sp>
+      <p:sp>
+        <p:nvSpPr>
+          <p:cNvPr id="12" name="Rectangle 11"/>
+          <p:cNvSpPr/>
+          <p:nvPr/>
+        </p:nvSpPr>
+        <p:spPr>
+          <a:xfrm>
+            <a:off x="12024360" y="2781300"/>
+            <a:ext cx="5120640" cy="590550"/>
+          </a:xfrm>
+          <a:prstGeom prst="rect">
+            <a:avLst/>
+          </a:prstGeom>
+          <a:solidFill>
+            <a:srgbClr val="1E5BC6"/>
+          </a:solidFill>
+          <a:ln>
+            <a:noFill/>
+          </a:ln>
+          <a:effectLst/>
+        </p:spPr>
+        <p:txBody>
+          <a:bodyPr rtlCol="0" anchor="ctr" wrap="square"/>
+          <a:lstStyle/>
+          <a:p>
+            <a:pPr algn="ctr"/>
+          </a:p>
+        </p:txBody>
+      </p:sp>
+      <p:sp>
+        <p:nvSpPr>
+          <p:cNvPr id="13" name="TextBox 12"/>
+          <p:cNvSpPr txBox="1"/>
+          <p:nvPr/>
+        </p:nvSpPr>
+        <p:spPr>
+          <a:xfrm>
+            <a:off x="12024360" y="2781300"/>
+            <a:ext cx="5120640" cy="590550"/>
+          </a:xfrm>
+          <a:prstGeom prst="rect">
+            <a:avLst/>
+          </a:prstGeom>
+          <a:noFill/>
+        </p:spPr>
+        <p:txBody>
+          <a:bodyPr wrap="square" lIns="0" rIns="0" tIns="0" bIns="0" anchor="ctr">
+            <a:spAutoFit/>
+          </a:bodyPr>
+          <a:lstStyle/>
+          <a:p>
+            <a:pPr algn="ctr">
+              <a:lnSpc>
+                <a:spcPct val="100000"/>
+              </a:lnSpc>
+            </a:pPr>
+            <a:r>
+              <a:rPr sz="2025" b="1">
+                <a:solidFill>
+                  <a:srgbClr val="FFFFFF"/>
+                </a:solidFill>
+                <a:latin typeface="Pretendard"/>
+                <a:ea typeface="Pretendard"/>
+                <a:cs typeface="Pretendard"/>
+              </a:rPr>
+              <a:t>해결</a:t>
+            </a:r>
+          </a:p>
+        </p:txBody>
+      </p:sp>
+      <p:sp>
+        <p:nvSpPr>
+          <p:cNvPr id="14" name="Rounded Rectangle 13"/>
+          <p:cNvSpPr/>
+          <p:nvPr/>
+        </p:nvSpPr>
+        <p:spPr>
+          <a:xfrm>
+            <a:off x="1143000" y="3448050"/>
+            <a:ext cx="5402580" cy="647700"/>
           </a:xfrm>
           <a:prstGeom prst="roundRect">
             <a:avLst>
-              <a:gd name="adj" fmla="val 5208"/>
+              <a:gd name="adj" fmla="val 5882"/>
+            </a:avLst>
+          </a:prstGeom>
+          <a:solidFill>
+            <a:srgbClr val="EDF3FD"/>
+          </a:solidFill>
+          <a:ln w="9525">
+            <a:solidFill>
+              <a:srgbClr val="BFD3F5"/>
+            </a:solidFill>
+          </a:ln>
+          <a:effectLst/>
+        </p:spPr>
+        <p:txBody>
+          <a:bodyPr rtlCol="0" anchor="ctr" wrap="square"/>
+          <a:lstStyle/>
+          <a:p>
+            <a:pPr algn="ctr"/>
+          </a:p>
+        </p:txBody>
+      </p:sp>
+      <p:sp>
+        <p:nvSpPr>
+          <p:cNvPr id="15" name="TextBox 14"/>
+          <p:cNvSpPr txBox="1"/>
+          <p:nvPr/>
+        </p:nvSpPr>
+        <p:spPr>
+          <a:xfrm>
+            <a:off x="1238250" y="3448050"/>
+            <a:ext cx="5212080" cy="647700"/>
+          </a:xfrm>
+          <a:prstGeom prst="rect">
+            <a:avLst/>
+          </a:prstGeom>
+          <a:noFill/>
+        </p:spPr>
+        <p:txBody>
+          <a:bodyPr wrap="square" lIns="0" rIns="0" tIns="0" bIns="0" anchor="ctr">
+            <a:spAutoFit/>
+          </a:bodyPr>
+          <a:lstStyle/>
+          <a:p>
+            <a:pPr algn="l">
+              <a:lnSpc>
+                <a:spcPct val="115000"/>
+              </a:lnSpc>
+            </a:pPr>
+            <a:r>
+              <a:rPr sz="1875" b="1">
+                <a:solidFill>
+                  <a:srgbClr val="0D2B5E"/>
+                </a:solidFill>
+                <a:latin typeface="Pretendard"/>
+                <a:ea typeface="Pretendard"/>
+                <a:cs typeface="Pretendard"/>
+              </a:rPr>
+              <a:t>VERSION AS OF 에서</a:t>
+            </a:r>
+          </a:p>
+          <a:p>
+            <a:pPr algn="l">
+              <a:lnSpc>
+                <a:spcPct val="115000"/>
+              </a:lnSpc>
+            </a:pPr>
+            <a:r>
+              <a:rPr sz="1875" b="1">
+                <a:solidFill>
+                  <a:srgbClr val="0D2B5E"/>
+                </a:solidFill>
+                <a:latin typeface="Pretendard"/>
+                <a:ea typeface="Pretendard"/>
+                <a:cs typeface="Pretendard"/>
+              </a:rPr>
+              <a:t>Cannot find snapshot</a:t>
+            </a:r>
+          </a:p>
+        </p:txBody>
+      </p:sp>
+      <p:sp>
+        <p:nvSpPr>
+          <p:cNvPr id="16" name="Rounded Rectangle 15"/>
+          <p:cNvSpPr/>
+          <p:nvPr/>
+        </p:nvSpPr>
+        <p:spPr>
+          <a:xfrm>
+            <a:off x="6583680" y="3448050"/>
+            <a:ext cx="5402580" cy="647700"/>
+          </a:xfrm>
+          <a:prstGeom prst="roundRect">
+            <a:avLst>
+              <a:gd name="adj" fmla="val 5882"/>
             </a:avLst>
           </a:prstGeom>
           <a:solidFill>
@@ -12035,152 +14874,30 @@
       </p:sp>
       <p:sp>
         <p:nvSpPr>
-          <p:cNvPr id="9" name="Rectangle 8"/>
-          <p:cNvSpPr/>
-          <p:nvPr/>
-        </p:nvSpPr>
-        <p:spPr>
-          <a:xfrm>
-            <a:off x="1143000" y="3352800"/>
-            <a:ext cx="47625" cy="914400"/>
-          </a:xfrm>
-          <a:prstGeom prst="rect">
-            <a:avLst/>
-          </a:prstGeom>
-          <a:solidFill>
-            <a:srgbClr val="1E5BC6"/>
-          </a:solidFill>
-          <a:ln>
-            <a:noFill/>
-          </a:ln>
-          <a:effectLst/>
-        </p:spPr>
-        <p:txBody>
-          <a:bodyPr rtlCol="0" anchor="ctr" wrap="square"/>
-          <a:lstStyle/>
-          <a:p>
-            <a:pPr algn="ctr"/>
-          </a:p>
-        </p:txBody>
-      </p:sp>
-      <p:sp>
-        <p:nvSpPr>
-          <p:cNvPr id="10" name="Oval 9"/>
-          <p:cNvSpPr/>
-          <p:nvPr/>
-        </p:nvSpPr>
-        <p:spPr>
-          <a:xfrm>
-            <a:off x="1428750" y="3600450"/>
-            <a:ext cx="419100" cy="419100"/>
-          </a:xfrm>
-          <a:prstGeom prst="ellipse">
-            <a:avLst/>
-          </a:prstGeom>
-          <a:solidFill>
-            <a:srgbClr val="0D2B5E"/>
-          </a:solidFill>
-          <a:ln>
-            <a:noFill/>
-          </a:ln>
-          <a:effectLst/>
-        </p:spPr>
-        <p:txBody>
-          <a:bodyPr rtlCol="0" anchor="ctr" wrap="square"/>
-          <a:lstStyle/>
-          <a:p>
-            <a:pPr algn="ctr"/>
-          </a:p>
-        </p:txBody>
-      </p:sp>
-      <p:sp>
-        <p:nvSpPr>
-          <p:cNvPr id="11" name="TextBox 10"/>
-          <p:cNvSpPr txBox="1"/>
-          <p:nvPr/>
-        </p:nvSpPr>
-        <p:spPr>
-          <a:xfrm>
-            <a:off x="1428750" y="3667125"/>
-            <a:ext cx="419100" cy="304800"/>
-          </a:xfrm>
-          <a:prstGeom prst="rect">
-            <a:avLst/>
-          </a:prstGeom>
-          <a:noFill/>
-        </p:spPr>
-        <p:txBody>
-          <a:bodyPr wrap="square" lIns="0" rIns="0" tIns="0" bIns="0" anchor="t">
+          <p:cNvPr id="17" name="TextBox 16"/>
+          <p:cNvSpPr txBox="1"/>
+          <p:nvPr/>
+        </p:nvSpPr>
+        <p:spPr>
+          <a:xfrm>
+            <a:off x="6678930" y="3448050"/>
+            <a:ext cx="5212080" cy="647700"/>
+          </a:xfrm>
+          <a:prstGeom prst="rect">
+            <a:avLst/>
+          </a:prstGeom>
+          <a:noFill/>
+        </p:spPr>
+        <p:txBody>
+          <a:bodyPr wrap="square" lIns="0" rIns="0" tIns="0" bIns="0" anchor="ctr">
             <a:spAutoFit/>
           </a:bodyPr>
           <a:lstStyle/>
           <a:p>
             <a:pPr algn="ctr">
               <a:lnSpc>
-                <a:spcPct val="100000"/>
-              </a:lnSpc>
-            </a:pPr>
-            <a:r>
-              <a:rPr sz="1875" b="1">
-                <a:solidFill>
-                  <a:srgbClr val="FFFFFF"/>
-                </a:solidFill>
-                <a:latin typeface="Pretendard"/>
-                <a:ea typeface="Pretendard"/>
-                <a:cs typeface="Pretendard"/>
-              </a:rPr>
-              <a:t>1</a:t>
-            </a:r>
-          </a:p>
-        </p:txBody>
-      </p:sp>
-      <p:sp>
-        <p:nvSpPr>
-          <p:cNvPr id="12" name="TextBox 11"/>
-          <p:cNvSpPr txBox="1"/>
-          <p:nvPr/>
-        </p:nvSpPr>
-        <p:spPr>
-          <a:xfrm>
-            <a:off x="2057400" y="3448050"/>
-            <a:ext cx="14763750" cy="723900"/>
-          </a:xfrm>
-          <a:prstGeom prst="rect">
-            <a:avLst/>
-          </a:prstGeom>
-          <a:noFill/>
-        </p:spPr>
-        <p:txBody>
-          <a:bodyPr wrap="square" lIns="0" rIns="0" tIns="0" bIns="0" anchor="ctr">
-            <a:spAutoFit/>
-          </a:bodyPr>
-          <a:lstStyle/>
-          <a:p>
-            <a:pPr>
-              <a:lnSpc>
-                <a:spcPct val="120000"/>
-              </a:lnSpc>
-            </a:pPr>
-            <a:r>
-              <a:rPr sz="2175" b="1">
-                <a:solidFill>
-                  <a:srgbClr val="0D2B5E"/>
-                </a:solidFill>
-                <a:latin typeface="Pretendard"/>
-                <a:ea typeface="Pretendard"/>
-                <a:cs typeface="Pretendard"/>
-              </a:rPr>
-              <a:t>Iceberg 와 Delta Lake 중 뭘 배워야 하나요?</a:t>
-            </a:r>
-          </a:p>
-          <a:p>
-            <a:pPr>
-              <a:lnSpc>
-                <a:spcPct val="130000"/>
-              </a:lnSpc>
-              <a:spcBef>
-                <a:spcPts val="300"/>
-              </a:spcBef>
+                <a:spcPct val="115000"/>
+              </a:lnSpc>
             </a:pPr>
             <a:r>
               <a:rPr sz="1875" b="0">
@@ -12191,25 +14908,43 @@
                 <a:ea typeface="Pretendard"/>
                 <a:cs typeface="Pretendard"/>
               </a:rPr>
-              <a:t>개념이 거의 같다 — Iceberg 는 엔진 중립적이라 Spark·Trino·Flink 가 함께 쓰기 좋고, Delta 는 Databricks 생태계에서 강하다</a:t>
-            </a:r>
-          </a:p>
-        </p:txBody>
-      </p:sp>
-      <p:sp>
-        <p:nvSpPr>
-          <p:cNvPr id="13" name="Rounded Rectangle 12"/>
-          <p:cNvSpPr/>
-          <p:nvPr/>
-        </p:nvSpPr>
-        <p:spPr>
-          <a:xfrm>
-            <a:off x="1143000" y="4400550"/>
-            <a:ext cx="16002000" cy="914400"/>
+              <a:t>예시 숫자 · 다른 테이블 id</a:t>
+            </a:r>
+          </a:p>
+          <a:p>
+            <a:pPr algn="ctr">
+              <a:lnSpc>
+                <a:spcPct val="115000"/>
+              </a:lnSpc>
+            </a:pPr>
+            <a:r>
+              <a:rPr sz="1875" b="0">
+                <a:solidFill>
+                  <a:srgbClr val="3D3D3D"/>
+                </a:solidFill>
+                <a:latin typeface="Pretendard"/>
+                <a:ea typeface="Pretendard"/>
+                <a:cs typeface="Pretendard"/>
+              </a:rPr>
+              <a:t>(따옴표는 원인 아님)</a:t>
+            </a:r>
+          </a:p>
+        </p:txBody>
+      </p:sp>
+      <p:sp>
+        <p:nvSpPr>
+          <p:cNvPr id="18" name="Rounded Rectangle 17"/>
+          <p:cNvSpPr/>
+          <p:nvPr/>
+        </p:nvSpPr>
+        <p:spPr>
+          <a:xfrm>
+            <a:off x="12024360" y="3448050"/>
+            <a:ext cx="5120640" cy="647700"/>
           </a:xfrm>
           <a:prstGeom prst="roundRect">
             <a:avLst>
-              <a:gd name="adj" fmla="val 5208"/>
+              <a:gd name="adj" fmla="val 5882"/>
             </a:avLst>
           </a:prstGeom>
           <a:solidFill>
@@ -12232,152 +14967,30 @@
       </p:sp>
       <p:sp>
         <p:nvSpPr>
-          <p:cNvPr id="14" name="Rectangle 13"/>
-          <p:cNvSpPr/>
-          <p:nvPr/>
-        </p:nvSpPr>
-        <p:spPr>
-          <a:xfrm>
-            <a:off x="1143000" y="4400550"/>
-            <a:ext cx="47625" cy="914400"/>
-          </a:xfrm>
-          <a:prstGeom prst="rect">
-            <a:avLst/>
-          </a:prstGeom>
-          <a:solidFill>
-            <a:srgbClr val="1E5BC6"/>
-          </a:solidFill>
-          <a:ln>
-            <a:noFill/>
-          </a:ln>
-          <a:effectLst/>
-        </p:spPr>
-        <p:txBody>
-          <a:bodyPr rtlCol="0" anchor="ctr" wrap="square"/>
-          <a:lstStyle/>
-          <a:p>
-            <a:pPr algn="ctr"/>
-          </a:p>
-        </p:txBody>
-      </p:sp>
-      <p:sp>
-        <p:nvSpPr>
-          <p:cNvPr id="15" name="Oval 14"/>
-          <p:cNvSpPr/>
-          <p:nvPr/>
-        </p:nvSpPr>
-        <p:spPr>
-          <a:xfrm>
-            <a:off x="1428750" y="4648200"/>
-            <a:ext cx="419100" cy="419100"/>
-          </a:xfrm>
-          <a:prstGeom prst="ellipse">
-            <a:avLst/>
-          </a:prstGeom>
-          <a:solidFill>
-            <a:srgbClr val="0D2B5E"/>
-          </a:solidFill>
-          <a:ln>
-            <a:noFill/>
-          </a:ln>
-          <a:effectLst/>
-        </p:spPr>
-        <p:txBody>
-          <a:bodyPr rtlCol="0" anchor="ctr" wrap="square"/>
-          <a:lstStyle/>
-          <a:p>
-            <a:pPr algn="ctr"/>
-          </a:p>
-        </p:txBody>
-      </p:sp>
-      <p:sp>
-        <p:nvSpPr>
-          <p:cNvPr id="16" name="TextBox 15"/>
-          <p:cNvSpPr txBox="1"/>
-          <p:nvPr/>
-        </p:nvSpPr>
-        <p:spPr>
-          <a:xfrm>
-            <a:off x="1428750" y="4714875"/>
-            <a:ext cx="419100" cy="304800"/>
-          </a:xfrm>
-          <a:prstGeom prst="rect">
-            <a:avLst/>
-          </a:prstGeom>
-          <a:noFill/>
-        </p:spPr>
-        <p:txBody>
-          <a:bodyPr wrap="square" lIns="0" rIns="0" tIns="0" bIns="0" anchor="t">
+          <p:cNvPr id="19" name="TextBox 18"/>
+          <p:cNvSpPr txBox="1"/>
+          <p:nvPr/>
+        </p:nvSpPr>
+        <p:spPr>
+          <a:xfrm>
+            <a:off x="12119610" y="3448050"/>
+            <a:ext cx="4930140" cy="647700"/>
+          </a:xfrm>
+          <a:prstGeom prst="rect">
+            <a:avLst/>
+          </a:prstGeom>
+          <a:noFill/>
+        </p:spPr>
+        <p:txBody>
+          <a:bodyPr wrap="square" lIns="0" rIns="0" tIns="0" bIns="0" anchor="ctr">
             <a:spAutoFit/>
           </a:bodyPr>
           <a:lstStyle/>
           <a:p>
             <a:pPr algn="ctr">
               <a:lnSpc>
-                <a:spcPct val="100000"/>
-              </a:lnSpc>
-            </a:pPr>
-            <a:r>
-              <a:rPr sz="1875" b="1">
-                <a:solidFill>
-                  <a:srgbClr val="FFFFFF"/>
-                </a:solidFill>
-                <a:latin typeface="Pretendard"/>
-                <a:ea typeface="Pretendard"/>
-                <a:cs typeface="Pretendard"/>
-              </a:rPr>
-              <a:t>2</a:t>
-            </a:r>
-          </a:p>
-        </p:txBody>
-      </p:sp>
-      <p:sp>
-        <p:nvSpPr>
-          <p:cNvPr id="17" name="TextBox 16"/>
-          <p:cNvSpPr txBox="1"/>
-          <p:nvPr/>
-        </p:nvSpPr>
-        <p:spPr>
-          <a:xfrm>
-            <a:off x="2057400" y="4495800"/>
-            <a:ext cx="14763750" cy="723900"/>
-          </a:xfrm>
-          <a:prstGeom prst="rect">
-            <a:avLst/>
-          </a:prstGeom>
-          <a:noFill/>
-        </p:spPr>
-        <p:txBody>
-          <a:bodyPr wrap="square" lIns="0" rIns="0" tIns="0" bIns="0" anchor="ctr">
-            <a:spAutoFit/>
-          </a:bodyPr>
-          <a:lstStyle/>
-          <a:p>
-            <a:pPr>
-              <a:lnSpc>
-                <a:spcPct val="120000"/>
-              </a:lnSpc>
-            </a:pPr>
-            <a:r>
-              <a:rPr sz="2175" b="1">
-                <a:solidFill>
-                  <a:srgbClr val="0D2B5E"/>
-                </a:solidFill>
-                <a:latin typeface="Pretendard"/>
-                <a:ea typeface="Pretendard"/>
-                <a:cs typeface="Pretendard"/>
-              </a:rPr>
-              <a:t>스냅샷이 계속 쌓이면 저장 비용이 늘지 않나요?</a:t>
-            </a:r>
-          </a:p>
-          <a:p>
-            <a:pPr>
-              <a:lnSpc>
-                <a:spcPct val="130000"/>
-              </a:lnSpc>
-              <a:spcBef>
-                <a:spcPts val="300"/>
-              </a:spcBef>
+                <a:spcPct val="115000"/>
+              </a:lnSpc>
             </a:pPr>
             <a:r>
               <a:rPr sz="1875" b="0">
@@ -12388,25 +15001,136 @@
                 <a:ea typeface="Pretendard"/>
                 <a:cs typeface="Pretendard"/>
               </a:rPr>
-              <a:t>늘어난다 — expire_snapshots 로 보관 기간을 정해 정리한다, 보통 7~30일</a:t>
-            </a:r>
-          </a:p>
-        </p:txBody>
-      </p:sp>
-      <p:sp>
-        <p:nvSpPr>
-          <p:cNvPr id="18" name="Rounded Rectangle 17"/>
-          <p:cNvSpPr/>
-          <p:nvPr/>
-        </p:nvSpPr>
-        <p:spPr>
-          <a:xfrm>
-            <a:off x="1143000" y="5448300"/>
-            <a:ext cx="16002000" cy="914400"/>
+              <a:t>snapshots 의</a:t>
+            </a:r>
+          </a:p>
+          <a:p>
+            <a:pPr algn="ctr">
+              <a:lnSpc>
+                <a:spcPct val="115000"/>
+              </a:lnSpc>
+            </a:pPr>
+            <a:r>
+              <a:rPr sz="1875" b="0">
+                <a:solidFill>
+                  <a:srgbClr val="3D3D3D"/>
+                </a:solidFill>
+                <a:latin typeface="Pretendard"/>
+                <a:ea typeface="Pretendard"/>
+                <a:cs typeface="Pretendard"/>
+              </a:rPr>
+              <a:t>snapshot_id 를 복사</a:t>
+            </a:r>
+          </a:p>
+        </p:txBody>
+      </p:sp>
+      <p:sp>
+        <p:nvSpPr>
+          <p:cNvPr id="20" name="Rounded Rectangle 19"/>
+          <p:cNvSpPr/>
+          <p:nvPr/>
+        </p:nvSpPr>
+        <p:spPr>
+          <a:xfrm>
+            <a:off x="1143000" y="4171950"/>
+            <a:ext cx="5402580" cy="647700"/>
           </a:xfrm>
           <a:prstGeom prst="roundRect">
             <a:avLst>
-              <a:gd name="adj" fmla="val 5208"/>
+              <a:gd name="adj" fmla="val 5882"/>
+            </a:avLst>
+          </a:prstGeom>
+          <a:solidFill>
+            <a:srgbClr val="EDF3FD"/>
+          </a:solidFill>
+          <a:ln w="9525">
+            <a:solidFill>
+              <a:srgbClr val="BFD3F5"/>
+            </a:solidFill>
+          </a:ln>
+          <a:effectLst/>
+        </p:spPr>
+        <p:txBody>
+          <a:bodyPr rtlCol="0" anchor="ctr" wrap="square"/>
+          <a:lstStyle/>
+          <a:p>
+            <a:pPr algn="ctr"/>
+          </a:p>
+        </p:txBody>
+      </p:sp>
+      <p:sp>
+        <p:nvSpPr>
+          <p:cNvPr id="21" name="TextBox 20"/>
+          <p:cNvSpPr txBox="1"/>
+          <p:nvPr/>
+        </p:nvSpPr>
+        <p:spPr>
+          <a:xfrm>
+            <a:off x="1238250" y="4171950"/>
+            <a:ext cx="5212080" cy="647700"/>
+          </a:xfrm>
+          <a:prstGeom prst="rect">
+            <a:avLst/>
+          </a:prstGeom>
+          <a:noFill/>
+        </p:spPr>
+        <p:txBody>
+          <a:bodyPr wrap="square" lIns="0" rIns="0" tIns="0" bIns="0" anchor="ctr">
+            <a:spAutoFit/>
+          </a:bodyPr>
+          <a:lstStyle/>
+          <a:p>
+            <a:pPr algn="l">
+              <a:lnSpc>
+                <a:spcPct val="115000"/>
+              </a:lnSpc>
+            </a:pPr>
+            <a:r>
+              <a:rPr sz="1875" b="1">
+                <a:solidFill>
+                  <a:srgbClr val="0D2B5E"/>
+                </a:solidFill>
+                <a:latin typeface="Pretendard"/>
+                <a:ea typeface="Pretendard"/>
+                <a:cs typeface="Pretendard"/>
+              </a:rPr>
+              <a:t>TIMESTAMP AS OF 실패</a:t>
+            </a:r>
+          </a:p>
+          <a:p>
+            <a:pPr algn="l">
+              <a:lnSpc>
+                <a:spcPct val="115000"/>
+              </a:lnSpc>
+            </a:pPr>
+            <a:r>
+              <a:rPr sz="1875" b="1">
+                <a:solidFill>
+                  <a:srgbClr val="0D2B5E"/>
+                </a:solidFill>
+                <a:latin typeface="Pretendard"/>
+                <a:ea typeface="Pretendard"/>
+                <a:cs typeface="Pretendard"/>
+              </a:rPr>
+              <a:t>또는 현재 값이 나옴</a:t>
+            </a:r>
+          </a:p>
+        </p:txBody>
+      </p:sp>
+      <p:sp>
+        <p:nvSpPr>
+          <p:cNvPr id="22" name="Rounded Rectangle 21"/>
+          <p:cNvSpPr/>
+          <p:nvPr/>
+        </p:nvSpPr>
+        <p:spPr>
+          <a:xfrm>
+            <a:off x="6583680" y="4171950"/>
+            <a:ext cx="5402580" cy="647700"/>
+          </a:xfrm>
+          <a:prstGeom prst="roundRect">
+            <a:avLst>
+              <a:gd name="adj" fmla="val 5882"/>
             </a:avLst>
           </a:prstGeom>
           <a:solidFill>
@@ -12429,152 +15153,30 @@
       </p:sp>
       <p:sp>
         <p:nvSpPr>
-          <p:cNvPr id="19" name="Rectangle 18"/>
-          <p:cNvSpPr/>
-          <p:nvPr/>
-        </p:nvSpPr>
-        <p:spPr>
-          <a:xfrm>
-            <a:off x="1143000" y="5448300"/>
-            <a:ext cx="47625" cy="914400"/>
-          </a:xfrm>
-          <a:prstGeom prst="rect">
-            <a:avLst/>
-          </a:prstGeom>
-          <a:solidFill>
-            <a:srgbClr val="1E5BC6"/>
-          </a:solidFill>
-          <a:ln>
-            <a:noFill/>
-          </a:ln>
-          <a:effectLst/>
-        </p:spPr>
-        <p:txBody>
-          <a:bodyPr rtlCol="0" anchor="ctr" wrap="square"/>
-          <a:lstStyle/>
-          <a:p>
-            <a:pPr algn="ctr"/>
-          </a:p>
-        </p:txBody>
-      </p:sp>
-      <p:sp>
-        <p:nvSpPr>
-          <p:cNvPr id="20" name="Oval 19"/>
-          <p:cNvSpPr/>
-          <p:nvPr/>
-        </p:nvSpPr>
-        <p:spPr>
-          <a:xfrm>
-            <a:off x="1428750" y="5695950"/>
-            <a:ext cx="419100" cy="419100"/>
-          </a:xfrm>
-          <a:prstGeom prst="ellipse">
-            <a:avLst/>
-          </a:prstGeom>
-          <a:solidFill>
-            <a:srgbClr val="0D2B5E"/>
-          </a:solidFill>
-          <a:ln>
-            <a:noFill/>
-          </a:ln>
-          <a:effectLst/>
-        </p:spPr>
-        <p:txBody>
-          <a:bodyPr rtlCol="0" anchor="ctr" wrap="square"/>
-          <a:lstStyle/>
-          <a:p>
-            <a:pPr algn="ctr"/>
-          </a:p>
-        </p:txBody>
-      </p:sp>
-      <p:sp>
-        <p:nvSpPr>
-          <p:cNvPr id="21" name="TextBox 20"/>
-          <p:cNvSpPr txBox="1"/>
-          <p:nvPr/>
-        </p:nvSpPr>
-        <p:spPr>
-          <a:xfrm>
-            <a:off x="1428750" y="5762625"/>
-            <a:ext cx="419100" cy="304800"/>
-          </a:xfrm>
-          <a:prstGeom prst="rect">
-            <a:avLst/>
-          </a:prstGeom>
-          <a:noFill/>
-        </p:spPr>
-        <p:txBody>
-          <a:bodyPr wrap="square" lIns="0" rIns="0" tIns="0" bIns="0" anchor="t">
+          <p:cNvPr id="23" name="TextBox 22"/>
+          <p:cNvSpPr txBox="1"/>
+          <p:nvPr/>
+        </p:nvSpPr>
+        <p:spPr>
+          <a:xfrm>
+            <a:off x="6678930" y="4171950"/>
+            <a:ext cx="5212080" cy="647700"/>
+          </a:xfrm>
+          <a:prstGeom prst="rect">
+            <a:avLst/>
+          </a:prstGeom>
+          <a:noFill/>
+        </p:spPr>
+        <p:txBody>
+          <a:bodyPr wrap="square" lIns="0" rIns="0" tIns="0" bIns="0" anchor="ctr">
             <a:spAutoFit/>
           </a:bodyPr>
           <a:lstStyle/>
           <a:p>
             <a:pPr algn="ctr">
               <a:lnSpc>
-                <a:spcPct val="100000"/>
-              </a:lnSpc>
-            </a:pPr>
-            <a:r>
-              <a:rPr sz="1875" b="1">
-                <a:solidFill>
-                  <a:srgbClr val="FFFFFF"/>
-                </a:solidFill>
-                <a:latin typeface="Pretendard"/>
-                <a:ea typeface="Pretendard"/>
-                <a:cs typeface="Pretendard"/>
-              </a:rPr>
-              <a:t>3</a:t>
-            </a:r>
-          </a:p>
-        </p:txBody>
-      </p:sp>
-      <p:sp>
-        <p:nvSpPr>
-          <p:cNvPr id="22" name="TextBox 21"/>
-          <p:cNvSpPr txBox="1"/>
-          <p:nvPr/>
-        </p:nvSpPr>
-        <p:spPr>
-          <a:xfrm>
-            <a:off x="2057400" y="5543550"/>
-            <a:ext cx="14763750" cy="723900"/>
-          </a:xfrm>
-          <a:prstGeom prst="rect">
-            <a:avLst/>
-          </a:prstGeom>
-          <a:noFill/>
-        </p:spPr>
-        <p:txBody>
-          <a:bodyPr wrap="square" lIns="0" rIns="0" tIns="0" bIns="0" anchor="ctr">
-            <a:spAutoFit/>
-          </a:bodyPr>
-          <a:lstStyle/>
-          <a:p>
-            <a:pPr>
-              <a:lnSpc>
-                <a:spcPct val="120000"/>
-              </a:lnSpc>
-            </a:pPr>
-            <a:r>
-              <a:rPr sz="2175" b="1">
-                <a:solidFill>
-                  <a:srgbClr val="0D2B5E"/>
-                </a:solidFill>
-                <a:latin typeface="Pretendard"/>
-                <a:ea typeface="Pretendard"/>
-                <a:cs typeface="Pretendard"/>
-              </a:rPr>
-              <a:t>UPDATE 마다 파일을 통째로 다시 쓰면 느리지 않나요?</a:t>
-            </a:r>
-          </a:p>
-          <a:p>
-            <a:pPr>
-              <a:lnSpc>
-                <a:spcPct val="130000"/>
-              </a:lnSpc>
-              <a:spcBef>
-                <a:spcPts val="300"/>
-              </a:spcBef>
+                <a:spcPct val="115000"/>
+              </a:lnSpc>
             </a:pPr>
             <a:r>
               <a:rPr sz="1875" b="0">
@@ -12585,25 +15187,43 @@
                 <a:ea typeface="Pretendard"/>
                 <a:cs typeface="Pretendard"/>
               </a:rPr>
-              <a:t>느리다 — 대량 배치 갱신에 맞고 건건이 수정하는 업무는 여전히 RDB, 4-3 의 MERGE INTO 가 배치 갱신</a:t>
-            </a:r>
-          </a:p>
-        </p:txBody>
-      </p:sp>
-      <p:sp>
-        <p:nvSpPr>
-          <p:cNvPr id="23" name="Rounded Rectangle 22"/>
-          <p:cNvSpPr/>
-          <p:nvPr/>
-        </p:nvSpPr>
-        <p:spPr>
-          <a:xfrm>
-            <a:off x="1143000" y="6496050"/>
-            <a:ext cx="16002000" cy="914400"/>
+              <a:t>컨테이너 시계는 UTC</a:t>
+            </a:r>
+          </a:p>
+          <a:p>
+            <a:pPr algn="ctr">
+              <a:lnSpc>
+                <a:spcPct val="115000"/>
+              </a:lnSpc>
+            </a:pPr>
+            <a:r>
+              <a:rPr sz="1875" b="0">
+                <a:solidFill>
+                  <a:srgbClr val="3D3D3D"/>
+                </a:solidFill>
+                <a:latin typeface="Pretendard"/>
+                <a:ea typeface="Pretendard"/>
+                <a:cs typeface="Pretendard"/>
+              </a:rPr>
+              <a:t>— 한국 시각과 9시간 차</a:t>
+            </a:r>
+          </a:p>
+        </p:txBody>
+      </p:sp>
+      <p:sp>
+        <p:nvSpPr>
+          <p:cNvPr id="24" name="Rounded Rectangle 23"/>
+          <p:cNvSpPr/>
+          <p:nvPr/>
+        </p:nvSpPr>
+        <p:spPr>
+          <a:xfrm>
+            <a:off x="12024360" y="4171950"/>
+            <a:ext cx="5120640" cy="647700"/>
           </a:xfrm>
           <a:prstGeom prst="roundRect">
             <a:avLst>
-              <a:gd name="adj" fmla="val 5208"/>
+              <a:gd name="adj" fmla="val 5882"/>
             </a:avLst>
           </a:prstGeom>
           <a:solidFill>
@@ -12626,20 +15246,399 @@
       </p:sp>
       <p:sp>
         <p:nvSpPr>
-          <p:cNvPr id="24" name="Rectangle 23"/>
-          <p:cNvSpPr/>
-          <p:nvPr/>
-        </p:nvSpPr>
-        <p:spPr>
-          <a:xfrm>
-            <a:off x="1143000" y="6496050"/>
-            <a:ext cx="47625" cy="914400"/>
-          </a:xfrm>
-          <a:prstGeom prst="rect">
-            <a:avLst/>
-          </a:prstGeom>
-          <a:solidFill>
-            <a:srgbClr val="1E5BC6"/>
+          <p:cNvPr id="25" name="TextBox 24"/>
+          <p:cNvSpPr txBox="1"/>
+          <p:nvPr/>
+        </p:nvSpPr>
+        <p:spPr>
+          <a:xfrm>
+            <a:off x="12119610" y="4171950"/>
+            <a:ext cx="4930140" cy="647700"/>
+          </a:xfrm>
+          <a:prstGeom prst="rect">
+            <a:avLst/>
+          </a:prstGeom>
+          <a:noFill/>
+        </p:spPr>
+        <p:txBody>
+          <a:bodyPr wrap="square" lIns="0" rIns="0" tIns="0" bIns="0" anchor="ctr">
+            <a:spAutoFit/>
+          </a:bodyPr>
+          <a:lstStyle/>
+          <a:p>
+            <a:pPr algn="ctr">
+              <a:lnSpc>
+                <a:spcPct val="115000"/>
+              </a:lnSpc>
+            </a:pPr>
+            <a:r>
+              <a:rPr sz="1875" b="0">
+                <a:solidFill>
+                  <a:srgbClr val="3D3D3D"/>
+                </a:solidFill>
+                <a:latin typeface="Pretendard"/>
+                <a:ea typeface="Pretendard"/>
+                <a:cs typeface="Pretendard"/>
+              </a:rPr>
+              <a:t>committed_at 값을</a:t>
+            </a:r>
+          </a:p>
+          <a:p>
+            <a:pPr algn="ctr">
+              <a:lnSpc>
+                <a:spcPct val="115000"/>
+              </a:lnSpc>
+            </a:pPr>
+            <a:r>
+              <a:rPr sz="1875" b="0">
+                <a:solidFill>
+                  <a:srgbClr val="3D3D3D"/>
+                </a:solidFill>
+                <a:latin typeface="Pretendard"/>
+                <a:ea typeface="Pretendard"/>
+                <a:cs typeface="Pretendard"/>
+              </a:rPr>
+              <a:t>그대로 복사</a:t>
+            </a:r>
+          </a:p>
+        </p:txBody>
+      </p:sp>
+      <p:sp>
+        <p:nvSpPr>
+          <p:cNvPr id="26" name="Rounded Rectangle 25"/>
+          <p:cNvSpPr/>
+          <p:nvPr/>
+        </p:nvSpPr>
+        <p:spPr>
+          <a:xfrm>
+            <a:off x="1143000" y="4895850"/>
+            <a:ext cx="5402580" cy="647700"/>
+          </a:xfrm>
+          <a:prstGeom prst="roundRect">
+            <a:avLst>
+              <a:gd name="adj" fmla="val 5882"/>
+            </a:avLst>
+          </a:prstGeom>
+          <a:solidFill>
+            <a:srgbClr val="EDF3FD"/>
+          </a:solidFill>
+          <a:ln w="9525">
+            <a:solidFill>
+              <a:srgbClr val="BFD3F5"/>
+            </a:solidFill>
+          </a:ln>
+          <a:effectLst/>
+        </p:spPr>
+        <p:txBody>
+          <a:bodyPr rtlCol="0" anchor="ctr" wrap="square"/>
+          <a:lstStyle/>
+          <a:p>
+            <a:pPr algn="ctr"/>
+          </a:p>
+        </p:txBody>
+      </p:sp>
+      <p:sp>
+        <p:nvSpPr>
+          <p:cNvPr id="27" name="TextBox 26"/>
+          <p:cNvSpPr txBox="1"/>
+          <p:nvPr/>
+        </p:nvSpPr>
+        <p:spPr>
+          <a:xfrm>
+            <a:off x="1238250" y="4895850"/>
+            <a:ext cx="5212080" cy="647700"/>
+          </a:xfrm>
+          <a:prstGeom prst="rect">
+            <a:avLst/>
+          </a:prstGeom>
+          <a:noFill/>
+        </p:spPr>
+        <p:txBody>
+          <a:bodyPr wrap="square" lIns="0" rIns="0" tIns="0" bIns="0" anchor="ctr">
+            <a:spAutoFit/>
+          </a:bodyPr>
+          <a:lstStyle/>
+          <a:p>
+            <a:pPr algn="l">
+              <a:lnSpc>
+                <a:spcPct val="115000"/>
+              </a:lnSpc>
+            </a:pPr>
+            <a:r>
+              <a:rPr sz="1875" b="1">
+                <a:solidFill>
+                  <a:srgbClr val="0D2B5E"/>
+                </a:solidFill>
+                <a:latin typeface="Pretendard"/>
+                <a:ea typeface="Pretendard"/>
+                <a:cs typeface="Pretendard"/>
+              </a:rPr>
+              <a:t>spark-sql 이 뜨다 죽거나</a:t>
+            </a:r>
+          </a:p>
+          <a:p>
+            <a:pPr algn="l">
+              <a:lnSpc>
+                <a:spcPct val="115000"/>
+              </a:lnSpc>
+            </a:pPr>
+            <a:r>
+              <a:rPr sz="1875" b="1">
+                <a:solidFill>
+                  <a:srgbClr val="0D2B5E"/>
+                </a:solidFill>
+                <a:latin typeface="Pretendard"/>
+                <a:ea typeface="Pretendard"/>
+                <a:cs typeface="Pretendard"/>
+              </a:rPr>
+              <a:t>매우 느림</a:t>
+            </a:r>
+          </a:p>
+        </p:txBody>
+      </p:sp>
+      <p:sp>
+        <p:nvSpPr>
+          <p:cNvPr id="28" name="Rounded Rectangle 27"/>
+          <p:cNvSpPr/>
+          <p:nvPr/>
+        </p:nvSpPr>
+        <p:spPr>
+          <a:xfrm>
+            <a:off x="6583680" y="4895850"/>
+            <a:ext cx="5402580" cy="647700"/>
+          </a:xfrm>
+          <a:prstGeom prst="roundRect">
+            <a:avLst>
+              <a:gd name="adj" fmla="val 5882"/>
+            </a:avLst>
+          </a:prstGeom>
+          <a:solidFill>
+            <a:srgbClr val="FAFBFD"/>
+          </a:solidFill>
+          <a:ln w="9525">
+            <a:solidFill>
+              <a:srgbClr val="DCE1E8"/>
+            </a:solidFill>
+          </a:ln>
+          <a:effectLst/>
+        </p:spPr>
+        <p:txBody>
+          <a:bodyPr rtlCol="0" anchor="ctr" wrap="square"/>
+          <a:lstStyle/>
+          <a:p>
+            <a:pPr algn="ctr"/>
+          </a:p>
+        </p:txBody>
+      </p:sp>
+      <p:sp>
+        <p:nvSpPr>
+          <p:cNvPr id="29" name="TextBox 28"/>
+          <p:cNvSpPr txBox="1"/>
+          <p:nvPr/>
+        </p:nvSpPr>
+        <p:spPr>
+          <a:xfrm>
+            <a:off x="6678930" y="4895850"/>
+            <a:ext cx="5212080" cy="647700"/>
+          </a:xfrm>
+          <a:prstGeom prst="rect">
+            <a:avLst/>
+          </a:prstGeom>
+          <a:noFill/>
+        </p:spPr>
+        <p:txBody>
+          <a:bodyPr wrap="square" lIns="0" rIns="0" tIns="0" bIns="0" anchor="ctr">
+            <a:spAutoFit/>
+          </a:bodyPr>
+          <a:lstStyle/>
+          <a:p>
+            <a:pPr algn="ctr">
+              <a:lnSpc>
+                <a:spcPct val="115000"/>
+              </a:lnSpc>
+            </a:pPr>
+            <a:r>
+              <a:rPr sz="1875" b="0">
+                <a:solidFill>
+                  <a:srgbClr val="3D3D3D"/>
+                </a:solidFill>
+                <a:latin typeface="Pretendard"/>
+                <a:ea typeface="Pretendard"/>
+                <a:cs typeface="Pretendard"/>
+              </a:rPr>
+              <a:t>Docker 에 할당된</a:t>
+            </a:r>
+          </a:p>
+          <a:p>
+            <a:pPr algn="ctr">
+              <a:lnSpc>
+                <a:spcPct val="115000"/>
+              </a:lnSpc>
+            </a:pPr>
+            <a:r>
+              <a:rPr sz="1875" b="0">
+                <a:solidFill>
+                  <a:srgbClr val="3D3D3D"/>
+                </a:solidFill>
+                <a:latin typeface="Pretendard"/>
+                <a:ea typeface="Pretendard"/>
+                <a:cs typeface="Pretendard"/>
+              </a:rPr>
+              <a:t>메모리 부족</a:t>
+            </a:r>
+          </a:p>
+        </p:txBody>
+      </p:sp>
+      <p:sp>
+        <p:nvSpPr>
+          <p:cNvPr id="30" name="Rounded Rectangle 29"/>
+          <p:cNvSpPr/>
+          <p:nvPr/>
+        </p:nvSpPr>
+        <p:spPr>
+          <a:xfrm>
+            <a:off x="12024360" y="4895850"/>
+            <a:ext cx="5120640" cy="647700"/>
+          </a:xfrm>
+          <a:prstGeom prst="roundRect">
+            <a:avLst>
+              <a:gd name="adj" fmla="val 5882"/>
+            </a:avLst>
+          </a:prstGeom>
+          <a:solidFill>
+            <a:srgbClr val="FAFBFD"/>
+          </a:solidFill>
+          <a:ln w="9525">
+            <a:solidFill>
+              <a:srgbClr val="DCE1E8"/>
+            </a:solidFill>
+          </a:ln>
+          <a:effectLst/>
+        </p:spPr>
+        <p:txBody>
+          <a:bodyPr rtlCol="0" anchor="ctr" wrap="square"/>
+          <a:lstStyle/>
+          <a:p>
+            <a:pPr algn="ctr"/>
+          </a:p>
+        </p:txBody>
+      </p:sp>
+      <p:sp>
+        <p:nvSpPr>
+          <p:cNvPr id="31" name="TextBox 30"/>
+          <p:cNvSpPr txBox="1"/>
+          <p:nvPr/>
+        </p:nvSpPr>
+        <p:spPr>
+          <a:xfrm>
+            <a:off x="12119610" y="4895850"/>
+            <a:ext cx="4930140" cy="647700"/>
+          </a:xfrm>
+          <a:prstGeom prst="rect">
+            <a:avLst/>
+          </a:prstGeom>
+          <a:noFill/>
+        </p:spPr>
+        <p:txBody>
+          <a:bodyPr wrap="square" lIns="0" rIns="0" tIns="0" bIns="0" anchor="ctr">
+            <a:spAutoFit/>
+          </a:bodyPr>
+          <a:lstStyle/>
+          <a:p>
+            <a:pPr algn="ctr">
+              <a:lnSpc>
+                <a:spcPct val="115000"/>
+              </a:lnSpc>
+            </a:pPr>
+            <a:r>
+              <a:rPr sz="1875" b="0">
+                <a:solidFill>
+                  <a:srgbClr val="3D3D3D"/>
+                </a:solidFill>
+                <a:latin typeface="Pretendard"/>
+                <a:ea typeface="Pretendard"/>
+                <a:cs typeface="Pretendard"/>
+              </a:rPr>
+              <a:t>메모리 8GB 이상</a:t>
+            </a:r>
+          </a:p>
+          <a:p>
+            <a:pPr algn="ctr">
+              <a:lnSpc>
+                <a:spcPct val="115000"/>
+              </a:lnSpc>
+            </a:pPr>
+            <a:r>
+              <a:rPr sz="1875" b="0">
+                <a:solidFill>
+                  <a:srgbClr val="3D3D3D"/>
+                </a:solidFill>
+                <a:latin typeface="Pretendard"/>
+                <a:ea typeface="Pretendard"/>
+                <a:cs typeface="Pretendard"/>
+              </a:rPr>
+              <a:t>· 안 쓰는 컨테이너 stop</a:t>
+            </a:r>
+          </a:p>
+        </p:txBody>
+      </p:sp>
+      <p:sp>
+        <p:nvSpPr>
+          <p:cNvPr id="32" name="TextBox 31"/>
+          <p:cNvSpPr txBox="1"/>
+          <p:nvPr/>
+        </p:nvSpPr>
+        <p:spPr>
+          <a:xfrm>
+            <a:off x="1143000" y="7620000"/>
+            <a:ext cx="16002000" cy="342900"/>
+          </a:xfrm>
+          <a:prstGeom prst="rect">
+            <a:avLst/>
+          </a:prstGeom>
+          <a:noFill/>
+        </p:spPr>
+        <p:txBody>
+          <a:bodyPr wrap="square" lIns="0" rIns="0" tIns="0" bIns="0" anchor="t">
+            <a:spAutoFit/>
+          </a:bodyPr>
+          <a:lstStyle/>
+          <a:p>
+            <a:pPr algn="l">
+              <a:lnSpc>
+                <a:spcPct val="100000"/>
+              </a:lnSpc>
+            </a:pPr>
+            <a:r>
+              <a:rPr sz="1875" b="1">
+                <a:solidFill>
+                  <a:srgbClr val="7D7D7D"/>
+                </a:solidFill>
+                <a:latin typeface="Pretendard"/>
+                <a:ea typeface="Pretendard"/>
+                <a:cs typeface="Pretendard"/>
+              </a:rPr>
+              <a:t>Docker Desktop → Settings → Resources → Memory · WSL2 는 .wslconfig 의 memory= · 안 쓰는 컨테이너는 stop</a:t>
+            </a:r>
+          </a:p>
+        </p:txBody>
+      </p:sp>
+      <p:sp>
+        <p:nvSpPr>
+          <p:cNvPr id="33" name="Rectangle 32"/>
+          <p:cNvSpPr/>
+          <p:nvPr/>
+        </p:nvSpPr>
+        <p:spPr>
+          <a:xfrm>
+            <a:off x="1143000" y="8058150"/>
+            <a:ext cx="16002000" cy="9525"/>
+          </a:xfrm>
+          <a:prstGeom prst="rect">
+            <a:avLst/>
+          </a:prstGeom>
+          <a:solidFill>
+            <a:srgbClr val="DCE1E8"/>
           </a:solidFill>
           <a:ln>
             <a:noFill/>
@@ -12656,170 +15655,7 @@
       </p:sp>
       <p:sp>
         <p:nvSpPr>
-          <p:cNvPr id="25" name="Oval 24"/>
-          <p:cNvSpPr/>
-          <p:nvPr/>
-        </p:nvSpPr>
-        <p:spPr>
-          <a:xfrm>
-            <a:off x="1428750" y="6743700"/>
-            <a:ext cx="419100" cy="419100"/>
-          </a:xfrm>
-          <a:prstGeom prst="ellipse">
-            <a:avLst/>
-          </a:prstGeom>
-          <a:solidFill>
-            <a:srgbClr val="0D2B5E"/>
-          </a:solidFill>
-          <a:ln>
-            <a:noFill/>
-          </a:ln>
-          <a:effectLst/>
-        </p:spPr>
-        <p:txBody>
-          <a:bodyPr rtlCol="0" anchor="ctr" wrap="square"/>
-          <a:lstStyle/>
-          <a:p>
-            <a:pPr algn="ctr"/>
-          </a:p>
-        </p:txBody>
-      </p:sp>
-      <p:sp>
-        <p:nvSpPr>
-          <p:cNvPr id="26" name="TextBox 25"/>
-          <p:cNvSpPr txBox="1"/>
-          <p:nvPr/>
-        </p:nvSpPr>
-        <p:spPr>
-          <a:xfrm>
-            <a:off x="1428750" y="6810375"/>
-            <a:ext cx="419100" cy="304800"/>
-          </a:xfrm>
-          <a:prstGeom prst="rect">
-            <a:avLst/>
-          </a:prstGeom>
-          <a:noFill/>
-        </p:spPr>
-        <p:txBody>
-          <a:bodyPr wrap="square" lIns="0" rIns="0" tIns="0" bIns="0" anchor="t">
-            <a:spAutoFit/>
-          </a:bodyPr>
-          <a:lstStyle/>
-          <a:p>
-            <a:pPr algn="ctr">
-              <a:lnSpc>
-                <a:spcPct val="100000"/>
-              </a:lnSpc>
-            </a:pPr>
-            <a:r>
-              <a:rPr sz="1875" b="1">
-                <a:solidFill>
-                  <a:srgbClr val="FFFFFF"/>
-                </a:solidFill>
-                <a:latin typeface="Pretendard"/>
-                <a:ea typeface="Pretendard"/>
-                <a:cs typeface="Pretendard"/>
-              </a:rPr>
-              <a:t>4</a:t>
-            </a:r>
-          </a:p>
-        </p:txBody>
-      </p:sp>
-      <p:sp>
-        <p:nvSpPr>
-          <p:cNvPr id="27" name="TextBox 26"/>
-          <p:cNvSpPr txBox="1"/>
-          <p:nvPr/>
-        </p:nvSpPr>
-        <p:spPr>
-          <a:xfrm>
-            <a:off x="2057400" y="6591300"/>
-            <a:ext cx="14763750" cy="723900"/>
-          </a:xfrm>
-          <a:prstGeom prst="rect">
-            <a:avLst/>
-          </a:prstGeom>
-          <a:noFill/>
-        </p:spPr>
-        <p:txBody>
-          <a:bodyPr wrap="square" lIns="0" rIns="0" tIns="0" bIns="0" anchor="ctr">
-            <a:spAutoFit/>
-          </a:bodyPr>
-          <a:lstStyle/>
-          <a:p>
-            <a:pPr>
-              <a:lnSpc>
-                <a:spcPct val="120000"/>
-              </a:lnSpc>
-            </a:pPr>
-            <a:r>
-              <a:rPr sz="2175" b="1">
-                <a:solidFill>
-                  <a:srgbClr val="0D2B5E"/>
-                </a:solidFill>
-                <a:latin typeface="Pretendard"/>
-                <a:ea typeface="Pretendard"/>
-                <a:cs typeface="Pretendard"/>
-              </a:rPr>
-              <a:t>카탈로그가 죽으면 데이터도 잃나요?</a:t>
-            </a:r>
-          </a:p>
-          <a:p>
-            <a:pPr>
-              <a:lnSpc>
-                <a:spcPct val="130000"/>
-              </a:lnSpc>
-              <a:spcBef>
-                <a:spcPts val="300"/>
-              </a:spcBef>
-            </a:pPr>
-            <a:r>
-              <a:rPr sz="1875" b="0">
-                <a:solidFill>
-                  <a:srgbClr val="3D3D3D"/>
-                </a:solidFill>
-                <a:latin typeface="Pretendard"/>
-                <a:ea typeface="Pretendard"/>
-                <a:cs typeface="Pretendard"/>
-              </a:rPr>
-              <a:t>데이터 파일은 남는다 — 다만 「무엇이 현재 상태인지」를 잃으므로 카탈로그도 백업 대상</a:t>
-            </a:r>
-          </a:p>
-        </p:txBody>
-      </p:sp>
-      <p:sp>
-        <p:nvSpPr>
-          <p:cNvPr id="28" name="Rectangle 27"/>
-          <p:cNvSpPr/>
-          <p:nvPr/>
-        </p:nvSpPr>
-        <p:spPr>
-          <a:xfrm>
-            <a:off x="1143000" y="8058150"/>
-            <a:ext cx="16002000" cy="9525"/>
-          </a:xfrm>
-          <a:prstGeom prst="rect">
-            <a:avLst/>
-          </a:prstGeom>
-          <a:solidFill>
-            <a:srgbClr val="DCE1E8"/>
-          </a:solidFill>
-          <a:ln>
-            <a:noFill/>
-          </a:ln>
-          <a:effectLst/>
-        </p:spPr>
-        <p:txBody>
-          <a:bodyPr rtlCol="0" anchor="ctr" wrap="square"/>
-          <a:lstStyle/>
-          <a:p>
-            <a:pPr algn="ctr"/>
-          </a:p>
-        </p:txBody>
-      </p:sp>
-      <p:sp>
-        <p:nvSpPr>
-          <p:cNvPr id="29" name="TextBox 28"/>
+          <p:cNvPr id="34" name="TextBox 33"/>
           <p:cNvSpPr txBox="1"/>
           <p:nvPr/>
         </p:nvSpPr>
@@ -12860,7 +15696,7 @@
       </p:sp>
       <p:sp>
         <p:nvSpPr>
-          <p:cNvPr id="30" name="TextBox 29"/>
+          <p:cNvPr id="35" name="TextBox 34"/>
           <p:cNvSpPr txBox="1"/>
           <p:nvPr/>
         </p:nvSpPr>
@@ -12919,7 +15755,7 @@
       <p:grpSpPr/>
       <p:sp>
         <p:nvSpPr>
-          <p:cNvPr id="2" name="Oval 1"/>
+          <p:cNvPr id="2" name="deckgen:decor"/>
           <p:cNvSpPr/>
           <p:nvPr/>
         </p:nvSpPr>
@@ -12949,7 +15785,7 @@
       </p:sp>
       <p:sp>
         <p:nvSpPr>
-          <p:cNvPr id="3" name="Oval 2"/>
+          <p:cNvPr id="3" name="deckgen:decor"/>
           <p:cNvSpPr/>
           <p:nvPr/>
         </p:nvSpPr>
@@ -12979,7 +15815,7 @@
       </p:sp>
       <p:sp>
         <p:nvSpPr>
-          <p:cNvPr id="4" name="Oval 3"/>
+          <p:cNvPr id="4" name="deckgen:decor"/>
           <p:cNvSpPr/>
           <p:nvPr/>
         </p:nvSpPr>
@@ -13043,7 +15879,7 @@
                 <a:ea typeface="Pretendard"/>
                 <a:cs typeface="Pretendard"/>
               </a:rPr>
-              <a:t>다음 회차 예고</a:t>
+              <a:t>예상 질문</a:t>
             </a:r>
           </a:p>
         </p:txBody>
@@ -13084,7 +15920,7 @@
                 <a:ea typeface="Pretendard"/>
                 <a:cs typeface="Pretendard"/>
               </a:rPr>
-              <a:t>4-3 · MinIO–Iceberg 데이터 파이프라인 구축</a:t>
+              <a:t>자주 나오는 질문 네 가지</a:t>
             </a:r>
           </a:p>
         </p:txBody>
@@ -13127,12 +15963,12 @@
         </p:nvSpPr>
         <p:spPr>
           <a:xfrm>
-            <a:off x="1143000" y="3429000"/>
-            <a:ext cx="3714750" cy="2476500"/>
+            <a:off x="1143000" y="3352800"/>
+            <a:ext cx="16002000" cy="914400"/>
           </a:xfrm>
           <a:prstGeom prst="roundRect">
             <a:avLst>
-              <a:gd name="adj" fmla="val 1923"/>
+              <a:gd name="adj" fmla="val 5208"/>
             </a:avLst>
           </a:prstGeom>
           <a:solidFill>
@@ -13161,8 +15997,8 @@
         </p:nvSpPr>
         <p:spPr>
           <a:xfrm>
-            <a:off x="1143000" y="3429000"/>
-            <a:ext cx="3714750" cy="47625"/>
+            <a:off x="1143000" y="3352800"/>
+            <a:ext cx="47625" cy="914400"/>
           </a:xfrm>
           <a:prstGeom prst="rect">
             <a:avLst/>
@@ -13185,14 +16021,44 @@
       </p:sp>
       <p:sp>
         <p:nvSpPr>
-          <p:cNvPr id="10" name="TextBox 9"/>
-          <p:cNvSpPr txBox="1"/>
-          <p:nvPr/>
-        </p:nvSpPr>
-        <p:spPr>
-          <a:xfrm>
-            <a:off x="4000500" y="3638550"/>
-            <a:ext cx="590550" cy="400050"/>
+          <p:cNvPr id="10" name="Oval 9"/>
+          <p:cNvSpPr/>
+          <p:nvPr/>
+        </p:nvSpPr>
+        <p:spPr>
+          <a:xfrm>
+            <a:off x="1428750" y="3600450"/>
+            <a:ext cx="419100" cy="419100"/>
+          </a:xfrm>
+          <a:prstGeom prst="ellipse">
+            <a:avLst/>
+          </a:prstGeom>
+          <a:solidFill>
+            <a:srgbClr val="0D2B5E"/>
+          </a:solidFill>
+          <a:ln>
+            <a:noFill/>
+          </a:ln>
+          <a:effectLst/>
+        </p:spPr>
+        <p:txBody>
+          <a:bodyPr rtlCol="0" anchor="ctr" wrap="square"/>
+          <a:lstStyle/>
+          <a:p>
+            <a:pPr algn="ctr"/>
+          </a:p>
+        </p:txBody>
+      </p:sp>
+      <p:sp>
+        <p:nvSpPr>
+          <p:cNvPr id="11" name="TextBox 10"/>
+          <p:cNvSpPr txBox="1"/>
+          <p:nvPr/>
+        </p:nvSpPr>
+        <p:spPr>
+          <a:xfrm>
+            <a:off x="1428750" y="3667125"/>
+            <a:ext cx="419100" cy="304800"/>
           </a:xfrm>
           <a:prstGeom prst="rect">
             <a:avLst/>
@@ -13205,35 +16071,35 @@
           </a:bodyPr>
           <a:lstStyle/>
           <a:p>
-            <a:pPr algn="r">
+            <a:pPr algn="ctr">
               <a:lnSpc>
                 <a:spcPct val="100000"/>
               </a:lnSpc>
             </a:pPr>
             <a:r>
-              <a:rPr sz="2550" b="1">
-                <a:solidFill>
-                  <a:srgbClr val="E4EBF4"/>
-                </a:solidFill>
-                <a:latin typeface="Pretendard"/>
-                <a:ea typeface="Pretendard"/>
-                <a:cs typeface="Pretendard"/>
-              </a:rPr>
-              <a:t>01</a:t>
-            </a:r>
-          </a:p>
-        </p:txBody>
-      </p:sp>
-      <p:sp>
-        <p:nvSpPr>
-          <p:cNvPr id="11" name="TextBox 10"/>
-          <p:cNvSpPr txBox="1"/>
-          <p:nvPr/>
-        </p:nvSpPr>
-        <p:spPr>
-          <a:xfrm>
-            <a:off x="1466850" y="3752850"/>
-            <a:ext cx="3067050" cy="1828800"/>
+              <a:rPr sz="1875" b="1">
+                <a:solidFill>
+                  <a:srgbClr val="FFFFFF"/>
+                </a:solidFill>
+                <a:latin typeface="Pretendard"/>
+                <a:ea typeface="Pretendard"/>
+                <a:cs typeface="Pretendard"/>
+              </a:rPr>
+              <a:t>1</a:t>
+            </a:r>
+          </a:p>
+        </p:txBody>
+      </p:sp>
+      <p:sp>
+        <p:nvSpPr>
+          <p:cNvPr id="12" name="TextBox 11"/>
+          <p:cNvSpPr txBox="1"/>
+          <p:nvPr/>
+        </p:nvSpPr>
+        <p:spPr>
+          <a:xfrm>
+            <a:off x="2057400" y="3448050"/>
+            <a:ext cx="14763750" cy="723900"/>
           </a:xfrm>
           <a:prstGeom prst="rect">
             <a:avLst/>
@@ -13248,11 +16114,11 @@
           <a:p>
             <a:pPr>
               <a:lnSpc>
-                <a:spcPct val="115000"/>
-              </a:lnSpc>
-            </a:pPr>
-            <a:r>
-              <a:rPr sz="2700" b="1">
+                <a:spcPct val="120000"/>
+              </a:lnSpc>
+            </a:pPr>
+            <a:r>
+              <a:rPr sz="2175" b="1">
                 <a:solidFill>
                   <a:srgbClr val="0D2B5E"/>
                 </a:solidFill>
@@ -13260,20 +16126,20 @@
                 <a:ea typeface="Pretendard"/>
                 <a:cs typeface="Pretendard"/>
               </a:rPr>
-              <a:t>이론 1H</a:t>
+              <a:t>Iceberg 와 Delta Lake 중 뭘 배워야 하나요?</a:t>
             </a:r>
           </a:p>
           <a:p>
             <a:pPr>
               <a:lnSpc>
-                <a:spcPct val="146000"/>
+                <a:spcPct val="130000"/>
               </a:lnSpc>
               <a:spcBef>
-                <a:spcPts val="1050"/>
+                <a:spcPts val="300"/>
               </a:spcBef>
             </a:pPr>
             <a:r>
-              <a:rPr sz="2025" b="0">
+              <a:rPr sz="1875" b="0">
                 <a:solidFill>
                   <a:srgbClr val="3D3D3D"/>
                 </a:solidFill>
@@ -13281,43 +16147,25 @@
                 <a:ea typeface="Pretendard"/>
                 <a:cs typeface="Pretendard"/>
               </a:rPr>
-              <a:t>데이터 파이프라인</a:t>
-            </a:r>
-          </a:p>
-          <a:p>
-            <a:pPr>
-              <a:lnSpc>
-                <a:spcPct val="146000"/>
-              </a:lnSpc>
-            </a:pPr>
-            <a:r>
-              <a:rPr sz="2025" b="0">
-                <a:solidFill>
-                  <a:srgbClr val="3D3D3D"/>
-                </a:solidFill>
-                <a:latin typeface="Pretendard"/>
-                <a:ea typeface="Pretendard"/>
-                <a:cs typeface="Pretendard"/>
-              </a:rPr>
-              <a:t>설계 · 멱등성</a:t>
-            </a:r>
-          </a:p>
-        </p:txBody>
-      </p:sp>
-      <p:sp>
-        <p:nvSpPr>
-          <p:cNvPr id="12" name="Rounded Rectangle 11"/>
-          <p:cNvSpPr/>
-          <p:nvPr/>
-        </p:nvSpPr>
-        <p:spPr>
-          <a:xfrm>
-            <a:off x="5238750" y="3429000"/>
-            <a:ext cx="3714750" cy="2476500"/>
+              <a:t>개념이 거의 같다 — Iceberg 는 엔진 중립적이라 Spark·Trino·Flink 가 함께 쓰기 좋고, Delta 는 Databricks 생태계에서 강하다</a:t>
+            </a:r>
+          </a:p>
+        </p:txBody>
+      </p:sp>
+      <p:sp>
+        <p:nvSpPr>
+          <p:cNvPr id="13" name="Rounded Rectangle 12"/>
+          <p:cNvSpPr/>
+          <p:nvPr/>
+        </p:nvSpPr>
+        <p:spPr>
+          <a:xfrm>
+            <a:off x="1143000" y="4400550"/>
+            <a:ext cx="16002000" cy="914400"/>
           </a:xfrm>
           <a:prstGeom prst="roundRect">
             <a:avLst>
-              <a:gd name="adj" fmla="val 1923"/>
+              <a:gd name="adj" fmla="val 5208"/>
             </a:avLst>
           </a:prstGeom>
           <a:solidFill>
@@ -13340,14 +16188,14 @@
       </p:sp>
       <p:sp>
         <p:nvSpPr>
-          <p:cNvPr id="13" name="Rectangle 12"/>
-          <p:cNvSpPr/>
-          <p:nvPr/>
-        </p:nvSpPr>
-        <p:spPr>
-          <a:xfrm>
-            <a:off x="5238750" y="3429000"/>
-            <a:ext cx="3714750" cy="47625"/>
+          <p:cNvPr id="14" name="Rectangle 13"/>
+          <p:cNvSpPr/>
+          <p:nvPr/>
+        </p:nvSpPr>
+        <p:spPr>
+          <a:xfrm>
+            <a:off x="1143000" y="4400550"/>
+            <a:ext cx="47625" cy="914400"/>
           </a:xfrm>
           <a:prstGeom prst="rect">
             <a:avLst/>
@@ -13370,14 +16218,44 @@
       </p:sp>
       <p:sp>
         <p:nvSpPr>
-          <p:cNvPr id="14" name="TextBox 13"/>
-          <p:cNvSpPr txBox="1"/>
-          <p:nvPr/>
-        </p:nvSpPr>
-        <p:spPr>
-          <a:xfrm>
-            <a:off x="8096250" y="3638550"/>
-            <a:ext cx="590550" cy="400050"/>
+          <p:cNvPr id="15" name="Oval 14"/>
+          <p:cNvSpPr/>
+          <p:nvPr/>
+        </p:nvSpPr>
+        <p:spPr>
+          <a:xfrm>
+            <a:off x="1428750" y="4648200"/>
+            <a:ext cx="419100" cy="419100"/>
+          </a:xfrm>
+          <a:prstGeom prst="ellipse">
+            <a:avLst/>
+          </a:prstGeom>
+          <a:solidFill>
+            <a:srgbClr val="0D2B5E"/>
+          </a:solidFill>
+          <a:ln>
+            <a:noFill/>
+          </a:ln>
+          <a:effectLst/>
+        </p:spPr>
+        <p:txBody>
+          <a:bodyPr rtlCol="0" anchor="ctr" wrap="square"/>
+          <a:lstStyle/>
+          <a:p>
+            <a:pPr algn="ctr"/>
+          </a:p>
+        </p:txBody>
+      </p:sp>
+      <p:sp>
+        <p:nvSpPr>
+          <p:cNvPr id="16" name="TextBox 15"/>
+          <p:cNvSpPr txBox="1"/>
+          <p:nvPr/>
+        </p:nvSpPr>
+        <p:spPr>
+          <a:xfrm>
+            <a:off x="1428750" y="4714875"/>
+            <a:ext cx="419100" cy="304800"/>
           </a:xfrm>
           <a:prstGeom prst="rect">
             <a:avLst/>
@@ -13390,35 +16268,35 @@
           </a:bodyPr>
           <a:lstStyle/>
           <a:p>
-            <a:pPr algn="r">
+            <a:pPr algn="ctr">
               <a:lnSpc>
                 <a:spcPct val="100000"/>
               </a:lnSpc>
             </a:pPr>
             <a:r>
-              <a:rPr sz="2550" b="1">
-                <a:solidFill>
-                  <a:srgbClr val="E4EBF4"/>
-                </a:solidFill>
-                <a:latin typeface="Pretendard"/>
-                <a:ea typeface="Pretendard"/>
-                <a:cs typeface="Pretendard"/>
-              </a:rPr>
-              <a:t>02</a:t>
-            </a:r>
-          </a:p>
-        </p:txBody>
-      </p:sp>
-      <p:sp>
-        <p:nvSpPr>
-          <p:cNvPr id="15" name="TextBox 14"/>
-          <p:cNvSpPr txBox="1"/>
-          <p:nvPr/>
-        </p:nvSpPr>
-        <p:spPr>
-          <a:xfrm>
-            <a:off x="5562600" y="3752850"/>
-            <a:ext cx="3067050" cy="1828800"/>
+              <a:rPr sz="1875" b="1">
+                <a:solidFill>
+                  <a:srgbClr val="FFFFFF"/>
+                </a:solidFill>
+                <a:latin typeface="Pretendard"/>
+                <a:ea typeface="Pretendard"/>
+                <a:cs typeface="Pretendard"/>
+              </a:rPr>
+              <a:t>2</a:t>
+            </a:r>
+          </a:p>
+        </p:txBody>
+      </p:sp>
+      <p:sp>
+        <p:nvSpPr>
+          <p:cNvPr id="17" name="TextBox 16"/>
+          <p:cNvSpPr txBox="1"/>
+          <p:nvPr/>
+        </p:nvSpPr>
+        <p:spPr>
+          <a:xfrm>
+            <a:off x="2057400" y="4495800"/>
+            <a:ext cx="14763750" cy="723900"/>
           </a:xfrm>
           <a:prstGeom prst="rect">
             <a:avLst/>
@@ -13433,11 +16311,11 @@
           <a:p>
             <a:pPr>
               <a:lnSpc>
-                <a:spcPct val="115000"/>
-              </a:lnSpc>
-            </a:pPr>
-            <a:r>
-              <a:rPr sz="2700" b="1">
+                <a:spcPct val="120000"/>
+              </a:lnSpc>
+            </a:pPr>
+            <a:r>
+              <a:rPr sz="2175" b="1">
                 <a:solidFill>
                   <a:srgbClr val="0D2B5E"/>
                 </a:solidFill>
@@ -13445,20 +16323,20 @@
                 <a:ea typeface="Pretendard"/>
                 <a:cs typeface="Pretendard"/>
               </a:rPr>
-              <a:t>실습 1H</a:t>
+              <a:t>스냅샷이 계속 쌓이면 저장 비용이 늘지 않나요?</a:t>
             </a:r>
           </a:p>
           <a:p>
             <a:pPr>
               <a:lnSpc>
-                <a:spcPct val="146000"/>
+                <a:spcPct val="130000"/>
               </a:lnSpc>
               <a:spcBef>
-                <a:spcPts val="1050"/>
+                <a:spcPts val="300"/>
               </a:spcBef>
             </a:pPr>
             <a:r>
-              <a:rPr sz="2025" b="0">
+              <a:rPr sz="1875" b="0">
                 <a:solidFill>
                   <a:srgbClr val="3D3D3D"/>
                 </a:solidFill>
@@ -13466,228 +16344,25 @@
                 <a:ea typeface="Pretendard"/>
                 <a:cs typeface="Pretendard"/>
               </a:rPr>
-              <a:t>원천 데이터</a:t>
-            </a:r>
-          </a:p>
-          <a:p>
-            <a:pPr>
-              <a:lnSpc>
-                <a:spcPct val="146000"/>
-              </a:lnSpc>
-            </a:pPr>
-            <a:r>
-              <a:rPr sz="2025" b="0">
-                <a:solidFill>
-                  <a:srgbClr val="3D3D3D"/>
-                </a:solidFill>
-                <a:latin typeface="Pretendard"/>
-                <a:ea typeface="Pretendard"/>
-                <a:cs typeface="Pretendard"/>
-              </a:rPr>
-              <a:t>raw 버킷 적재</a:t>
-            </a:r>
-          </a:p>
-        </p:txBody>
-      </p:sp>
-      <p:sp>
-        <p:nvSpPr>
-          <p:cNvPr id="16" name="Rounded Rectangle 15"/>
-          <p:cNvSpPr/>
-          <p:nvPr/>
-        </p:nvSpPr>
-        <p:spPr>
-          <a:xfrm>
-            <a:off x="9334500" y="3429000"/>
-            <a:ext cx="3714750" cy="2476500"/>
+              <a:t>늘어난다 — expire_snapshots 로 보관 기간을 정해 정리한다, 보통 7~30일</a:t>
+            </a:r>
+          </a:p>
+        </p:txBody>
+      </p:sp>
+      <p:sp>
+        <p:nvSpPr>
+          <p:cNvPr id="18" name="Rounded Rectangle 17"/>
+          <p:cNvSpPr/>
+          <p:nvPr/>
+        </p:nvSpPr>
+        <p:spPr>
+          <a:xfrm>
+            <a:off x="1143000" y="5448300"/>
+            <a:ext cx="16002000" cy="914400"/>
           </a:xfrm>
           <a:prstGeom prst="roundRect">
             <a:avLst>
-              <a:gd name="adj" fmla="val 1923"/>
-            </a:avLst>
-          </a:prstGeom>
-          <a:solidFill>
-            <a:srgbClr val="0D2B5E"/>
-          </a:solidFill>
-          <a:ln w="9525">
-            <a:solidFill>
-              <a:srgbClr val="0D2B5E"/>
-            </a:solidFill>
-          </a:ln>
-          <a:effectLst/>
-        </p:spPr>
-        <p:txBody>
-          <a:bodyPr rtlCol="0" anchor="ctr" wrap="square"/>
-          <a:lstStyle/>
-          <a:p>
-            <a:pPr algn="ctr"/>
-          </a:p>
-        </p:txBody>
-      </p:sp>
-      <p:sp>
-        <p:nvSpPr>
-          <p:cNvPr id="17" name="Rectangle 16"/>
-          <p:cNvSpPr/>
-          <p:nvPr/>
-        </p:nvSpPr>
-        <p:spPr>
-          <a:xfrm>
-            <a:off x="9334500" y="3429000"/>
-            <a:ext cx="3714750" cy="47625"/>
-          </a:xfrm>
-          <a:prstGeom prst="rect">
-            <a:avLst/>
-          </a:prstGeom>
-          <a:solidFill>
-            <a:srgbClr val="1E5BC6"/>
-          </a:solidFill>
-          <a:ln>
-            <a:noFill/>
-          </a:ln>
-          <a:effectLst/>
-        </p:spPr>
-        <p:txBody>
-          <a:bodyPr rtlCol="0" anchor="ctr" wrap="square"/>
-          <a:lstStyle/>
-          <a:p>
-            <a:pPr algn="ctr"/>
-          </a:p>
-        </p:txBody>
-      </p:sp>
-      <p:sp>
-        <p:nvSpPr>
-          <p:cNvPr id="18" name="TextBox 17"/>
-          <p:cNvSpPr txBox="1"/>
-          <p:nvPr/>
-        </p:nvSpPr>
-        <p:spPr>
-          <a:xfrm>
-            <a:off x="12192000" y="3638550"/>
-            <a:ext cx="590550" cy="400050"/>
-          </a:xfrm>
-          <a:prstGeom prst="rect">
-            <a:avLst/>
-          </a:prstGeom>
-          <a:noFill/>
-        </p:spPr>
-        <p:txBody>
-          <a:bodyPr wrap="square" lIns="0" rIns="0" tIns="0" bIns="0" anchor="t">
-            <a:spAutoFit/>
-          </a:bodyPr>
-          <a:lstStyle/>
-          <a:p>
-            <a:pPr algn="r">
-              <a:lnSpc>
-                <a:spcPct val="100000"/>
-              </a:lnSpc>
-            </a:pPr>
-            <a:r>
-              <a:rPr sz="2550" b="1">
-                <a:solidFill>
-                  <a:srgbClr val="3B4B7C"/>
-                </a:solidFill>
-                <a:latin typeface="Pretendard"/>
-                <a:ea typeface="Pretendard"/>
-                <a:cs typeface="Pretendard"/>
-              </a:rPr>
-              <a:t>03</a:t>
-            </a:r>
-          </a:p>
-        </p:txBody>
-      </p:sp>
-      <p:sp>
-        <p:nvSpPr>
-          <p:cNvPr id="19" name="TextBox 18"/>
-          <p:cNvSpPr txBox="1"/>
-          <p:nvPr/>
-        </p:nvSpPr>
-        <p:spPr>
-          <a:xfrm>
-            <a:off x="9658350" y="3752850"/>
-            <a:ext cx="3067050" cy="1828800"/>
-          </a:xfrm>
-          <a:prstGeom prst="rect">
-            <a:avLst/>
-          </a:prstGeom>
-          <a:noFill/>
-        </p:spPr>
-        <p:txBody>
-          <a:bodyPr wrap="square" lIns="0" rIns="0" tIns="0" bIns="0" anchor="ctr">
-            <a:spAutoFit/>
-          </a:bodyPr>
-          <a:lstStyle/>
-          <a:p>
-            <a:pPr>
-              <a:lnSpc>
-                <a:spcPct val="115000"/>
-              </a:lnSpc>
-            </a:pPr>
-            <a:r>
-              <a:rPr sz="2700" b="1">
-                <a:solidFill>
-                  <a:srgbClr val="FFFFFF"/>
-                </a:solidFill>
-                <a:latin typeface="Pretendard"/>
-                <a:ea typeface="Pretendard"/>
-                <a:cs typeface="Pretendard"/>
-              </a:rPr>
-              <a:t>실습 1.5H</a:t>
-            </a:r>
-          </a:p>
-          <a:p>
-            <a:pPr>
-              <a:lnSpc>
-                <a:spcPct val="146000"/>
-              </a:lnSpc>
-              <a:spcBef>
-                <a:spcPts val="1050"/>
-              </a:spcBef>
-            </a:pPr>
-            <a:r>
-              <a:rPr sz="2025" b="0">
-                <a:solidFill>
-                  <a:srgbClr val="D9E2F0"/>
-                </a:solidFill>
-                <a:latin typeface="Pretendard"/>
-                <a:ea typeface="Pretendard"/>
-                <a:cs typeface="Pretendard"/>
-              </a:rPr>
-              <a:t>Spark ETL 과</a:t>
-            </a:r>
-          </a:p>
-          <a:p>
-            <a:pPr>
-              <a:lnSpc>
-                <a:spcPct val="146000"/>
-              </a:lnSpc>
-            </a:pPr>
-            <a:r>
-              <a:rPr sz="2025" b="0">
-                <a:solidFill>
-                  <a:srgbClr val="D9E2F0"/>
-                </a:solidFill>
-                <a:latin typeface="Pretendard"/>
-                <a:ea typeface="Pretendard"/>
-                <a:cs typeface="Pretendard"/>
-              </a:rPr>
-              <a:t>MERGE 적재</a:t>
-            </a:r>
-          </a:p>
-        </p:txBody>
-      </p:sp>
-      <p:sp>
-        <p:nvSpPr>
-          <p:cNvPr id="20" name="Rounded Rectangle 19"/>
-          <p:cNvSpPr/>
-          <p:nvPr/>
-        </p:nvSpPr>
-        <p:spPr>
-          <a:xfrm>
-            <a:off x="13430250" y="3429000"/>
-            <a:ext cx="3714750" cy="2476500"/>
-          </a:xfrm>
-          <a:prstGeom prst="roundRect">
-            <a:avLst>
-              <a:gd name="adj" fmla="val 1923"/>
+              <a:gd name="adj" fmla="val 5208"/>
             </a:avLst>
           </a:prstGeom>
           <a:solidFill>
@@ -13710,14 +16385,14 @@
       </p:sp>
       <p:sp>
         <p:nvSpPr>
-          <p:cNvPr id="21" name="Rectangle 20"/>
-          <p:cNvSpPr/>
-          <p:nvPr/>
-        </p:nvSpPr>
-        <p:spPr>
-          <a:xfrm>
-            <a:off x="13430250" y="3429000"/>
-            <a:ext cx="3714750" cy="47625"/>
+          <p:cNvPr id="19" name="Rectangle 18"/>
+          <p:cNvSpPr/>
+          <p:nvPr/>
+        </p:nvSpPr>
+        <p:spPr>
+          <a:xfrm>
+            <a:off x="1143000" y="5448300"/>
+            <a:ext cx="47625" cy="914400"/>
           </a:xfrm>
           <a:prstGeom prst="rect">
             <a:avLst/>
@@ -13740,141 +16415,20 @@
       </p:sp>
       <p:sp>
         <p:nvSpPr>
-          <p:cNvPr id="22" name="TextBox 21"/>
-          <p:cNvSpPr txBox="1"/>
-          <p:nvPr/>
-        </p:nvSpPr>
-        <p:spPr>
-          <a:xfrm>
-            <a:off x="16287750" y="3638550"/>
-            <a:ext cx="590550" cy="400050"/>
-          </a:xfrm>
-          <a:prstGeom prst="rect">
-            <a:avLst/>
-          </a:prstGeom>
-          <a:noFill/>
-        </p:spPr>
-        <p:txBody>
-          <a:bodyPr wrap="square" lIns="0" rIns="0" tIns="0" bIns="0" anchor="t">
-            <a:spAutoFit/>
-          </a:bodyPr>
-          <a:lstStyle/>
-          <a:p>
-            <a:pPr algn="r">
-              <a:lnSpc>
-                <a:spcPct val="100000"/>
-              </a:lnSpc>
-            </a:pPr>
-            <a:r>
-              <a:rPr sz="2550" b="1">
-                <a:solidFill>
-                  <a:srgbClr val="E4EBF4"/>
-                </a:solidFill>
-                <a:latin typeface="Pretendard"/>
-                <a:ea typeface="Pretendard"/>
-                <a:cs typeface="Pretendard"/>
-              </a:rPr>
-              <a:t>04</a:t>
-            </a:r>
-          </a:p>
-        </p:txBody>
-      </p:sp>
-      <p:sp>
-        <p:nvSpPr>
-          <p:cNvPr id="23" name="TextBox 22"/>
-          <p:cNvSpPr txBox="1"/>
-          <p:nvPr/>
-        </p:nvSpPr>
-        <p:spPr>
-          <a:xfrm>
-            <a:off x="13754100" y="3752850"/>
-            <a:ext cx="3067050" cy="1828800"/>
-          </a:xfrm>
-          <a:prstGeom prst="rect">
-            <a:avLst/>
-          </a:prstGeom>
-          <a:noFill/>
-        </p:spPr>
-        <p:txBody>
-          <a:bodyPr wrap="square" lIns="0" rIns="0" tIns="0" bIns="0" anchor="ctr">
-            <a:spAutoFit/>
-          </a:bodyPr>
-          <a:lstStyle/>
-          <a:p>
-            <a:pPr>
-              <a:lnSpc>
-                <a:spcPct val="115000"/>
-              </a:lnSpc>
-            </a:pPr>
-            <a:r>
-              <a:rPr sz="2700" b="1">
-                <a:solidFill>
-                  <a:srgbClr val="0D2B5E"/>
-                </a:solidFill>
-                <a:latin typeface="Pretendard"/>
-                <a:ea typeface="Pretendard"/>
-                <a:cs typeface="Pretendard"/>
-              </a:rPr>
-              <a:t>정리 0.5H</a:t>
-            </a:r>
-          </a:p>
-          <a:p>
-            <a:pPr>
-              <a:lnSpc>
-                <a:spcPct val="146000"/>
-              </a:lnSpc>
-              <a:spcBef>
-                <a:spcPts val="1050"/>
-              </a:spcBef>
-            </a:pPr>
-            <a:r>
-              <a:rPr sz="2025" b="0">
-                <a:solidFill>
-                  <a:srgbClr val="3D3D3D"/>
-                </a:solidFill>
-                <a:latin typeface="Pretendard"/>
-                <a:ea typeface="Pretendard"/>
-                <a:cs typeface="Pretendard"/>
-              </a:rPr>
-              <a:t>스냅샷 이력으로</a:t>
-            </a:r>
-          </a:p>
-          <a:p>
-            <a:pPr>
-              <a:lnSpc>
-                <a:spcPct val="146000"/>
-              </a:lnSpc>
-            </a:pPr>
-            <a:r>
-              <a:rPr sz="2025" b="0">
-                <a:solidFill>
-                  <a:srgbClr val="3D3D3D"/>
-                </a:solidFill>
-                <a:latin typeface="Pretendard"/>
-                <a:ea typeface="Pretendard"/>
-                <a:cs typeface="Pretendard"/>
-              </a:rPr>
-              <a:t>적재 결과 검증</a:t>
-            </a:r>
-          </a:p>
-        </p:txBody>
-      </p:sp>
-      <p:sp>
-        <p:nvSpPr>
-          <p:cNvPr id="24" name="Rectangle 23"/>
-          <p:cNvSpPr/>
-          <p:nvPr/>
-        </p:nvSpPr>
-        <p:spPr>
-          <a:xfrm>
-            <a:off x="1143000" y="6496050"/>
-            <a:ext cx="47625" cy="723900"/>
-          </a:xfrm>
-          <a:prstGeom prst="rect">
-            <a:avLst/>
-          </a:prstGeom>
-          <a:solidFill>
-            <a:srgbClr val="1E5BC6"/>
+          <p:cNvPr id="20" name="Oval 19"/>
+          <p:cNvSpPr/>
+          <p:nvPr/>
+        </p:nvSpPr>
+        <p:spPr>
+          <a:xfrm>
+            <a:off x="1428750" y="5695950"/>
+            <a:ext cx="419100" cy="419100"/>
+          </a:xfrm>
+          <a:prstGeom prst="ellipse">
+            <a:avLst/>
+          </a:prstGeom>
+          <a:solidFill>
+            <a:srgbClr val="0D2B5E"/>
           </a:solidFill>
           <a:ln>
             <a:noFill/>
@@ -13891,14 +16445,14 @@
       </p:sp>
       <p:sp>
         <p:nvSpPr>
-          <p:cNvPr id="25" name="TextBox 24"/>
-          <p:cNvSpPr txBox="1"/>
-          <p:nvPr/>
-        </p:nvSpPr>
-        <p:spPr>
-          <a:xfrm>
-            <a:off x="1390650" y="6553200"/>
-            <a:ext cx="15754350" cy="762000"/>
+          <p:cNvPr id="21" name="TextBox 20"/>
+          <p:cNvSpPr txBox="1"/>
+          <p:nvPr/>
+        </p:nvSpPr>
+        <p:spPr>
+          <a:xfrm>
+            <a:off x="1428750" y="5762625"/>
+            <a:ext cx="419100" cy="304800"/>
           </a:xfrm>
           <a:prstGeom prst="rect">
             <a:avLst/>
@@ -13911,28 +16465,287 @@
           </a:bodyPr>
           <a:lstStyle/>
           <a:p>
-            <a:pPr algn="l">
-              <a:lnSpc>
-                <a:spcPct val="150000"/>
-              </a:lnSpc>
-            </a:pPr>
-            <a:r>
-              <a:rPr sz="2025" b="1">
-                <a:solidFill>
-                  <a:srgbClr val="7D7D7D"/>
-                </a:solidFill>
-                <a:latin typeface="Pretendard"/>
-                <a:ea typeface="Pretendard"/>
-                <a:cs typeface="Pretendard"/>
-              </a:rPr>
-              <a:t>준비: 오늘 구성 그대로 docker compose up -d 로 4개 컨테이너 · spark-sql 에서 orders 를 SELECT 해 살아 있는지 확인</a:t>
-            </a:r>
-          </a:p>
-        </p:txBody>
-      </p:sp>
-      <p:sp>
-        <p:nvSpPr>
-          <p:cNvPr id="26" name="Rectangle 25"/>
+            <a:pPr algn="ctr">
+              <a:lnSpc>
+                <a:spcPct val="100000"/>
+              </a:lnSpc>
+            </a:pPr>
+            <a:r>
+              <a:rPr sz="1875" b="1">
+                <a:solidFill>
+                  <a:srgbClr val="FFFFFF"/>
+                </a:solidFill>
+                <a:latin typeface="Pretendard"/>
+                <a:ea typeface="Pretendard"/>
+                <a:cs typeface="Pretendard"/>
+              </a:rPr>
+              <a:t>3</a:t>
+            </a:r>
+          </a:p>
+        </p:txBody>
+      </p:sp>
+      <p:sp>
+        <p:nvSpPr>
+          <p:cNvPr id="22" name="TextBox 21"/>
+          <p:cNvSpPr txBox="1"/>
+          <p:nvPr/>
+        </p:nvSpPr>
+        <p:spPr>
+          <a:xfrm>
+            <a:off x="2057400" y="5543550"/>
+            <a:ext cx="14763750" cy="723900"/>
+          </a:xfrm>
+          <a:prstGeom prst="rect">
+            <a:avLst/>
+          </a:prstGeom>
+          <a:noFill/>
+        </p:spPr>
+        <p:txBody>
+          <a:bodyPr wrap="square" lIns="0" rIns="0" tIns="0" bIns="0" anchor="ctr">
+            <a:spAutoFit/>
+          </a:bodyPr>
+          <a:lstStyle/>
+          <a:p>
+            <a:pPr>
+              <a:lnSpc>
+                <a:spcPct val="120000"/>
+              </a:lnSpc>
+            </a:pPr>
+            <a:r>
+              <a:rPr sz="2175" b="1">
+                <a:solidFill>
+                  <a:srgbClr val="0D2B5E"/>
+                </a:solidFill>
+                <a:latin typeface="Pretendard"/>
+                <a:ea typeface="Pretendard"/>
+                <a:cs typeface="Pretendard"/>
+              </a:rPr>
+              <a:t>UPDATE 마다 파일을 통째로 다시 쓰면 느리지 않나요?</a:t>
+            </a:r>
+          </a:p>
+          <a:p>
+            <a:pPr>
+              <a:lnSpc>
+                <a:spcPct val="130000"/>
+              </a:lnSpc>
+              <a:spcBef>
+                <a:spcPts val="300"/>
+              </a:spcBef>
+            </a:pPr>
+            <a:r>
+              <a:rPr sz="1875" b="0">
+                <a:solidFill>
+                  <a:srgbClr val="3D3D3D"/>
+                </a:solidFill>
+                <a:latin typeface="Pretendard"/>
+                <a:ea typeface="Pretendard"/>
+                <a:cs typeface="Pretendard"/>
+              </a:rPr>
+              <a:t>느리다 — 대량 배치 갱신에 맞고 건건이 수정하는 업무는 여전히 RDB, 4-3 의 MERGE INTO 가 배치 갱신</a:t>
+            </a:r>
+          </a:p>
+        </p:txBody>
+      </p:sp>
+      <p:sp>
+        <p:nvSpPr>
+          <p:cNvPr id="23" name="Rounded Rectangle 22"/>
+          <p:cNvSpPr/>
+          <p:nvPr/>
+        </p:nvSpPr>
+        <p:spPr>
+          <a:xfrm>
+            <a:off x="1143000" y="6496050"/>
+            <a:ext cx="16002000" cy="914400"/>
+          </a:xfrm>
+          <a:prstGeom prst="roundRect">
+            <a:avLst>
+              <a:gd name="adj" fmla="val 5208"/>
+            </a:avLst>
+          </a:prstGeom>
+          <a:solidFill>
+            <a:srgbClr val="FAFBFD"/>
+          </a:solidFill>
+          <a:ln w="9525">
+            <a:solidFill>
+              <a:srgbClr val="DCE1E8"/>
+            </a:solidFill>
+          </a:ln>
+          <a:effectLst/>
+        </p:spPr>
+        <p:txBody>
+          <a:bodyPr rtlCol="0" anchor="ctr" wrap="square"/>
+          <a:lstStyle/>
+          <a:p>
+            <a:pPr algn="ctr"/>
+          </a:p>
+        </p:txBody>
+      </p:sp>
+      <p:sp>
+        <p:nvSpPr>
+          <p:cNvPr id="24" name="Rectangle 23"/>
+          <p:cNvSpPr/>
+          <p:nvPr/>
+        </p:nvSpPr>
+        <p:spPr>
+          <a:xfrm>
+            <a:off x="1143000" y="6496050"/>
+            <a:ext cx="47625" cy="914400"/>
+          </a:xfrm>
+          <a:prstGeom prst="rect">
+            <a:avLst/>
+          </a:prstGeom>
+          <a:solidFill>
+            <a:srgbClr val="1E5BC6"/>
+          </a:solidFill>
+          <a:ln>
+            <a:noFill/>
+          </a:ln>
+          <a:effectLst/>
+        </p:spPr>
+        <p:txBody>
+          <a:bodyPr rtlCol="0" anchor="ctr" wrap="square"/>
+          <a:lstStyle/>
+          <a:p>
+            <a:pPr algn="ctr"/>
+          </a:p>
+        </p:txBody>
+      </p:sp>
+      <p:sp>
+        <p:nvSpPr>
+          <p:cNvPr id="25" name="Oval 24"/>
+          <p:cNvSpPr/>
+          <p:nvPr/>
+        </p:nvSpPr>
+        <p:spPr>
+          <a:xfrm>
+            <a:off x="1428750" y="6743700"/>
+            <a:ext cx="419100" cy="419100"/>
+          </a:xfrm>
+          <a:prstGeom prst="ellipse">
+            <a:avLst/>
+          </a:prstGeom>
+          <a:solidFill>
+            <a:srgbClr val="0D2B5E"/>
+          </a:solidFill>
+          <a:ln>
+            <a:noFill/>
+          </a:ln>
+          <a:effectLst/>
+        </p:spPr>
+        <p:txBody>
+          <a:bodyPr rtlCol="0" anchor="ctr" wrap="square"/>
+          <a:lstStyle/>
+          <a:p>
+            <a:pPr algn="ctr"/>
+          </a:p>
+        </p:txBody>
+      </p:sp>
+      <p:sp>
+        <p:nvSpPr>
+          <p:cNvPr id="26" name="TextBox 25"/>
+          <p:cNvSpPr txBox="1"/>
+          <p:nvPr/>
+        </p:nvSpPr>
+        <p:spPr>
+          <a:xfrm>
+            <a:off x="1428750" y="6810375"/>
+            <a:ext cx="419100" cy="304800"/>
+          </a:xfrm>
+          <a:prstGeom prst="rect">
+            <a:avLst/>
+          </a:prstGeom>
+          <a:noFill/>
+        </p:spPr>
+        <p:txBody>
+          <a:bodyPr wrap="square" lIns="0" rIns="0" tIns="0" bIns="0" anchor="t">
+            <a:spAutoFit/>
+          </a:bodyPr>
+          <a:lstStyle/>
+          <a:p>
+            <a:pPr algn="ctr">
+              <a:lnSpc>
+                <a:spcPct val="100000"/>
+              </a:lnSpc>
+            </a:pPr>
+            <a:r>
+              <a:rPr sz="1875" b="1">
+                <a:solidFill>
+                  <a:srgbClr val="FFFFFF"/>
+                </a:solidFill>
+                <a:latin typeface="Pretendard"/>
+                <a:ea typeface="Pretendard"/>
+                <a:cs typeface="Pretendard"/>
+              </a:rPr>
+              <a:t>4</a:t>
+            </a:r>
+          </a:p>
+        </p:txBody>
+      </p:sp>
+      <p:sp>
+        <p:nvSpPr>
+          <p:cNvPr id="27" name="TextBox 26"/>
+          <p:cNvSpPr txBox="1"/>
+          <p:nvPr/>
+        </p:nvSpPr>
+        <p:spPr>
+          <a:xfrm>
+            <a:off x="2057400" y="6591300"/>
+            <a:ext cx="14763750" cy="723900"/>
+          </a:xfrm>
+          <a:prstGeom prst="rect">
+            <a:avLst/>
+          </a:prstGeom>
+          <a:noFill/>
+        </p:spPr>
+        <p:txBody>
+          <a:bodyPr wrap="square" lIns="0" rIns="0" tIns="0" bIns="0" anchor="ctr">
+            <a:spAutoFit/>
+          </a:bodyPr>
+          <a:lstStyle/>
+          <a:p>
+            <a:pPr>
+              <a:lnSpc>
+                <a:spcPct val="120000"/>
+              </a:lnSpc>
+            </a:pPr>
+            <a:r>
+              <a:rPr sz="2175" b="1">
+                <a:solidFill>
+                  <a:srgbClr val="0D2B5E"/>
+                </a:solidFill>
+                <a:latin typeface="Pretendard"/>
+                <a:ea typeface="Pretendard"/>
+                <a:cs typeface="Pretendard"/>
+              </a:rPr>
+              <a:t>카탈로그가 죽으면 데이터도 잃나요?</a:t>
+            </a:r>
+          </a:p>
+          <a:p>
+            <a:pPr>
+              <a:lnSpc>
+                <a:spcPct val="130000"/>
+              </a:lnSpc>
+              <a:spcBef>
+                <a:spcPts val="300"/>
+              </a:spcBef>
+            </a:pPr>
+            <a:r>
+              <a:rPr sz="1875" b="0">
+                <a:solidFill>
+                  <a:srgbClr val="3D3D3D"/>
+                </a:solidFill>
+                <a:latin typeface="Pretendard"/>
+                <a:ea typeface="Pretendard"/>
+                <a:cs typeface="Pretendard"/>
+              </a:rPr>
+              <a:t>데이터 파일은 남는다 — 다만 「무엇이 현재 상태인지」를 잃으므로 카탈로그도 백업 대상</a:t>
+            </a:r>
+          </a:p>
+        </p:txBody>
+      </p:sp>
+      <p:sp>
+        <p:nvSpPr>
+          <p:cNvPr id="28" name="Rectangle 27"/>
           <p:cNvSpPr/>
           <p:nvPr/>
         </p:nvSpPr>
@@ -13962,7 +16775,7 @@
       </p:sp>
       <p:sp>
         <p:nvSpPr>
-          <p:cNvPr id="27" name="TextBox 26"/>
+          <p:cNvPr id="29" name="TextBox 28"/>
           <p:cNvSpPr txBox="1"/>
           <p:nvPr/>
         </p:nvSpPr>
@@ -14003,7 +16816,7 @@
       </p:sp>
       <p:sp>
         <p:nvSpPr>
-          <p:cNvPr id="28" name="TextBox 27"/>
+          <p:cNvPr id="30" name="TextBox 29"/>
           <p:cNvSpPr txBox="1"/>
           <p:nvPr/>
         </p:nvSpPr>
